--- a/Slides/Mod05/MOD05_Probabilistic_robotics.pptx
+++ b/Slides/Mod05/MOD05_Probabilistic_robotics.pptx
@@ -5829,7 +5829,28 @@
                 <a:ea typeface="Arial" pitchFamily="34" charset="-122"/>
                 <a:cs typeface="Arial" pitchFamily="34" charset="-120"/>
               </a:rPr>
-              <a:t>Often written as η (eta)</a:t>
+              <a:t>Often written as </a:t>
+            </a:r>
+            <a:br>
+              <a:rPr lang="en-US" sz="1200" dirty="0">
+                <a:solidFill>
+                  <a:srgbClr val="6B7280"/>
+                </a:solidFill>
+                <a:latin typeface="Arial" pitchFamily="34" charset="0"/>
+                <a:ea typeface="Arial" pitchFamily="34" charset="-122"/>
+                <a:cs typeface="Arial" pitchFamily="34" charset="-120"/>
+              </a:rPr>
+            </a:br>
+            <a:r>
+              <a:rPr lang="en-US" sz="1200" dirty="0">
+                <a:solidFill>
+                  <a:srgbClr val="6B7280"/>
+                </a:solidFill>
+                <a:latin typeface="Arial" pitchFamily="34" charset="0"/>
+                <a:ea typeface="Arial" pitchFamily="34" charset="-122"/>
+                <a:cs typeface="Arial" pitchFamily="34" charset="-120"/>
+              </a:rPr>
+              <a:t>η (eta)</a:t>
             </a:r>
             <a:endParaRPr lang="en-US" sz="1200" dirty="0"/>
           </a:p>
@@ -7473,8 +7494,8 @@
         </p:nvSpPr>
         <p:spPr>
           <a:xfrm>
-            <a:off x="274320" y="3200400"/>
-            <a:ext cx="8595360" cy="1371600"/>
+            <a:off x="274320" y="3048000"/>
+            <a:ext cx="8595360" cy="1524000"/>
           </a:xfrm>
           <a:prstGeom prst="rect">
             <a:avLst/>
@@ -8466,6 +8487,67 @@
           <a:chExt cx="0" cy="0"/>
         </a:xfrm>
       </p:grpSpPr>
+      <p:pic>
+        <p:nvPicPr>
+          <p:cNvPr id="1026" name="Picture 2">
+            <a:extLst>
+              <a:ext uri="{FF2B5EF4-FFF2-40B4-BE49-F238E27FC236}">
+                <a16:creationId xmlns:a16="http://schemas.microsoft.com/office/drawing/2014/main" id="{015E2AB3-B7A7-4B7B-9DB8-A670623729B9}"/>
+              </a:ext>
+            </a:extLst>
+          </p:cNvPr>
+          <p:cNvPicPr>
+            <a:picLocks noChangeAspect="1" noChangeArrowheads="1"/>
+          </p:cNvPicPr>
+          <p:nvPr/>
+        </p:nvPicPr>
+        <p:blipFill>
+          <a:blip r:embed="rId3">
+            <a:extLst>
+              <a:ext uri="{BEBA8EAE-BF5A-486C-A8C5-ECC9F3942E4B}">
+                <a14:imgProps xmlns:a14="http://schemas.microsoft.com/office/drawing/2010/main">
+                  <a14:imgLayer r:embed="rId4">
+                    <a14:imgEffect>
+                      <a14:backgroundRemoval t="9690" b="93411" l="8087" r="94872">
+                        <a14:foregroundMark x1="91815" y1="67700" x2="91815" y2="67700"/>
+                        <a14:foregroundMark x1="45562" y1="93411" x2="45562" y2="93411"/>
+                        <a14:foregroundMark x1="8185" y1="58527" x2="8185" y2="58527"/>
+                        <a14:foregroundMark x1="94872" y1="69638" x2="94872" y2="69638"/>
+                      </a14:backgroundRemoval>
+                    </a14:imgEffect>
+                  </a14:imgLayer>
+                </a14:imgProps>
+              </a:ext>
+              <a:ext uri="{28A0092B-C50C-407E-A947-70E740481C1C}">
+                <a14:useLocalDpi xmlns:a14="http://schemas.microsoft.com/office/drawing/2010/main" val="0"/>
+              </a:ext>
+            </a:extLst>
+          </a:blip>
+          <a:srcRect/>
+          <a:stretch>
+            <a:fillRect/>
+          </a:stretch>
+        </p:blipFill>
+        <p:spPr bwMode="auto">
+          <a:xfrm>
+            <a:off x="-691695" y="2468880"/>
+            <a:ext cx="5263695" cy="4017520"/>
+          </a:xfrm>
+          <a:prstGeom prst="rect">
+            <a:avLst/>
+          </a:prstGeom>
+          <a:noFill/>
+          <a:extLst>
+            <a:ext uri="{909E8E84-426E-40DD-AFC4-6F175D3DCCD1}">
+              <a14:hiddenFill xmlns:a14="http://schemas.microsoft.com/office/drawing/2010/main">
+                <a:solidFill>
+                  <a:srgbClr val="FFFFFF"/>
+                </a:solidFill>
+              </a14:hiddenFill>
+            </a:ext>
+          </a:extLst>
+        </p:spPr>
+      </p:pic>
       <p:sp>
         <p:nvSpPr>
           <p:cNvPr id="2" name="Shape 0"/>
@@ -8591,8 +8673,8 @@
           </a:effectLst>
         </p:spPr>
       </p:sp>
-      <mc:AlternateContent xmlns:mc="http://schemas.openxmlformats.org/markup-compatibility/2006">
-        <mc:Choice xmlns:a14="http://schemas.microsoft.com/office/drawing/2010/main" Requires="a14">
+      <mc:AlternateContent xmlns:mc="http://schemas.openxmlformats.org/markup-compatibility/2006" xmlns:a14="http://schemas.microsoft.com/office/drawing/2010/main">
+        <mc:Choice Requires="a14">
           <p:sp>
             <p:nvSpPr>
               <p:cNvPr id="6" name="Text 4"/>
@@ -8908,7 +8990,7 @@
             </p:txBody>
           </p:sp>
         </mc:Choice>
-        <mc:Fallback>
+        <mc:Fallback xmlns="">
           <p:sp>
             <p:nvSpPr>
               <p:cNvPr id="6" name="Text 4"/>
@@ -8926,7 +9008,7 @@
                 <a:avLst/>
               </a:prstGeom>
               <a:blipFill>
-                <a:blip r:embed="rId3"/>
+                <a:blip r:embed="rId5"/>
                 <a:stretch>
                   <a:fillRect t="-8000" b="-16000"/>
                 </a:stretch>
@@ -8987,243 +9069,264 @@
           </a:p>
         </p:txBody>
       </p:sp>
-      <p:sp>
-        <p:nvSpPr>
-          <p:cNvPr id="8" name="Shape 6"/>
-          <p:cNvSpPr/>
-          <p:nvPr/>
-        </p:nvSpPr>
-        <p:spPr>
-          <a:xfrm>
-            <a:off x="914400" y="1828800"/>
-            <a:ext cx="2743200" cy="1828800"/>
-          </a:xfrm>
-          <a:prstGeom prst="ellipse">
-            <a:avLst/>
-          </a:prstGeom>
-          <a:solidFill>
-            <a:srgbClr val="3B82F6">
-              <a:alpha val="30000"/>
-            </a:srgbClr>
-          </a:solidFill>
-          <a:ln w="25400">
+      <p:grpSp>
+        <p:nvGrpSpPr>
+          <p:cNvPr id="16" name="Group 15">
+            <a:extLst>
+              <a:ext uri="{FF2B5EF4-FFF2-40B4-BE49-F238E27FC236}">
+                <a16:creationId xmlns:a16="http://schemas.microsoft.com/office/drawing/2014/main" id="{A2D55F20-585B-41D0-975F-EE3E2C55975E}"/>
+              </a:ext>
+            </a:extLst>
+          </p:cNvPr>
+          <p:cNvGrpSpPr/>
+          <p:nvPr/>
+        </p:nvGrpSpPr>
+        <p:grpSpPr>
+          <a:xfrm>
+            <a:off x="664132" y="1325880"/>
+            <a:ext cx="2834640" cy="2194560"/>
+            <a:chOff x="914400" y="1463040"/>
+            <a:chExt cx="2834640" cy="2194560"/>
+          </a:xfrm>
+        </p:grpSpPr>
+        <p:sp>
+          <p:nvSpPr>
+            <p:cNvPr id="8" name="Shape 6"/>
+            <p:cNvSpPr/>
+            <p:nvPr/>
+          </p:nvSpPr>
+          <p:spPr>
+            <a:xfrm>
+              <a:off x="914400" y="1828800"/>
+              <a:ext cx="2743200" cy="1828800"/>
+            </a:xfrm>
+            <a:prstGeom prst="ellipse">
+              <a:avLst/>
+            </a:prstGeom>
             <a:solidFill>
-              <a:srgbClr val="3B82F6"/>
+              <a:srgbClr val="3B82F6">
+                <a:alpha val="30000"/>
+              </a:srgbClr>
             </a:solidFill>
-            <a:prstDash val="solid"/>
-          </a:ln>
-        </p:spPr>
-      </p:sp>
-      <p:sp>
-        <p:nvSpPr>
-          <p:cNvPr id="9" name="Shape 7"/>
-          <p:cNvSpPr/>
-          <p:nvPr/>
-        </p:nvSpPr>
-        <p:spPr>
-          <a:xfrm>
-            <a:off x="1371600" y="2103120"/>
-            <a:ext cx="1828800" cy="1280160"/>
-          </a:xfrm>
-          <a:prstGeom prst="ellipse">
-            <a:avLst/>
-          </a:prstGeom>
-          <a:solidFill>
-            <a:srgbClr val="3B82F6">
-              <a:alpha val="50000"/>
-            </a:srgbClr>
-          </a:solidFill>
-          <a:ln w="25400">
+            <a:ln w="25400">
+              <a:solidFill>
+                <a:srgbClr val="3B82F6"/>
+              </a:solidFill>
+              <a:prstDash val="solid"/>
+            </a:ln>
+          </p:spPr>
+        </p:sp>
+        <p:sp>
+          <p:nvSpPr>
+            <p:cNvPr id="9" name="Shape 7"/>
+            <p:cNvSpPr/>
+            <p:nvPr/>
+          </p:nvSpPr>
+          <p:spPr>
+            <a:xfrm>
+              <a:off x="1371600" y="2103120"/>
+              <a:ext cx="1828800" cy="1280160"/>
+            </a:xfrm>
+            <a:prstGeom prst="ellipse">
+              <a:avLst/>
+            </a:prstGeom>
             <a:solidFill>
-              <a:srgbClr val="3B82F6"/>
+              <a:srgbClr val="3B82F6">
+                <a:alpha val="50000"/>
+              </a:srgbClr>
             </a:solidFill>
-            <a:prstDash val="dash"/>
-          </a:ln>
-        </p:spPr>
-      </p:sp>
-      <p:sp>
-        <p:nvSpPr>
-          <p:cNvPr id="10" name="Shape 8"/>
-          <p:cNvSpPr/>
-          <p:nvPr/>
-        </p:nvSpPr>
-        <p:spPr>
-          <a:xfrm>
-            <a:off x="1874520" y="2423160"/>
-            <a:ext cx="822960" cy="548640"/>
-          </a:xfrm>
-          <a:prstGeom prst="ellipse">
-            <a:avLst/>
-          </a:prstGeom>
-          <a:solidFill>
-            <a:srgbClr val="3B82F6">
-              <a:alpha val="70000"/>
-            </a:srgbClr>
-          </a:solidFill>
-          <a:ln w="25400">
+            <a:ln w="25400">
+              <a:solidFill>
+                <a:srgbClr val="3B82F6"/>
+              </a:solidFill>
+              <a:prstDash val="dash"/>
+            </a:ln>
+          </p:spPr>
+        </p:sp>
+        <p:sp>
+          <p:nvSpPr>
+            <p:cNvPr id="10" name="Shape 8"/>
+            <p:cNvSpPr/>
+            <p:nvPr/>
+          </p:nvSpPr>
+          <p:spPr>
+            <a:xfrm>
+              <a:off x="1874520" y="2423160"/>
+              <a:ext cx="822960" cy="548640"/>
+            </a:xfrm>
+            <a:prstGeom prst="ellipse">
+              <a:avLst/>
+            </a:prstGeom>
             <a:solidFill>
-              <a:srgbClr val="3B82F6"/>
+              <a:srgbClr val="3B82F6">
+                <a:alpha val="70000"/>
+              </a:srgbClr>
             </a:solidFill>
-            <a:prstDash val="solid"/>
-          </a:ln>
-        </p:spPr>
-      </p:sp>
-      <p:sp>
-        <p:nvSpPr>
-          <p:cNvPr id="11" name="Text 9"/>
-          <p:cNvSpPr/>
-          <p:nvPr/>
-        </p:nvSpPr>
-        <p:spPr>
-          <a:xfrm>
-            <a:off x="2103120" y="2468880"/>
-            <a:ext cx="365760" cy="365760"/>
-          </a:xfrm>
-          <a:prstGeom prst="rect">
-            <a:avLst/>
-          </a:prstGeom>
-          <a:noFill/>
-          <a:ln/>
-        </p:spPr>
-        <p:txBody>
-          <a:bodyPr wrap="square" rtlCol="0" anchor="ctr"/>
-          <a:lstStyle/>
-          <a:p>
-            <a:pPr marL="0" indent="0" algn="ctr">
-              <a:buNone/>
-            </a:pPr>
-            <a:r>
-              <a:rPr lang="en-US" sz="1600" b="1" dirty="0">
-                <a:solidFill>
-                  <a:srgbClr val="FFFFFF"/>
-                </a:solidFill>
-                <a:latin typeface="Arial" pitchFamily="34" charset="0"/>
-                <a:ea typeface="Arial" pitchFamily="34" charset="-122"/>
-                <a:cs typeface="Arial" pitchFamily="34" charset="-120"/>
-              </a:rPr>
-              <a:t>μ</a:t>
-            </a:r>
-            <a:endParaRPr lang="en-US" sz="1600" dirty="0"/>
-          </a:p>
-        </p:txBody>
-      </p:sp>
-      <p:sp>
-        <p:nvSpPr>
-          <p:cNvPr id="12" name="Text 10"/>
-          <p:cNvSpPr/>
-          <p:nvPr/>
-        </p:nvSpPr>
-        <p:spPr>
-          <a:xfrm>
-            <a:off x="2377440" y="2011680"/>
-            <a:ext cx="457200" cy="274320"/>
-          </a:xfrm>
-          <a:prstGeom prst="rect">
-            <a:avLst/>
-          </a:prstGeom>
-          <a:noFill/>
-          <a:ln/>
-        </p:spPr>
-        <p:txBody>
-          <a:bodyPr wrap="square" rtlCol="0" anchor="ctr"/>
-          <a:lstStyle/>
-          <a:p>
-            <a:pPr marL="0" indent="0">
-              <a:buNone/>
-            </a:pPr>
-            <a:r>
-              <a:rPr lang="en-US" sz="1200" b="1" dirty="0">
-                <a:solidFill>
-                  <a:srgbClr val="3B82F6"/>
-                </a:solidFill>
-                <a:latin typeface="Arial" pitchFamily="34" charset="0"/>
-                <a:ea typeface="Arial" pitchFamily="34" charset="-122"/>
-                <a:cs typeface="Arial" pitchFamily="34" charset="-120"/>
-              </a:rPr>
-              <a:t>1σ</a:t>
-            </a:r>
-            <a:endParaRPr lang="en-US" sz="1200" dirty="0"/>
-          </a:p>
-        </p:txBody>
-      </p:sp>
-      <p:sp>
-        <p:nvSpPr>
-          <p:cNvPr id="13" name="Text 11"/>
-          <p:cNvSpPr/>
-          <p:nvPr/>
-        </p:nvSpPr>
-        <p:spPr>
-          <a:xfrm>
-            <a:off x="2834640" y="1737360"/>
-            <a:ext cx="457200" cy="274320"/>
-          </a:xfrm>
-          <a:prstGeom prst="rect">
-            <a:avLst/>
-          </a:prstGeom>
-          <a:noFill/>
-          <a:ln/>
-        </p:spPr>
-        <p:txBody>
-          <a:bodyPr wrap="square" rtlCol="0" anchor="ctr"/>
-          <a:lstStyle/>
-          <a:p>
-            <a:pPr marL="0" indent="0">
-              <a:buNone/>
-            </a:pPr>
-            <a:r>
-              <a:rPr lang="en-US" sz="1200" b="1" dirty="0">
-                <a:solidFill>
-                  <a:srgbClr val="3B82F6"/>
-                </a:solidFill>
-                <a:latin typeface="Arial" pitchFamily="34" charset="0"/>
-                <a:ea typeface="Arial" pitchFamily="34" charset="-122"/>
-                <a:cs typeface="Arial" pitchFamily="34" charset="-120"/>
-              </a:rPr>
-              <a:t>2σ</a:t>
-            </a:r>
-            <a:endParaRPr lang="en-US" sz="1200" dirty="0"/>
-          </a:p>
-        </p:txBody>
-      </p:sp>
-      <p:sp>
-        <p:nvSpPr>
-          <p:cNvPr id="14" name="Text 12"/>
-          <p:cNvSpPr/>
-          <p:nvPr/>
-        </p:nvSpPr>
-        <p:spPr>
-          <a:xfrm>
-            <a:off x="3291840" y="1463040"/>
-            <a:ext cx="457200" cy="274320"/>
-          </a:xfrm>
-          <a:prstGeom prst="rect">
-            <a:avLst/>
-          </a:prstGeom>
-          <a:noFill/>
-          <a:ln/>
-        </p:spPr>
-        <p:txBody>
-          <a:bodyPr wrap="square" rtlCol="0" anchor="ctr"/>
-          <a:lstStyle/>
-          <a:p>
-            <a:pPr marL="0" indent="0">
-              <a:buNone/>
-            </a:pPr>
-            <a:r>
-              <a:rPr lang="en-US" sz="1200" b="1" dirty="0">
-                <a:solidFill>
-                  <a:srgbClr val="3B82F6"/>
-                </a:solidFill>
-                <a:latin typeface="Arial" pitchFamily="34" charset="0"/>
-                <a:ea typeface="Arial" pitchFamily="34" charset="-122"/>
-                <a:cs typeface="Arial" pitchFamily="34" charset="-120"/>
-              </a:rPr>
-              <a:t>3σ</a:t>
-            </a:r>
-            <a:endParaRPr lang="en-US" sz="1200" dirty="0"/>
-          </a:p>
-        </p:txBody>
-      </p:sp>
+            <a:ln w="25400">
+              <a:solidFill>
+                <a:srgbClr val="3B82F6"/>
+              </a:solidFill>
+              <a:prstDash val="solid"/>
+            </a:ln>
+          </p:spPr>
+        </p:sp>
+        <p:sp>
+          <p:nvSpPr>
+            <p:cNvPr id="11" name="Text 9"/>
+            <p:cNvSpPr/>
+            <p:nvPr/>
+          </p:nvSpPr>
+          <p:spPr>
+            <a:xfrm>
+              <a:off x="2103120" y="2468880"/>
+              <a:ext cx="365760" cy="365760"/>
+            </a:xfrm>
+            <a:prstGeom prst="rect">
+              <a:avLst/>
+            </a:prstGeom>
+            <a:noFill/>
+            <a:ln/>
+          </p:spPr>
+          <p:txBody>
+            <a:bodyPr wrap="square" rtlCol="0" anchor="ctr"/>
+            <a:lstStyle/>
+            <a:p>
+              <a:pPr marL="0" indent="0" algn="ctr">
+                <a:buNone/>
+              </a:pPr>
+              <a:r>
+                <a:rPr lang="en-US" sz="1600" b="1" dirty="0">
+                  <a:solidFill>
+                    <a:srgbClr val="FFFFFF"/>
+                  </a:solidFill>
+                  <a:latin typeface="Arial" pitchFamily="34" charset="0"/>
+                  <a:ea typeface="Arial" pitchFamily="34" charset="-122"/>
+                  <a:cs typeface="Arial" pitchFamily="34" charset="-120"/>
+                </a:rPr>
+                <a:t>μ</a:t>
+              </a:r>
+              <a:endParaRPr lang="en-US" sz="1600" dirty="0"/>
+            </a:p>
+          </p:txBody>
+        </p:sp>
+        <p:sp>
+          <p:nvSpPr>
+            <p:cNvPr id="12" name="Text 10"/>
+            <p:cNvSpPr/>
+            <p:nvPr/>
+          </p:nvSpPr>
+          <p:spPr>
+            <a:xfrm>
+              <a:off x="2377440" y="2011680"/>
+              <a:ext cx="457200" cy="274320"/>
+            </a:xfrm>
+            <a:prstGeom prst="rect">
+              <a:avLst/>
+            </a:prstGeom>
+            <a:noFill/>
+            <a:ln/>
+          </p:spPr>
+          <p:txBody>
+            <a:bodyPr wrap="square" rtlCol="0" anchor="ctr"/>
+            <a:lstStyle/>
+            <a:p>
+              <a:pPr marL="0" indent="0">
+                <a:buNone/>
+              </a:pPr>
+              <a:r>
+                <a:rPr lang="en-US" sz="1200" b="1" dirty="0">
+                  <a:solidFill>
+                    <a:srgbClr val="3B82F6"/>
+                  </a:solidFill>
+                  <a:latin typeface="Arial" pitchFamily="34" charset="0"/>
+                  <a:ea typeface="Arial" pitchFamily="34" charset="-122"/>
+                  <a:cs typeface="Arial" pitchFamily="34" charset="-120"/>
+                </a:rPr>
+                <a:t>1σ</a:t>
+              </a:r>
+              <a:endParaRPr lang="en-US" sz="1200" dirty="0"/>
+            </a:p>
+          </p:txBody>
+        </p:sp>
+        <p:sp>
+          <p:nvSpPr>
+            <p:cNvPr id="13" name="Text 11"/>
+            <p:cNvSpPr/>
+            <p:nvPr/>
+          </p:nvSpPr>
+          <p:spPr>
+            <a:xfrm>
+              <a:off x="2834640" y="1737360"/>
+              <a:ext cx="457200" cy="274320"/>
+            </a:xfrm>
+            <a:prstGeom prst="rect">
+              <a:avLst/>
+            </a:prstGeom>
+            <a:noFill/>
+            <a:ln/>
+          </p:spPr>
+          <p:txBody>
+            <a:bodyPr wrap="square" rtlCol="0" anchor="ctr"/>
+            <a:lstStyle/>
+            <a:p>
+              <a:pPr marL="0" indent="0">
+                <a:buNone/>
+              </a:pPr>
+              <a:r>
+                <a:rPr lang="en-US" sz="1200" b="1" dirty="0">
+                  <a:solidFill>
+                    <a:srgbClr val="3B82F6"/>
+                  </a:solidFill>
+                  <a:latin typeface="Arial" pitchFamily="34" charset="0"/>
+                  <a:ea typeface="Arial" pitchFamily="34" charset="-122"/>
+                  <a:cs typeface="Arial" pitchFamily="34" charset="-120"/>
+                </a:rPr>
+                <a:t>2σ</a:t>
+              </a:r>
+              <a:endParaRPr lang="en-US" sz="1200" dirty="0"/>
+            </a:p>
+          </p:txBody>
+        </p:sp>
+        <p:sp>
+          <p:nvSpPr>
+            <p:cNvPr id="14" name="Text 12"/>
+            <p:cNvSpPr/>
+            <p:nvPr/>
+          </p:nvSpPr>
+          <p:spPr>
+            <a:xfrm>
+              <a:off x="3291840" y="1463040"/>
+              <a:ext cx="457200" cy="274320"/>
+            </a:xfrm>
+            <a:prstGeom prst="rect">
+              <a:avLst/>
+            </a:prstGeom>
+            <a:noFill/>
+            <a:ln/>
+          </p:spPr>
+          <p:txBody>
+            <a:bodyPr wrap="square" rtlCol="0" anchor="ctr"/>
+            <a:lstStyle/>
+            <a:p>
+              <a:pPr marL="0" indent="0">
+                <a:buNone/>
+              </a:pPr>
+              <a:r>
+                <a:rPr lang="en-US" sz="1200" b="1" dirty="0">
+                  <a:solidFill>
+                    <a:srgbClr val="3B82F6"/>
+                  </a:solidFill>
+                  <a:latin typeface="Arial" pitchFamily="34" charset="0"/>
+                  <a:ea typeface="Arial" pitchFamily="34" charset="-122"/>
+                  <a:cs typeface="Arial" pitchFamily="34" charset="-120"/>
+                </a:rPr>
+                <a:t>3σ</a:t>
+              </a:r>
+              <a:endParaRPr lang="en-US" sz="1200" dirty="0"/>
+            </a:p>
+          </p:txBody>
+        </p:sp>
+      </p:grpSp>
       <p:sp>
         <p:nvSpPr>
           <p:cNvPr id="15" name="Text 13"/>
@@ -9700,8 +9803,8 @@
         </p:nvSpPr>
         <p:spPr>
           <a:xfrm>
-            <a:off x="274320" y="1051560"/>
-            <a:ext cx="4114800" cy="1828800"/>
+            <a:off x="274320" y="1051559"/>
+            <a:ext cx="4114800" cy="2159473"/>
           </a:xfrm>
           <a:prstGeom prst="rect">
             <a:avLst/>
@@ -9726,8 +9829,8 @@
           </a:p>
         </p:txBody>
       </p:sp>
-      <mc:AlternateContent xmlns:mc="http://schemas.openxmlformats.org/markup-compatibility/2006">
-        <mc:Choice xmlns:a14="http://schemas.microsoft.com/office/drawing/2010/main" Requires="a14">
+      <mc:AlternateContent xmlns:mc="http://schemas.openxmlformats.org/markup-compatibility/2006" xmlns:a14="http://schemas.microsoft.com/office/drawing/2010/main">
+        <mc:Choice Requires="a14">
           <p:sp>
             <p:nvSpPr>
               <p:cNvPr id="7" name="Text 5"/>
@@ -9736,7 +9839,7 @@
             </p:nvSpPr>
             <p:spPr>
               <a:xfrm>
-                <a:off x="411480" y="1051561"/>
+                <a:off x="411480" y="1156682"/>
                 <a:ext cx="3840480" cy="777240"/>
               </a:xfrm>
               <a:prstGeom prst="rect">
@@ -9831,6 +9934,7 @@
                 <a:endParaRPr lang="en-US" sz="1400" dirty="0"/>
               </a:p>
               <a:p>
+                <a:pPr/>
                 <a14:m>
                   <m:oMathPara xmlns:m="http://schemas.openxmlformats.org/officeDocument/2006/math">
                     <m:oMathParaPr>
@@ -10366,7 +10470,7 @@
             </p:txBody>
           </p:sp>
         </mc:Choice>
-        <mc:Fallback>
+        <mc:Fallback xmlns="">
           <p:sp>
             <p:nvSpPr>
               <p:cNvPr id="7" name="Text 5"/>
@@ -10377,7 +10481,7 @@
             </p:nvSpPr>
             <p:spPr>
               <a:xfrm>
-                <a:off x="411480" y="1051561"/>
+                <a:off x="411480" y="1156682"/>
                 <a:ext cx="3840480" cy="777240"/>
               </a:xfrm>
               <a:prstGeom prst="rect">
@@ -10386,7 +10490,7 @@
               <a:blipFill>
                 <a:blip r:embed="rId3"/>
                 <a:stretch>
-                  <a:fillRect b="-27559"/>
+                  <a:fillRect b="-28346"/>
                 </a:stretch>
               </a:blipFill>
               <a:ln/>
@@ -10406,8 +10510,8 @@
           </p:sp>
         </mc:Fallback>
       </mc:AlternateContent>
-      <mc:AlternateContent xmlns:mc="http://schemas.openxmlformats.org/markup-compatibility/2006">
-        <mc:Choice xmlns:a14="http://schemas.microsoft.com/office/drawing/2010/main" Requires="a14">
+      <mc:AlternateContent xmlns:mc="http://schemas.openxmlformats.org/markup-compatibility/2006" xmlns:a14="http://schemas.microsoft.com/office/drawing/2010/main">
+        <mc:Choice Requires="a14">
           <p:sp>
             <p:nvSpPr>
               <p:cNvPr id="8" name="Text 6"/>
@@ -10416,7 +10520,7 @@
             </p:nvSpPr>
             <p:spPr>
               <a:xfrm>
-                <a:off x="365760" y="1965960"/>
+                <a:off x="472085" y="2197610"/>
                 <a:ext cx="3840480" cy="618134"/>
               </a:xfrm>
               <a:prstGeom prst="rect">
@@ -10488,7 +10592,18 @@
                           <a:ea typeface="Arial" pitchFamily="34" charset="-122"/>
                           <a:cs typeface="Arial" pitchFamily="34" charset="-120"/>
                         </a:rPr>
-                        <m:t>₁ = </m:t>
+                        <m:t>₁</m:t>
+                      </m:r>
+                      <m:r>
+                        <a:rPr lang="en-US" sz="1200" i="1" dirty="0" smtClean="0">
+                          <a:solidFill>
+                            <a:srgbClr val="1F2937"/>
+                          </a:solidFill>
+                          <a:latin typeface="Cambria Math" panose="02040503050406030204" pitchFamily="18" charset="0"/>
+                          <a:ea typeface="Arial" pitchFamily="34" charset="-122"/>
+                          <a:cs typeface="Arial" pitchFamily="34" charset="-120"/>
+                        </a:rPr>
+                        <m:t> = </m:t>
                       </m:r>
                       <m:r>
                         <a:rPr lang="en-US" sz="1200" i="1" dirty="0" smtClean="0">
@@ -10510,7 +10625,18 @@
                           <a:ea typeface="Arial" pitchFamily="34" charset="-122"/>
                           <a:cs typeface="Arial" pitchFamily="34" charset="-120"/>
                         </a:rPr>
-                        <m:t>₁₁·</m:t>
+                        <m:t>₁₁</m:t>
+                      </m:r>
+                      <m:r>
+                        <a:rPr lang="en-US" sz="1200" i="1" dirty="0" smtClean="0">
+                          <a:solidFill>
+                            <a:srgbClr val="1F2937"/>
+                          </a:solidFill>
+                          <a:latin typeface="Cambria Math" panose="02040503050406030204" pitchFamily="18" charset="0"/>
+                          <a:ea typeface="Arial" pitchFamily="34" charset="-122"/>
+                          <a:cs typeface="Arial" pitchFamily="34" charset="-120"/>
+                        </a:rPr>
+                        <m:t>·</m:t>
                       </m:r>
                       <m:r>
                         <a:rPr lang="en-US" sz="1200" i="1" dirty="0" smtClean="0">
@@ -10532,7 +10658,18 @@
                           <a:ea typeface="Arial" pitchFamily="34" charset="-122"/>
                           <a:cs typeface="Arial" pitchFamily="34" charset="-120"/>
                         </a:rPr>
-                        <m:t>₁ + </m:t>
+                        <m:t>₁</m:t>
+                      </m:r>
+                      <m:r>
+                        <a:rPr lang="en-US" sz="1200" i="1" dirty="0" smtClean="0">
+                          <a:solidFill>
+                            <a:srgbClr val="1F2937"/>
+                          </a:solidFill>
+                          <a:latin typeface="Cambria Math" panose="02040503050406030204" pitchFamily="18" charset="0"/>
+                          <a:ea typeface="Arial" pitchFamily="34" charset="-122"/>
+                          <a:cs typeface="Arial" pitchFamily="34" charset="-120"/>
+                        </a:rPr>
+                        <m:t> + </m:t>
                       </m:r>
                       <m:r>
                         <a:rPr lang="en-US" sz="1200" i="1" dirty="0" smtClean="0">
@@ -10554,7 +10691,18 @@
                           <a:ea typeface="Arial" pitchFamily="34" charset="-122"/>
                           <a:cs typeface="Arial" pitchFamily="34" charset="-120"/>
                         </a:rPr>
-                        <m:t>₁₂·</m:t>
+                        <m:t>₁₂</m:t>
+                      </m:r>
+                      <m:r>
+                        <a:rPr lang="en-US" sz="1200" i="1" dirty="0" smtClean="0">
+                          <a:solidFill>
+                            <a:srgbClr val="1F2937"/>
+                          </a:solidFill>
+                          <a:latin typeface="Cambria Math" panose="02040503050406030204" pitchFamily="18" charset="0"/>
+                          <a:ea typeface="Arial" pitchFamily="34" charset="-122"/>
+                          <a:cs typeface="Arial" pitchFamily="34" charset="-120"/>
+                        </a:rPr>
+                        <m:t>·</m:t>
                       </m:r>
                       <m:r>
                         <a:rPr lang="en-US" sz="1200" i="1" dirty="0" smtClean="0">
@@ -10586,7 +10734,7 @@
             </p:txBody>
           </p:sp>
         </mc:Choice>
-        <mc:Fallback>
+        <mc:Fallback xmlns="">
           <p:sp>
             <p:nvSpPr>
               <p:cNvPr id="8" name="Text 6"/>
@@ -10597,7 +10745,7 @@
             </p:nvSpPr>
             <p:spPr>
               <a:xfrm>
-                <a:off x="365760" y="1965960"/>
+                <a:off x="472085" y="2197610"/>
                 <a:ext cx="3840480" cy="618134"/>
               </a:xfrm>
               <a:prstGeom prst="rect">
@@ -10935,8 +11083,8 @@
           </a:effectLst>
         </p:spPr>
       </p:sp>
-      <mc:AlternateContent xmlns:mc="http://schemas.openxmlformats.org/markup-compatibility/2006">
-        <mc:Choice xmlns:a14="http://schemas.microsoft.com/office/drawing/2010/main" Requires="a14">
+      <mc:AlternateContent xmlns:mc="http://schemas.openxmlformats.org/markup-compatibility/2006" xmlns:a14="http://schemas.microsoft.com/office/drawing/2010/main">
+        <mc:Choice Requires="a14">
           <p:sp>
             <p:nvSpPr>
               <p:cNvPr id="6" name="Text 4"/>
@@ -10959,7 +11107,7 @@
               <a:lstStyle/>
               <a:p>
                 <a:r>
-                  <a:rPr lang="en-US" sz="1400" b="1" dirty="0">
+                  <a:rPr lang="en-US" sz="1400" dirty="0">
                     <a:solidFill>
                       <a:srgbClr val="1E3A5F"/>
                     </a:solidFill>
@@ -10976,7 +11124,7 @@
                         <m:begChr m:val="["/>
                         <m:endChr m:val="]"/>
                         <m:ctrlPr>
-                          <a:rPr lang="en-US" sz="1400" b="1" i="1" smtClean="0">
+                          <a:rPr lang="en-US" sz="1400" i="1" smtClean="0">
                             <a:solidFill>
                               <a:srgbClr val="1E3A5F"/>
                             </a:solidFill>
@@ -10997,7 +11145,7 @@
                               </m:mc>
                             </m:mcs>
                             <m:ctrlPr>
-                              <a:rPr lang="en-US" sz="1400" b="1" i="1" smtClean="0">
+                              <a:rPr lang="en-US" sz="1400" i="1" smtClean="0">
                                 <a:solidFill>
                                   <a:srgbClr val="1E3A5F"/>
                                 </a:solidFill>
@@ -11011,7 +11159,7 @@
                               <m:sSubSup>
                                 <m:sSubSupPr>
                                   <m:ctrlPr>
-                                    <a:rPr lang="en-US" sz="1400" b="1" i="1" dirty="0">
+                                    <a:rPr lang="en-US" sz="1400" i="1" dirty="0">
                                       <a:solidFill>
                                         <a:srgbClr val="1E3A5F"/>
                                       </a:solidFill>
@@ -11022,10 +11170,7 @@
                                 </m:sSubSupPr>
                                 <m:e>
                                   <m:r>
-                                    <m:rPr>
-                                      <m:sty m:val="p"/>
-                                    </m:rPr>
-                                    <a:rPr lang="en-US" sz="1400" b="1" dirty="0">
+                                    <a:rPr lang="en-US" sz="1400" b="0" i="1" dirty="0">
                                       <a:solidFill>
                                         <a:srgbClr val="1E3A5F"/>
                                       </a:solidFill>
@@ -11033,15 +11178,12 @@
                                       <a:ea typeface="Arial" pitchFamily="34" charset="-122"/>
                                       <a:cs typeface="Arial" pitchFamily="34" charset="-120"/>
                                     </a:rPr>
-                                    <m:t>σ</m:t>
+                                    <m:t>𝜎</m:t>
                                   </m:r>
                                 </m:e>
                                 <m:sub>
                                   <m:r>
-                                    <m:rPr>
-                                      <m:sty m:val="p"/>
-                                    </m:rPr>
-                                    <a:rPr lang="en-US" sz="1400" b="1" dirty="0">
+                                    <a:rPr lang="en-US" sz="1400" b="0" i="1" dirty="0">
                                       <a:solidFill>
                                         <a:srgbClr val="1E3A5F"/>
                                       </a:solidFill>
@@ -11049,12 +11191,12 @@
                                       <a:ea typeface="Arial" pitchFamily="34" charset="-122"/>
                                       <a:cs typeface="Arial" pitchFamily="34" charset="-120"/>
                                     </a:rPr>
-                                    <m:t>x</m:t>
+                                    <m:t>𝑥</m:t>
                                   </m:r>
                                 </m:sub>
                                 <m:sup>
                                   <m:r>
-                                    <a:rPr lang="de-DE" sz="1400" b="1" dirty="0">
+                                    <a:rPr lang="de-DE" sz="1400" b="0" i="1" dirty="0">
                                       <a:solidFill>
                                         <a:srgbClr val="1E3A5F"/>
                                       </a:solidFill>
@@ -11067,7 +11209,7 @@
                                 </m:sup>
                               </m:sSubSup>
                               <m:r>
-                                <a:rPr lang="en-US" sz="1400" b="1" i="1" dirty="0">
+                                <a:rPr lang="en-US" sz="1400" b="0" i="1" dirty="0">
                                   <a:solidFill>
                                     <a:srgbClr val="1E3A5F"/>
                                   </a:solidFill>
@@ -11079,10 +11221,21 @@
                               </m:r>
                             </m:e>
                             <m:e>
-                              <m:sSub>
-                                <m:sSubPr>
+                              <m:r>
+                                <a:rPr lang="de-DE" sz="1400" b="0" i="1" dirty="0" smtClean="0">
+                                  <a:solidFill>
+                                    <a:srgbClr val="1E3A5F"/>
+                                  </a:solidFill>
+                                  <a:latin typeface="Cambria Math" panose="02040503050406030204" pitchFamily="18" charset="0"/>
+                                  <a:ea typeface="Arial" pitchFamily="34" charset="-122"/>
+                                  <a:cs typeface="Arial" pitchFamily="34" charset="-120"/>
+                                </a:rPr>
+                                <m:t> </m:t>
+                              </m:r>
+                              <m:sSubSup>
+                                <m:sSubSupPr>
                                   <m:ctrlPr>
-                                    <a:rPr lang="en-US" sz="1400" b="1" i="1" dirty="0">
+                                    <a:rPr lang="en-US" sz="1400" i="1" dirty="0">
                                       <a:solidFill>
                                         <a:srgbClr val="1E3A5F"/>
                                       </a:solidFill>
@@ -11091,13 +11244,10 @@
                                       <a:cs typeface="Arial" pitchFamily="34" charset="-120"/>
                                     </a:rPr>
                                   </m:ctrlPr>
-                                </m:sSubPr>
+                                </m:sSubSupPr>
                                 <m:e>
                                   <m:r>
-                                    <m:rPr>
-                                      <m:sty m:val="p"/>
-                                    </m:rPr>
-                                    <a:rPr lang="en-US" sz="1400" b="1" dirty="0">
+                                    <a:rPr lang="en-US" sz="1400" b="0" i="1" dirty="0">
                                       <a:solidFill>
                                         <a:srgbClr val="1E3A5F"/>
                                       </a:solidFill>
@@ -11105,7 +11255,7 @@
                                       <a:ea typeface="Arial" pitchFamily="34" charset="-122"/>
                                       <a:cs typeface="Arial" pitchFamily="34" charset="-120"/>
                                     </a:rPr>
-                                    <m:t>σ</m:t>
+                                    <m:t>𝜎</m:t>
                                   </m:r>
                                 </m:e>
                                 <m:sub>
@@ -11113,7 +11263,7 @@
                                     <m:rPr>
                                       <m:sty m:val="p"/>
                                     </m:rPr>
-                                    <a:rPr lang="en-US" sz="1400" b="1" dirty="0">
+                                    <a:rPr lang="en-US" sz="1400" b="0" dirty="0">
                                       <a:solidFill>
                                         <a:srgbClr val="1E3A5F"/>
                                       </a:solidFill>
@@ -11124,9 +11274,22 @@
                                     <m:t>xy</m:t>
                                   </m:r>
                                 </m:sub>
-                              </m:sSub>
+                                <m:sup>
+                                  <m:r>
+                                    <a:rPr lang="en-US" sz="1400" b="0" i="1" dirty="0" smtClean="0">
+                                      <a:solidFill>
+                                        <a:srgbClr val="1E3A5F"/>
+                                      </a:solidFill>
+                                      <a:latin typeface="Cambria Math" panose="02040503050406030204" pitchFamily="18" charset="0"/>
+                                      <a:ea typeface="Arial" pitchFamily="34" charset="-122"/>
+                                      <a:cs typeface="Arial" pitchFamily="34" charset="-120"/>
+                                    </a:rPr>
+                                    <m:t>2</m:t>
+                                  </m:r>
+                                </m:sup>
+                              </m:sSubSup>
                               <m:r>
-                                <a:rPr lang="en-US" sz="1400" b="1" i="1" dirty="0">
+                                <a:rPr lang="en-US" sz="1400" b="0" i="1" dirty="0">
                                   <a:solidFill>
                                     <a:srgbClr val="1E3A5F"/>
                                   </a:solidFill>
@@ -11143,7 +11306,7 @@
                               <m:sSubSup>
                                 <m:sSubSupPr>
                                   <m:ctrlPr>
-                                    <a:rPr lang="en-US" sz="1400" b="1" i="1" dirty="0">
+                                    <a:rPr lang="en-US" sz="1400" i="1" dirty="0">
                                       <a:solidFill>
                                         <a:srgbClr val="1E3A5F"/>
                                       </a:solidFill>
@@ -11155,10 +11318,7 @@
                                 </m:sSubSupPr>
                                 <m:e>
                                   <m:r>
-                                    <m:rPr>
-                                      <m:sty m:val="p"/>
-                                    </m:rPr>
-                                    <a:rPr lang="en-US" sz="1400" b="1" dirty="0">
+                                    <a:rPr lang="en-US" sz="1400" b="0" i="1" dirty="0">
                                       <a:solidFill>
                                         <a:srgbClr val="1E3A5F"/>
                                       </a:solidFill>
@@ -11166,15 +11326,12 @@
                                       <a:ea typeface="Arial" pitchFamily="34" charset="-122"/>
                                       <a:cs typeface="Arial" pitchFamily="34" charset="-120"/>
                                     </a:rPr>
-                                    <m:t>σ</m:t>
+                                    <m:t>𝜎</m:t>
                                   </m:r>
                                 </m:e>
                                 <m:sub>
                                   <m:r>
-                                    <m:rPr>
-                                      <m:sty m:val="p"/>
-                                    </m:rPr>
-                                    <a:rPr lang="de-DE" sz="1400" b="1" dirty="0">
+                                    <a:rPr lang="de-DE" sz="1400" b="0" i="1" dirty="0">
                                       <a:solidFill>
                                         <a:srgbClr val="1E3A5F"/>
                                       </a:solidFill>
@@ -11182,13 +11339,10 @@
                                       <a:ea typeface="Arial" pitchFamily="34" charset="-122"/>
                                       <a:cs typeface="Arial" pitchFamily="34" charset="-120"/>
                                     </a:rPr>
-                                    <m:t>y</m:t>
+                                    <m:t>𝑦</m:t>
                                   </m:r>
                                   <m:r>
-                                    <m:rPr>
-                                      <m:sty m:val="p"/>
-                                    </m:rPr>
-                                    <a:rPr lang="en-US" sz="1400" b="1" dirty="0">
+                                    <a:rPr lang="en-US" sz="1400" b="0" i="1" dirty="0">
                                       <a:solidFill>
                                         <a:srgbClr val="1E3A5F"/>
                                       </a:solidFill>
@@ -11196,12 +11350,12 @@
                                       <a:ea typeface="Arial" pitchFamily="34" charset="-122"/>
                                       <a:cs typeface="Arial" pitchFamily="34" charset="-120"/>
                                     </a:rPr>
-                                    <m:t>x</m:t>
+                                    <m:t>𝑥</m:t>
                                   </m:r>
                                 </m:sub>
                                 <m:sup>
                                   <m:r>
-                                    <a:rPr lang="de-DE" sz="1400" b="1" i="0" dirty="0" smtClean="0">
+                                    <a:rPr lang="de-DE" sz="1400" b="0" i="0" dirty="0" smtClean="0">
                                       <a:solidFill>
                                         <a:srgbClr val="1E3A5F"/>
                                       </a:solidFill>
@@ -11209,12 +11363,12 @@
                                       <a:ea typeface="Arial" pitchFamily="34" charset="-122"/>
                                       <a:cs typeface="Arial" pitchFamily="34" charset="-120"/>
                                     </a:rPr>
-                                    <m:t>𝟐</m:t>
+                                    <m:t>2</m:t>
                                   </m:r>
                                 </m:sup>
                               </m:sSubSup>
                               <m:r>
-                                <a:rPr lang="en-US" sz="1400" b="1" i="1" dirty="0">
+                                <a:rPr lang="en-US" sz="1400" b="0" i="1" dirty="0">
                                   <a:solidFill>
                                     <a:srgbClr val="1E3A5F"/>
                                   </a:solidFill>
@@ -11229,7 +11383,7 @@
                               <m:sSubSup>
                                 <m:sSubSupPr>
                                   <m:ctrlPr>
-                                    <a:rPr lang="en-US" sz="1400" b="1" i="1" dirty="0">
+                                    <a:rPr lang="en-US" sz="1400" i="1" dirty="0">
                                       <a:solidFill>
                                         <a:srgbClr val="1E3A5F"/>
                                       </a:solidFill>
@@ -11241,10 +11395,7 @@
                                 </m:sSubSupPr>
                                 <m:e>
                                   <m:r>
-                                    <m:rPr>
-                                      <m:sty m:val="p"/>
-                                    </m:rPr>
-                                    <a:rPr lang="en-US" sz="1400" b="1" dirty="0">
+                                    <a:rPr lang="en-US" sz="1400" b="0" i="1" dirty="0">
                                       <a:solidFill>
                                         <a:srgbClr val="1E3A5F"/>
                                       </a:solidFill>
@@ -11252,15 +11403,12 @@
                                       <a:ea typeface="Arial" pitchFamily="34" charset="-122"/>
                                       <a:cs typeface="Arial" pitchFamily="34" charset="-120"/>
                                     </a:rPr>
-                                    <m:t>σ</m:t>
+                                    <m:t>𝜎</m:t>
                                   </m:r>
                                 </m:e>
                                 <m:sub>
                                   <m:r>
-                                    <m:rPr>
-                                      <m:sty m:val="p"/>
-                                    </m:rPr>
-                                    <a:rPr lang="en-US" sz="1400" b="1" dirty="0">
+                                    <a:rPr lang="en-US" sz="1400" b="0" i="1" dirty="0">
                                       <a:solidFill>
                                         <a:srgbClr val="1E3A5F"/>
                                       </a:solidFill>
@@ -11268,12 +11416,12 @@
                                       <a:ea typeface="Arial" pitchFamily="34" charset="-122"/>
                                       <a:cs typeface="Arial" pitchFamily="34" charset="-120"/>
                                     </a:rPr>
-                                    <m:t>y</m:t>
+                                    <m:t>𝑦</m:t>
                                   </m:r>
                                 </m:sub>
                                 <m:sup>
                                   <m:r>
-                                    <a:rPr lang="de-DE" sz="1400" b="1" i="0" dirty="0" smtClean="0">
+                                    <a:rPr lang="de-DE" sz="1400" b="0" i="0" dirty="0" smtClean="0">
                                       <a:solidFill>
                                         <a:srgbClr val="1E3A5F"/>
                                       </a:solidFill>
@@ -11281,12 +11429,12 @@
                                       <a:ea typeface="Arial" pitchFamily="34" charset="-122"/>
                                       <a:cs typeface="Arial" pitchFamily="34" charset="-120"/>
                                     </a:rPr>
-                                    <m:t>𝟐</m:t>
+                                    <m:t>2</m:t>
                                   </m:r>
                                 </m:sup>
                               </m:sSubSup>
                               <m:r>
-                                <a:rPr lang="en-US" sz="1400" b="1" i="1" dirty="0">
+                                <a:rPr lang="en-US" sz="1400" b="0" i="1" dirty="0">
                                   <a:solidFill>
                                     <a:srgbClr val="1E3A5F"/>
                                   </a:solidFill>
@@ -11304,6 +11452,17 @@
                   </m:oMath>
                 </a14:m>
                 <a:r>
+                  <a:rPr lang="en-US" sz="1400" dirty="0">
+                    <a:solidFill>
+                      <a:srgbClr val="1E3A5F"/>
+                    </a:solidFill>
+                    <a:latin typeface="Arial" pitchFamily="34" charset="0"/>
+                    <a:ea typeface="Arial" pitchFamily="34" charset="-122"/>
+                    <a:cs typeface="Arial" pitchFamily="34" charset="-120"/>
+                  </a:rPr>
+                  <a:t> </a:t>
+                </a:r>
+                <a:r>
                   <a:rPr lang="en-US" sz="1400" b="1" dirty="0">
                     <a:solidFill>
                       <a:srgbClr val="1E3A5F"/>
@@ -11312,7 +11471,7 @@
                     <a:ea typeface="Arial" pitchFamily="34" charset="-122"/>
                     <a:cs typeface="Arial" pitchFamily="34" charset="-120"/>
                   </a:rPr>
-                  <a:t> = variances (how spread in x, y)</a:t>
+                  <a:t>= variances (how spread in x, y)</a:t>
                 </a:r>
                 <a:endParaRPr lang="en-US" sz="1400" dirty="0"/>
               </a:p>
@@ -11391,7 +11550,7 @@
             </p:txBody>
           </p:sp>
         </mc:Choice>
-        <mc:Fallback>
+        <mc:Fallback xmlns="">
           <p:sp>
             <p:nvSpPr>
               <p:cNvPr id="6" name="Text 4"/>
@@ -11411,7 +11570,7 @@
               <a:blipFill>
                 <a:blip r:embed="rId3"/>
                 <a:stretch>
-                  <a:fillRect l="-220" t="-62745" b="-98039"/>
+                  <a:fillRect l="-220" t="-60784" b="-96078"/>
                 </a:stretch>
               </a:blipFill>
               <a:ln/>
@@ -11497,8 +11656,8 @@
           </a:ln>
         </p:spPr>
       </p:sp>
-      <mc:AlternateContent xmlns:mc="http://schemas.openxmlformats.org/markup-compatibility/2006">
-        <mc:Choice xmlns:a14="http://schemas.microsoft.com/office/drawing/2010/main" Requires="a14">
+      <mc:AlternateContent xmlns:mc="http://schemas.openxmlformats.org/markup-compatibility/2006" xmlns:a14="http://schemas.microsoft.com/office/drawing/2010/main">
+        <mc:Choice Requires="a14">
           <p:sp>
             <p:nvSpPr>
               <p:cNvPr id="9" name="Text 7"/>
@@ -11578,18 +11737,7 @@
                           <a:ea typeface="Arial" pitchFamily="34" charset="-122"/>
                           <a:cs typeface="Arial" pitchFamily="34" charset="-120"/>
                         </a:rPr>
-                        <m:t>= </m:t>
-                      </m:r>
-                      <m:r>
-                        <a:rPr lang="en-US" sz="1200" i="1" dirty="0" smtClean="0">
-                          <a:solidFill>
-                            <a:srgbClr val="1F2937"/>
-                          </a:solidFill>
-                          <a:latin typeface="Cambria Math" panose="02040503050406030204" pitchFamily="18" charset="0"/>
-                          <a:ea typeface="Arial" pitchFamily="34" charset="-122"/>
-                          <a:cs typeface="Arial" pitchFamily="34" charset="-120"/>
-                        </a:rPr>
-                        <m:t>0</m:t>
+                        <m:t>= 0</m:t>
                       </m:r>
                     </m:oMath>
                   </m:oMathPara>
@@ -11633,7 +11781,7 @@
             </p:txBody>
           </p:sp>
         </mc:Choice>
-        <mc:Fallback>
+        <mc:Fallback xmlns="">
           <p:sp>
             <p:nvSpPr>
               <p:cNvPr id="9" name="Text 7"/>
@@ -11700,8 +11848,8 @@
           </a:ln>
         </p:spPr>
       </p:sp>
-      <mc:AlternateContent xmlns:mc="http://schemas.openxmlformats.org/markup-compatibility/2006">
-        <mc:Choice xmlns:a14="http://schemas.microsoft.com/office/drawing/2010/main" Requires="a14">
+      <mc:AlternateContent xmlns:mc="http://schemas.openxmlformats.org/markup-compatibility/2006" xmlns:a14="http://schemas.microsoft.com/office/drawing/2010/main">
+        <mc:Choice Requires="a14">
           <p:sp>
             <p:nvSpPr>
               <p:cNvPr id="11" name="Text 9"/>
@@ -11884,14 +12032,14 @@
                     <a:ea typeface="Arial" pitchFamily="34" charset="-122"/>
                     <a:cs typeface="Arial" pitchFamily="34" charset="-120"/>
                   </a:rPr>
-                  <a:t>(more uncertain in x)</a:t>
+                  <a:t>(independent, more uncertain in x)</a:t>
                 </a:r>
                 <a:endParaRPr lang="en-US" sz="1200" dirty="0"/>
               </a:p>
             </p:txBody>
           </p:sp>
         </mc:Choice>
-        <mc:Fallback>
+        <mc:Fallback xmlns="">
           <p:sp>
             <p:nvSpPr>
               <p:cNvPr id="11" name="Text 9"/>
@@ -11958,8 +12106,8 @@
           </a:ln>
         </p:spPr>
       </p:sp>
-      <mc:AlternateContent xmlns:mc="http://schemas.openxmlformats.org/markup-compatibility/2006">
-        <mc:Choice xmlns:a14="http://schemas.microsoft.com/office/drawing/2010/main" Requires="a14">
+      <mc:AlternateContent xmlns:mc="http://schemas.openxmlformats.org/markup-compatibility/2006" xmlns:a14="http://schemas.microsoft.com/office/drawing/2010/main">
+        <mc:Choice Requires="a14">
           <p:sp>
             <p:nvSpPr>
               <p:cNvPr id="13" name="Text 11"/>
@@ -12039,18 +12187,7 @@
                           <a:ea typeface="Arial" pitchFamily="34" charset="-122"/>
                           <a:cs typeface="Arial" pitchFamily="34" charset="-120"/>
                         </a:rPr>
-                        <m:t>≠ </m:t>
-                      </m:r>
-                      <m:r>
-                        <a:rPr lang="en-US" sz="1200" i="1" dirty="0" smtClean="0">
-                          <a:solidFill>
-                            <a:srgbClr val="1F2937"/>
-                          </a:solidFill>
-                          <a:latin typeface="Cambria Math" panose="02040503050406030204" pitchFamily="18" charset="0"/>
-                          <a:ea typeface="Arial" pitchFamily="34" charset="-122"/>
-                          <a:cs typeface="Arial" pitchFamily="34" charset="-120"/>
-                        </a:rPr>
-                        <m:t>0</m:t>
+                        <m:t>≠ 0</m:t>
                       </m:r>
                     </m:oMath>
                   </m:oMathPara>
@@ -12094,7 +12231,7 @@
             </p:txBody>
           </p:sp>
         </mc:Choice>
-        <mc:Fallback>
+        <mc:Fallback xmlns="">
           <p:sp>
             <p:nvSpPr>
               <p:cNvPr id="13" name="Text 11"/>
@@ -12118,6 +12255,759 @@
                 </a:stretch>
               </a:blipFill>
               <a:ln/>
+            </p:spPr>
+            <p:txBody>
+              <a:bodyPr/>
+              <a:lstStyle/>
+              <a:p>
+                <a:r>
+                  <a:rPr lang="en-US">
+                    <a:noFill/>
+                  </a:rPr>
+                  <a:t> </a:t>
+                </a:r>
+              </a:p>
+            </p:txBody>
+          </p:sp>
+        </mc:Fallback>
+      </mc:AlternateContent>
+      <mc:AlternateContent xmlns:mc="http://schemas.openxmlformats.org/markup-compatibility/2006" xmlns:a14="http://schemas.microsoft.com/office/drawing/2010/main">
+        <mc:Choice Requires="a14">
+          <p:sp>
+            <p:nvSpPr>
+              <p:cNvPr id="15" name="TextBox 14">
+                <a:extLst>
+                  <a:ext uri="{FF2B5EF4-FFF2-40B4-BE49-F238E27FC236}">
+                    <a16:creationId xmlns:a16="http://schemas.microsoft.com/office/drawing/2014/main" id="{819F7B25-8603-4A58-9A17-FD43428CF804}"/>
+                  </a:ext>
+                </a:extLst>
+              </p:cNvPr>
+              <p:cNvSpPr txBox="1"/>
+              <p:nvPr/>
+            </p:nvSpPr>
+            <p:spPr>
+              <a:xfrm>
+                <a:off x="1832344" y="4309964"/>
+                <a:ext cx="1704753" cy="719236"/>
+              </a:xfrm>
+              <a:prstGeom prst="rect">
+                <a:avLst/>
+              </a:prstGeom>
+              <a:noFill/>
+            </p:spPr>
+            <p:txBody>
+              <a:bodyPr wrap="square">
+                <a:spAutoFit/>
+              </a:bodyPr>
+              <a:lstStyle/>
+              <a:p>
+                <a:r>
+                  <a:rPr lang="en-US" sz="1800" b="1" dirty="0">
+                    <a:solidFill>
+                      <a:srgbClr val="1E3A5F"/>
+                    </a:solidFill>
+                    <a:latin typeface="Arial" pitchFamily="34" charset="0"/>
+                    <a:ea typeface="Arial" pitchFamily="34" charset="-122"/>
+                    <a:cs typeface="Arial" pitchFamily="34" charset="-120"/>
+                  </a:rPr>
+                  <a:t>Σ = </a:t>
+                </a:r>
+                <a14:m>
+                  <m:oMath xmlns:m="http://schemas.openxmlformats.org/officeDocument/2006/math">
+                    <m:d>
+                      <m:dPr>
+                        <m:begChr m:val="["/>
+                        <m:endChr m:val="]"/>
+                        <m:ctrlPr>
+                          <a:rPr lang="en-US" sz="1800" b="1" i="1" smtClean="0">
+                            <a:solidFill>
+                              <a:srgbClr val="1E3A5F"/>
+                            </a:solidFill>
+                            <a:latin typeface="Cambria Math" panose="02040503050406030204" pitchFamily="18" charset="0"/>
+                            <a:cs typeface="Arial" pitchFamily="34" charset="-120"/>
+                          </a:rPr>
+                        </m:ctrlPr>
+                      </m:dPr>
+                      <m:e>
+                        <m:m>
+                          <m:mPr>
+                            <m:mcs>
+                              <m:mc>
+                                <m:mcPr>
+                                  <m:count m:val="2"/>
+                                  <m:mcJc m:val="center"/>
+                                </m:mcPr>
+                              </m:mc>
+                            </m:mcs>
+                            <m:ctrlPr>
+                              <a:rPr lang="en-US" sz="1800" b="1" i="1" smtClean="0">
+                                <a:solidFill>
+                                  <a:srgbClr val="1E3A5F"/>
+                                </a:solidFill>
+                                <a:latin typeface="Cambria Math" panose="02040503050406030204" pitchFamily="18" charset="0"/>
+                                <a:cs typeface="Arial" pitchFamily="34" charset="-120"/>
+                              </a:rPr>
+                            </m:ctrlPr>
+                          </m:mPr>
+                          <m:mr>
+                            <m:e>
+                              <m:sSubSup>
+                                <m:sSubSupPr>
+                                  <m:ctrlPr>
+                                    <a:rPr lang="en-US" sz="1800" b="1" i="1" dirty="0">
+                                      <a:solidFill>
+                                        <a:srgbClr val="1E3A5F"/>
+                                      </a:solidFill>
+                                      <a:latin typeface="Cambria Math" panose="02040503050406030204" pitchFamily="18" charset="0"/>
+                                      <a:cs typeface="Arial" pitchFamily="34" charset="-120"/>
+                                    </a:rPr>
+                                  </m:ctrlPr>
+                                </m:sSubSupPr>
+                                <m:e>
+                                  <m:r>
+                                    <m:rPr>
+                                      <m:sty m:val="p"/>
+                                    </m:rPr>
+                                    <a:rPr lang="en-US" sz="1800" b="1" dirty="0">
+                                      <a:solidFill>
+                                        <a:srgbClr val="1E3A5F"/>
+                                      </a:solidFill>
+                                      <a:latin typeface="Cambria Math" panose="02040503050406030204" pitchFamily="18" charset="0"/>
+                                      <a:ea typeface="Arial" pitchFamily="34" charset="-122"/>
+                                      <a:cs typeface="Arial" pitchFamily="34" charset="-120"/>
+                                    </a:rPr>
+                                    <m:t>σ</m:t>
+                                  </m:r>
+                                </m:e>
+                                <m:sub>
+                                  <m:r>
+                                    <m:rPr>
+                                      <m:sty m:val="p"/>
+                                    </m:rPr>
+                                    <a:rPr lang="en-US" sz="1800" b="1" dirty="0">
+                                      <a:solidFill>
+                                        <a:srgbClr val="1E3A5F"/>
+                                      </a:solidFill>
+                                      <a:latin typeface="Cambria Math" panose="02040503050406030204" pitchFamily="18" charset="0"/>
+                                      <a:ea typeface="Arial" pitchFamily="34" charset="-122"/>
+                                      <a:cs typeface="Arial" pitchFamily="34" charset="-120"/>
+                                    </a:rPr>
+                                    <m:t>x</m:t>
+                                  </m:r>
+                                </m:sub>
+                                <m:sup>
+                                  <m:r>
+                                    <a:rPr lang="de-DE" sz="1800" b="1" dirty="0">
+                                      <a:solidFill>
+                                        <a:srgbClr val="1E3A5F"/>
+                                      </a:solidFill>
+                                      <a:latin typeface="Cambria Math" panose="02040503050406030204" pitchFamily="18" charset="0"/>
+                                      <a:ea typeface="Arial" pitchFamily="34" charset="-122"/>
+                                      <a:cs typeface="Arial" pitchFamily="34" charset="-120"/>
+                                    </a:rPr>
+                                    <m:t>2</m:t>
+                                  </m:r>
+                                </m:sup>
+                              </m:sSubSup>
+                              <m:r>
+                                <a:rPr lang="en-US" sz="1800" b="1" i="1" dirty="0">
+                                  <a:solidFill>
+                                    <a:srgbClr val="1E3A5F"/>
+                                  </a:solidFill>
+                                  <a:latin typeface="Cambria Math" panose="02040503050406030204" pitchFamily="18" charset="0"/>
+                                  <a:ea typeface="Arial" pitchFamily="34" charset="-122"/>
+                                  <a:cs typeface="Arial" pitchFamily="34" charset="-120"/>
+                                </a:rPr>
+                                <m:t> </m:t>
+                              </m:r>
+                            </m:e>
+                            <m:e>
+                              <m:r>
+                                <a:rPr lang="en-US" sz="1800" b="1" i="1" dirty="0" smtClean="0">
+                                  <a:solidFill>
+                                    <a:srgbClr val="1E3A5F"/>
+                                  </a:solidFill>
+                                  <a:latin typeface="Cambria Math" panose="02040503050406030204" pitchFamily="18" charset="0"/>
+                                  <a:ea typeface="Arial" pitchFamily="34" charset="-122"/>
+                                  <a:cs typeface="Arial" pitchFamily="34" charset="-120"/>
+                                </a:rPr>
+                                <m:t>𝟎</m:t>
+                              </m:r>
+                              <m:r>
+                                <a:rPr lang="en-US" sz="1800" b="1" i="1" dirty="0">
+                                  <a:solidFill>
+                                    <a:srgbClr val="1E3A5F"/>
+                                  </a:solidFill>
+                                  <a:latin typeface="Cambria Math" panose="02040503050406030204" pitchFamily="18" charset="0"/>
+                                  <a:ea typeface="Arial" pitchFamily="34" charset="-122"/>
+                                  <a:cs typeface="Arial" pitchFamily="34" charset="-120"/>
+                                </a:rPr>
+                                <m:t> </m:t>
+                              </m:r>
+                            </m:e>
+                          </m:mr>
+                          <m:mr>
+                            <m:e>
+                              <m:r>
+                                <a:rPr lang="en-US" sz="1800" b="1" i="1" dirty="0" smtClean="0">
+                                  <a:solidFill>
+                                    <a:srgbClr val="1E3A5F"/>
+                                  </a:solidFill>
+                                  <a:latin typeface="Cambria Math" panose="02040503050406030204" pitchFamily="18" charset="0"/>
+                                  <a:ea typeface="Arial" pitchFamily="34" charset="-122"/>
+                                  <a:cs typeface="Arial" pitchFamily="34" charset="-120"/>
+                                </a:rPr>
+                                <m:t>𝟎</m:t>
+                              </m:r>
+                              <m:r>
+                                <a:rPr lang="en-US" sz="1800" b="1" i="1" dirty="0">
+                                  <a:solidFill>
+                                    <a:srgbClr val="1E3A5F"/>
+                                  </a:solidFill>
+                                  <a:latin typeface="Cambria Math" panose="02040503050406030204" pitchFamily="18" charset="0"/>
+                                  <a:ea typeface="Arial" pitchFamily="34" charset="-122"/>
+                                  <a:cs typeface="Arial" pitchFamily="34" charset="-120"/>
+                                </a:rPr>
+                                <m:t> </m:t>
+                              </m:r>
+                            </m:e>
+                            <m:e>
+                              <m:sSubSup>
+                                <m:sSubSupPr>
+                                  <m:ctrlPr>
+                                    <a:rPr lang="en-US" sz="1800" b="1" i="1" dirty="0">
+                                      <a:solidFill>
+                                        <a:srgbClr val="1E3A5F"/>
+                                      </a:solidFill>
+                                      <a:latin typeface="Cambria Math" panose="02040503050406030204" pitchFamily="18" charset="0"/>
+                                      <a:ea typeface="Arial" pitchFamily="34" charset="-122"/>
+                                      <a:cs typeface="Arial" pitchFamily="34" charset="-120"/>
+                                    </a:rPr>
+                                  </m:ctrlPr>
+                                </m:sSubSupPr>
+                                <m:e>
+                                  <m:r>
+                                    <m:rPr>
+                                      <m:sty m:val="p"/>
+                                    </m:rPr>
+                                    <a:rPr lang="en-US" sz="1800" b="1" dirty="0">
+                                      <a:solidFill>
+                                        <a:srgbClr val="1E3A5F"/>
+                                      </a:solidFill>
+                                      <a:latin typeface="Cambria Math" panose="02040503050406030204" pitchFamily="18" charset="0"/>
+                                      <a:ea typeface="Arial" pitchFamily="34" charset="-122"/>
+                                      <a:cs typeface="Arial" pitchFamily="34" charset="-120"/>
+                                    </a:rPr>
+                                    <m:t>σ</m:t>
+                                  </m:r>
+                                </m:e>
+                                <m:sub>
+                                  <m:r>
+                                    <m:rPr>
+                                      <m:sty m:val="p"/>
+                                    </m:rPr>
+                                    <a:rPr lang="en-US" sz="1800" b="1" dirty="0">
+                                      <a:solidFill>
+                                        <a:srgbClr val="1E3A5F"/>
+                                      </a:solidFill>
+                                      <a:latin typeface="Cambria Math" panose="02040503050406030204" pitchFamily="18" charset="0"/>
+                                      <a:ea typeface="Arial" pitchFamily="34" charset="-122"/>
+                                      <a:cs typeface="Arial" pitchFamily="34" charset="-120"/>
+                                    </a:rPr>
+                                    <m:t>y</m:t>
+                                  </m:r>
+                                </m:sub>
+                                <m:sup>
+                                  <m:r>
+                                    <a:rPr lang="de-DE" sz="1800" b="1" i="0" dirty="0" smtClean="0">
+                                      <a:solidFill>
+                                        <a:srgbClr val="1E3A5F"/>
+                                      </a:solidFill>
+                                      <a:latin typeface="Cambria Math" panose="02040503050406030204" pitchFamily="18" charset="0"/>
+                                      <a:ea typeface="Arial" pitchFamily="34" charset="-122"/>
+                                      <a:cs typeface="Arial" pitchFamily="34" charset="-120"/>
+                                    </a:rPr>
+                                    <m:t>𝟐</m:t>
+                                  </m:r>
+                                </m:sup>
+                              </m:sSubSup>
+                              <m:r>
+                                <a:rPr lang="en-US" sz="1800" b="1" i="1" dirty="0">
+                                  <a:solidFill>
+                                    <a:srgbClr val="1E3A5F"/>
+                                  </a:solidFill>
+                                  <a:latin typeface="Cambria Math" panose="02040503050406030204" pitchFamily="18" charset="0"/>
+                                  <a:ea typeface="Arial" pitchFamily="34" charset="-122"/>
+                                  <a:cs typeface="Arial" pitchFamily="34" charset="-120"/>
+                                </a:rPr>
+                                <m:t> </m:t>
+                              </m:r>
+                            </m:e>
+                          </m:mr>
+                        </m:m>
+                      </m:e>
+                    </m:d>
+                  </m:oMath>
+                </a14:m>
+                <a:endParaRPr lang="en-US" dirty="0"/>
+              </a:p>
+            </p:txBody>
+          </p:sp>
+        </mc:Choice>
+        <mc:Fallback xmlns="">
+          <p:sp>
+            <p:nvSpPr>
+              <p:cNvPr id="15" name="TextBox 14">
+                <a:extLst>
+                  <a:ext uri="{FF2B5EF4-FFF2-40B4-BE49-F238E27FC236}">
+                    <a16:creationId xmlns:a16="http://schemas.microsoft.com/office/drawing/2014/main" id="{819F7B25-8603-4A58-9A17-FD43428CF804}"/>
+                  </a:ext>
+                </a:extLst>
+              </p:cNvPr>
+              <p:cNvSpPr txBox="1">
+                <a:spLocks noRot="1" noChangeAspect="1" noMove="1" noResize="1" noEditPoints="1" noAdjustHandles="1" noChangeArrowheads="1" noChangeShapeType="1" noTextEdit="1"/>
+              </p:cNvSpPr>
+              <p:nvPr/>
+            </p:nvSpPr>
+            <p:spPr>
+              <a:xfrm>
+                <a:off x="1832344" y="4309964"/>
+                <a:ext cx="1704753" cy="719236"/>
+              </a:xfrm>
+              <a:prstGeom prst="rect">
+                <a:avLst/>
+              </a:prstGeom>
+              <a:blipFill>
+                <a:blip r:embed="rId7"/>
+                <a:stretch>
+                  <a:fillRect l="-3226"/>
+                </a:stretch>
+              </a:blipFill>
+            </p:spPr>
+            <p:txBody>
+              <a:bodyPr/>
+              <a:lstStyle/>
+              <a:p>
+                <a:r>
+                  <a:rPr lang="en-US">
+                    <a:noFill/>
+                  </a:rPr>
+                  <a:t> </a:t>
+                </a:r>
+              </a:p>
+            </p:txBody>
+          </p:sp>
+        </mc:Fallback>
+      </mc:AlternateContent>
+      <mc:AlternateContent xmlns:mc="http://schemas.openxmlformats.org/markup-compatibility/2006" xmlns:a14="http://schemas.microsoft.com/office/drawing/2010/main">
+        <mc:Choice Requires="a14">
+          <p:sp>
+            <p:nvSpPr>
+              <p:cNvPr id="17" name="TextBox 16">
+                <a:extLst>
+                  <a:ext uri="{FF2B5EF4-FFF2-40B4-BE49-F238E27FC236}">
+                    <a16:creationId xmlns:a16="http://schemas.microsoft.com/office/drawing/2014/main" id="{455D7266-2DE0-4B61-813A-5A827FA2F388}"/>
+                  </a:ext>
+                </a:extLst>
+              </p:cNvPr>
+              <p:cNvSpPr txBox="1"/>
+              <p:nvPr/>
+            </p:nvSpPr>
+            <p:spPr>
+              <a:xfrm>
+                <a:off x="5358690" y="4201669"/>
+                <a:ext cx="1945758" cy="755271"/>
+              </a:xfrm>
+              <a:prstGeom prst="rect">
+                <a:avLst/>
+              </a:prstGeom>
+              <a:noFill/>
+            </p:spPr>
+            <p:txBody>
+              <a:bodyPr wrap="square">
+                <a:spAutoFit/>
+              </a:bodyPr>
+              <a:lstStyle/>
+              <a:p>
+                <a:r>
+                  <a:rPr lang="en-US" sz="1800" b="1" dirty="0">
+                    <a:solidFill>
+                      <a:srgbClr val="1E3A5F"/>
+                    </a:solidFill>
+                    <a:latin typeface="Arial" pitchFamily="34" charset="0"/>
+                    <a:ea typeface="Arial" pitchFamily="34" charset="-122"/>
+                    <a:cs typeface="Arial" pitchFamily="34" charset="-120"/>
+                  </a:rPr>
+                  <a:t>Σ = </a:t>
+                </a:r>
+                <a14:m>
+                  <m:oMath xmlns:m="http://schemas.openxmlformats.org/officeDocument/2006/math">
+                    <m:d>
+                      <m:dPr>
+                        <m:begChr m:val="["/>
+                        <m:endChr m:val="]"/>
+                        <m:ctrlPr>
+                          <a:rPr lang="en-US" sz="1800" b="1" i="1" smtClean="0">
+                            <a:solidFill>
+                              <a:srgbClr val="1E3A5F"/>
+                            </a:solidFill>
+                            <a:latin typeface="Cambria Math" panose="02040503050406030204" pitchFamily="18" charset="0"/>
+                            <a:cs typeface="Arial" pitchFamily="34" charset="-120"/>
+                          </a:rPr>
+                        </m:ctrlPr>
+                      </m:dPr>
+                      <m:e>
+                        <m:m>
+                          <m:mPr>
+                            <m:mcs>
+                              <m:mc>
+                                <m:mcPr>
+                                  <m:count m:val="2"/>
+                                  <m:mcJc m:val="center"/>
+                                </m:mcPr>
+                              </m:mc>
+                            </m:mcs>
+                            <m:ctrlPr>
+                              <a:rPr lang="en-US" sz="1800" b="1" i="1" smtClean="0">
+                                <a:solidFill>
+                                  <a:srgbClr val="1E3A5F"/>
+                                </a:solidFill>
+                                <a:latin typeface="Cambria Math" panose="02040503050406030204" pitchFamily="18" charset="0"/>
+                                <a:cs typeface="Arial" pitchFamily="34" charset="-120"/>
+                              </a:rPr>
+                            </m:ctrlPr>
+                          </m:mPr>
+                          <m:mr>
+                            <m:e>
+                              <m:sSubSup>
+                                <m:sSubSupPr>
+                                  <m:ctrlPr>
+                                    <a:rPr lang="en-US" sz="1800" b="1" i="1" dirty="0">
+                                      <a:solidFill>
+                                        <a:srgbClr val="1E3A5F"/>
+                                      </a:solidFill>
+                                      <a:latin typeface="Cambria Math" panose="02040503050406030204" pitchFamily="18" charset="0"/>
+                                      <a:cs typeface="Arial" pitchFamily="34" charset="-120"/>
+                                    </a:rPr>
+                                  </m:ctrlPr>
+                                </m:sSubSupPr>
+                                <m:e>
+                                  <m:r>
+                                    <m:rPr>
+                                      <m:sty m:val="p"/>
+                                    </m:rPr>
+                                    <a:rPr lang="en-US" sz="1800" b="1" dirty="0">
+                                      <a:solidFill>
+                                        <a:srgbClr val="1E3A5F"/>
+                                      </a:solidFill>
+                                      <a:latin typeface="Cambria Math" panose="02040503050406030204" pitchFamily="18" charset="0"/>
+                                      <a:ea typeface="Arial" pitchFamily="34" charset="-122"/>
+                                      <a:cs typeface="Arial" pitchFamily="34" charset="-120"/>
+                                    </a:rPr>
+                                    <m:t>σ</m:t>
+                                  </m:r>
+                                </m:e>
+                                <m:sub>
+                                  <m:r>
+                                    <m:rPr>
+                                      <m:sty m:val="p"/>
+                                    </m:rPr>
+                                    <a:rPr lang="en-US" sz="1800" b="1" dirty="0">
+                                      <a:solidFill>
+                                        <a:srgbClr val="1E3A5F"/>
+                                      </a:solidFill>
+                                      <a:latin typeface="Cambria Math" panose="02040503050406030204" pitchFamily="18" charset="0"/>
+                                      <a:ea typeface="Arial" pitchFamily="34" charset="-122"/>
+                                      <a:cs typeface="Arial" pitchFamily="34" charset="-120"/>
+                                    </a:rPr>
+                                    <m:t>x</m:t>
+                                  </m:r>
+                                </m:sub>
+                                <m:sup>
+                                  <m:r>
+                                    <a:rPr lang="de-DE" sz="1800" b="1" dirty="0">
+                                      <a:solidFill>
+                                        <a:srgbClr val="1E3A5F"/>
+                                      </a:solidFill>
+                                      <a:latin typeface="Cambria Math" panose="02040503050406030204" pitchFamily="18" charset="0"/>
+                                      <a:ea typeface="Arial" pitchFamily="34" charset="-122"/>
+                                      <a:cs typeface="Arial" pitchFamily="34" charset="-120"/>
+                                    </a:rPr>
+                                    <m:t>2</m:t>
+                                  </m:r>
+                                </m:sup>
+                              </m:sSubSup>
+                              <m:r>
+                                <a:rPr lang="en-US" sz="1800" b="1" i="1" dirty="0">
+                                  <a:solidFill>
+                                    <a:srgbClr val="1E3A5F"/>
+                                  </a:solidFill>
+                                  <a:latin typeface="Cambria Math" panose="02040503050406030204" pitchFamily="18" charset="0"/>
+                                  <a:ea typeface="Arial" pitchFamily="34" charset="-122"/>
+                                  <a:cs typeface="Arial" pitchFamily="34" charset="-120"/>
+                                </a:rPr>
+                                <m:t> </m:t>
+                              </m:r>
+                            </m:e>
+                            <m:e>
+                              <m:sSub>
+                                <m:sSubPr>
+                                  <m:ctrlPr>
+                                    <a:rPr lang="en-US" sz="1800" b="1" i="1" dirty="0">
+                                      <a:solidFill>
+                                        <a:srgbClr val="1E3A5F"/>
+                                      </a:solidFill>
+                                      <a:latin typeface="Cambria Math" panose="02040503050406030204" pitchFamily="18" charset="0"/>
+                                      <a:ea typeface="Arial" pitchFamily="34" charset="-122"/>
+                                      <a:cs typeface="Arial" pitchFamily="34" charset="-120"/>
+                                    </a:rPr>
+                                  </m:ctrlPr>
+                                </m:sSubPr>
+                                <m:e>
+                                  <m:r>
+                                    <m:rPr>
+                                      <m:sty m:val="p"/>
+                                    </m:rPr>
+                                    <a:rPr lang="en-US" sz="1800" b="1" dirty="0">
+                                      <a:solidFill>
+                                        <a:srgbClr val="1E3A5F"/>
+                                      </a:solidFill>
+                                      <a:latin typeface="Cambria Math" panose="02040503050406030204" pitchFamily="18" charset="0"/>
+                                      <a:ea typeface="Arial" pitchFamily="34" charset="-122"/>
+                                      <a:cs typeface="Arial" pitchFamily="34" charset="-120"/>
+                                    </a:rPr>
+                                    <m:t>σ</m:t>
+                                  </m:r>
+                                </m:e>
+                                <m:sub>
+                                  <m:r>
+                                    <m:rPr>
+                                      <m:sty m:val="p"/>
+                                    </m:rPr>
+                                    <a:rPr lang="en-US" sz="1800" b="1" dirty="0">
+                                      <a:solidFill>
+                                        <a:srgbClr val="1E3A5F"/>
+                                      </a:solidFill>
+                                      <a:latin typeface="Cambria Math" panose="02040503050406030204" pitchFamily="18" charset="0"/>
+                                      <a:ea typeface="Arial" pitchFamily="34" charset="-122"/>
+                                      <a:cs typeface="Arial" pitchFamily="34" charset="-120"/>
+                                    </a:rPr>
+                                    <m:t>xy</m:t>
+                                  </m:r>
+                                </m:sub>
+                              </m:sSub>
+                              <m:r>
+                                <a:rPr lang="en-US" sz="1800" b="1" i="1" dirty="0">
+                                  <a:solidFill>
+                                    <a:srgbClr val="1E3A5F"/>
+                                  </a:solidFill>
+                                  <a:latin typeface="Cambria Math" panose="02040503050406030204" pitchFamily="18" charset="0"/>
+                                  <a:ea typeface="Arial" pitchFamily="34" charset="-122"/>
+                                  <a:cs typeface="Arial" pitchFamily="34" charset="-120"/>
+                                </a:rPr>
+                                <m:t> </m:t>
+                              </m:r>
+                            </m:e>
+                          </m:mr>
+                          <m:mr>
+                            <m:e>
+                              <m:sSubSup>
+                                <m:sSubSupPr>
+                                  <m:ctrlPr>
+                                    <a:rPr lang="en-US" sz="1800" b="1" i="1" dirty="0">
+                                      <a:solidFill>
+                                        <a:srgbClr val="1E3A5F"/>
+                                      </a:solidFill>
+                                      <a:latin typeface="Cambria Math" panose="02040503050406030204" pitchFamily="18" charset="0"/>
+                                      <a:ea typeface="Arial" pitchFamily="34" charset="-122"/>
+                                      <a:cs typeface="Arial" pitchFamily="34" charset="-120"/>
+                                    </a:rPr>
+                                  </m:ctrlPr>
+                                </m:sSubSupPr>
+                                <m:e>
+                                  <m:r>
+                                    <m:rPr>
+                                      <m:sty m:val="p"/>
+                                    </m:rPr>
+                                    <a:rPr lang="en-US" sz="1800" b="1" dirty="0">
+                                      <a:solidFill>
+                                        <a:srgbClr val="1E3A5F"/>
+                                      </a:solidFill>
+                                      <a:latin typeface="Cambria Math" panose="02040503050406030204" pitchFamily="18" charset="0"/>
+                                      <a:ea typeface="Arial" pitchFamily="34" charset="-122"/>
+                                      <a:cs typeface="Arial" pitchFamily="34" charset="-120"/>
+                                    </a:rPr>
+                                    <m:t>σ</m:t>
+                                  </m:r>
+                                </m:e>
+                                <m:sub>
+                                  <m:r>
+                                    <m:rPr>
+                                      <m:sty m:val="p"/>
+                                    </m:rPr>
+                                    <a:rPr lang="de-DE" sz="1800" b="1" dirty="0">
+                                      <a:solidFill>
+                                        <a:srgbClr val="1E3A5F"/>
+                                      </a:solidFill>
+                                      <a:latin typeface="Cambria Math" panose="02040503050406030204" pitchFamily="18" charset="0"/>
+                                      <a:ea typeface="Arial" pitchFamily="34" charset="-122"/>
+                                      <a:cs typeface="Arial" pitchFamily="34" charset="-120"/>
+                                    </a:rPr>
+                                    <m:t>y</m:t>
+                                  </m:r>
+                                  <m:r>
+                                    <m:rPr>
+                                      <m:sty m:val="p"/>
+                                    </m:rPr>
+                                    <a:rPr lang="en-US" sz="1800" b="1" dirty="0">
+                                      <a:solidFill>
+                                        <a:srgbClr val="1E3A5F"/>
+                                      </a:solidFill>
+                                      <a:latin typeface="Cambria Math" panose="02040503050406030204" pitchFamily="18" charset="0"/>
+                                      <a:ea typeface="Arial" pitchFamily="34" charset="-122"/>
+                                      <a:cs typeface="Arial" pitchFamily="34" charset="-120"/>
+                                    </a:rPr>
+                                    <m:t>x</m:t>
+                                  </m:r>
+                                </m:sub>
+                                <m:sup>
+                                  <m:r>
+                                    <a:rPr lang="de-DE" sz="1800" b="1" i="0" dirty="0" smtClean="0">
+                                      <a:solidFill>
+                                        <a:srgbClr val="1E3A5F"/>
+                                      </a:solidFill>
+                                      <a:latin typeface="Cambria Math" panose="02040503050406030204" pitchFamily="18" charset="0"/>
+                                      <a:ea typeface="Arial" pitchFamily="34" charset="-122"/>
+                                      <a:cs typeface="Arial" pitchFamily="34" charset="-120"/>
+                                    </a:rPr>
+                                    <m:t>𝟐</m:t>
+                                  </m:r>
+                                </m:sup>
+                              </m:sSubSup>
+                              <m:r>
+                                <a:rPr lang="en-US" sz="1800" b="1" i="1" dirty="0">
+                                  <a:solidFill>
+                                    <a:srgbClr val="1E3A5F"/>
+                                  </a:solidFill>
+                                  <a:latin typeface="Cambria Math" panose="02040503050406030204" pitchFamily="18" charset="0"/>
+                                  <a:ea typeface="Arial" pitchFamily="34" charset="-122"/>
+                                  <a:cs typeface="Arial" pitchFamily="34" charset="-120"/>
+                                </a:rPr>
+                                <m:t> </m:t>
+                              </m:r>
+                            </m:e>
+                            <m:e>
+                              <m:sSubSup>
+                                <m:sSubSupPr>
+                                  <m:ctrlPr>
+                                    <a:rPr lang="en-US" sz="1800" b="1" i="1" dirty="0">
+                                      <a:solidFill>
+                                        <a:srgbClr val="1E3A5F"/>
+                                      </a:solidFill>
+                                      <a:latin typeface="Cambria Math" panose="02040503050406030204" pitchFamily="18" charset="0"/>
+                                      <a:ea typeface="Arial" pitchFamily="34" charset="-122"/>
+                                      <a:cs typeface="Arial" pitchFamily="34" charset="-120"/>
+                                    </a:rPr>
+                                  </m:ctrlPr>
+                                </m:sSubSupPr>
+                                <m:e>
+                                  <m:r>
+                                    <m:rPr>
+                                      <m:sty m:val="p"/>
+                                    </m:rPr>
+                                    <a:rPr lang="en-US" sz="1800" b="1" dirty="0">
+                                      <a:solidFill>
+                                        <a:srgbClr val="1E3A5F"/>
+                                      </a:solidFill>
+                                      <a:latin typeface="Cambria Math" panose="02040503050406030204" pitchFamily="18" charset="0"/>
+                                      <a:ea typeface="Arial" pitchFamily="34" charset="-122"/>
+                                      <a:cs typeface="Arial" pitchFamily="34" charset="-120"/>
+                                    </a:rPr>
+                                    <m:t>σ</m:t>
+                                  </m:r>
+                                </m:e>
+                                <m:sub>
+                                  <m:r>
+                                    <m:rPr>
+                                      <m:sty m:val="p"/>
+                                    </m:rPr>
+                                    <a:rPr lang="en-US" sz="1800" b="1" dirty="0">
+                                      <a:solidFill>
+                                        <a:srgbClr val="1E3A5F"/>
+                                      </a:solidFill>
+                                      <a:latin typeface="Cambria Math" panose="02040503050406030204" pitchFamily="18" charset="0"/>
+                                      <a:ea typeface="Arial" pitchFamily="34" charset="-122"/>
+                                      <a:cs typeface="Arial" pitchFamily="34" charset="-120"/>
+                                    </a:rPr>
+                                    <m:t>y</m:t>
+                                  </m:r>
+                                </m:sub>
+                                <m:sup>
+                                  <m:r>
+                                    <a:rPr lang="de-DE" sz="1800" b="1" i="0" dirty="0" smtClean="0">
+                                      <a:solidFill>
+                                        <a:srgbClr val="1E3A5F"/>
+                                      </a:solidFill>
+                                      <a:latin typeface="Cambria Math" panose="02040503050406030204" pitchFamily="18" charset="0"/>
+                                      <a:ea typeface="Arial" pitchFamily="34" charset="-122"/>
+                                      <a:cs typeface="Arial" pitchFamily="34" charset="-120"/>
+                                    </a:rPr>
+                                    <m:t>𝟐</m:t>
+                                  </m:r>
+                                </m:sup>
+                              </m:sSubSup>
+                              <m:r>
+                                <a:rPr lang="en-US" sz="1800" b="1" i="1" dirty="0">
+                                  <a:solidFill>
+                                    <a:srgbClr val="1E3A5F"/>
+                                  </a:solidFill>
+                                  <a:latin typeface="Cambria Math" panose="02040503050406030204" pitchFamily="18" charset="0"/>
+                                  <a:ea typeface="Arial" pitchFamily="34" charset="-122"/>
+                                  <a:cs typeface="Arial" pitchFamily="34" charset="-120"/>
+                                </a:rPr>
+                                <m:t> </m:t>
+                              </m:r>
+                            </m:e>
+                          </m:mr>
+                        </m:m>
+                      </m:e>
+                    </m:d>
+                  </m:oMath>
+                </a14:m>
+                <a:endParaRPr lang="en-US" dirty="0"/>
+              </a:p>
+            </p:txBody>
+          </p:sp>
+        </mc:Choice>
+        <mc:Fallback xmlns="">
+          <p:sp>
+            <p:nvSpPr>
+              <p:cNvPr id="17" name="TextBox 16">
+                <a:extLst>
+                  <a:ext uri="{FF2B5EF4-FFF2-40B4-BE49-F238E27FC236}">
+                    <a16:creationId xmlns:a16="http://schemas.microsoft.com/office/drawing/2014/main" id="{455D7266-2DE0-4B61-813A-5A827FA2F388}"/>
+                  </a:ext>
+                </a:extLst>
+              </p:cNvPr>
+              <p:cNvSpPr txBox="1">
+                <a:spLocks noRot="1" noChangeAspect="1" noMove="1" noResize="1" noEditPoints="1" noAdjustHandles="1" noChangeArrowheads="1" noChangeShapeType="1" noTextEdit="1"/>
+              </p:cNvSpPr>
+              <p:nvPr/>
+            </p:nvSpPr>
+            <p:spPr>
+              <a:xfrm>
+                <a:off x="5358690" y="4201669"/>
+                <a:ext cx="1945758" cy="755271"/>
+              </a:xfrm>
+              <a:prstGeom prst="rect">
+                <a:avLst/>
+              </a:prstGeom>
+              <a:blipFill>
+                <a:blip r:embed="rId8"/>
+                <a:stretch>
+                  <a:fillRect l="-2508"/>
+                </a:stretch>
+              </a:blipFill>
             </p:spPr>
             <p:txBody>
               <a:bodyPr/>
@@ -13021,7 +13911,7 @@
                 <a:ea typeface="Arial" pitchFamily="34" charset="-122"/>
                 <a:cs typeface="Arial" pitchFamily="34" charset="-120"/>
               </a:rPr>
-              <a:t>"Undoes" the transformation: A⁻¹·A = I</a:t>
+              <a:t>A⁻¹·A = I</a:t>
             </a:r>
             <a:endParaRPr lang="en-US" sz="1200" dirty="0"/>
           </a:p>
@@ -13360,7 +14250,7 @@
                 <a:ea typeface="Arial" pitchFamily="34" charset="-122"/>
                 <a:cs typeface="Arial" pitchFamily="34" charset="-120"/>
               </a:rPr>
-              <a:t>This IS the Mahalanobis distance from MOD-04! The "distance" that accounts for uncertainty shape.</a:t>
+              <a:t>This is the Mahalanobis distance from MOD-04! The "distance" that accounts for uncertainty shape.</a:t>
             </a:r>
             <a:endParaRPr lang="en-US" sz="1200" dirty="0"/>
           </a:p>
@@ -14147,7 +15037,7 @@
                 <a:ea typeface="Arial" pitchFamily="34" charset="-122"/>
                 <a:cs typeface="Arial" pitchFamily="34" charset="-120"/>
               </a:rPr>
-              <a:t>"The probability of ending up at x',</a:t>
+              <a:t>The probability of ending up at x',</a:t>
             </a:r>
             <a:endParaRPr lang="en-US" sz="1200" dirty="0"/>
           </a:p>
@@ -14181,7 +15071,7 @@
                 <a:ea typeface="Arial" pitchFamily="34" charset="-122"/>
                 <a:cs typeface="Arial" pitchFamily="34" charset="-120"/>
               </a:rPr>
-              <a:t>is a Gaussian centered on f(x,u) with spread Q."</a:t>
+              <a:t>is a Gaussian centered on f(x,u) with spread Q.</a:t>
             </a:r>
             <a:endParaRPr lang="en-US" sz="1200" dirty="0"/>
           </a:p>
@@ -14247,7 +15137,7 @@
                 <a:ea typeface="Arial" pitchFamily="34" charset="-122"/>
                 <a:cs typeface="Arial" pitchFamily="34" charset="-120"/>
               </a:rPr>
-              <a:t>This IS the same thing, just written differently:</a:t>
+              <a:t>This is the same thing, just written differently:</a:t>
             </a:r>
             <a:endParaRPr lang="en-US" sz="1200" dirty="0"/>
           </a:p>
@@ -14306,7 +15196,7 @@
                     <a:ea typeface="Arial" pitchFamily="34" charset="-122"/>
                     <a:cs typeface="Arial" pitchFamily="34" charset="-120"/>
                   </a:rPr>
-                  <a:t>MOD-05: "p(x'|x,u) = N([3.2, 5.1], </a:t>
+                  <a:t>MOD-05: p(x'|x,u) = N([3.2, 5.1], </a:t>
                 </a:r>
                 <a14:m>
                   <m:oMath xmlns:m="http://schemas.openxmlformats.org/officeDocument/2006/math">
@@ -14454,7 +15344,7 @@
                     <a:ea typeface="Arial" pitchFamily="34" charset="-122"/>
                     <a:cs typeface="Arial" pitchFamily="34" charset="-120"/>
                   </a:rPr>
-                  <a:t> )"
+                  <a:t> )
 </a:t>
                 </a:r>
                 <a:endParaRPr lang="en-US" sz="1200" dirty="0"/>
@@ -14499,7 +15389,7 @@
               <a:blipFill>
                 <a:blip r:embed="rId3"/>
                 <a:stretch>
-                  <a:fillRect t="-667" b="-48000"/>
+                  <a:fillRect t="-667" b="-28000"/>
                 </a:stretch>
               </a:blipFill>
               <a:ln/>
@@ -14749,7 +15639,7 @@
                 <a:ea typeface="Arial" pitchFamily="34" charset="-122"/>
                 <a:cs typeface="Arial" pitchFamily="34" charset="-120"/>
               </a:rPr>
-              <a:t>For each possible current position x: multiply "where I might be" × "where I'd end up" → integrate → new belief.</a:t>
+              <a:t>For each possible current position x: multiply "where I might be” by “where I'd end up" → integrate → new belief.</a:t>
             </a:r>
             <a:endParaRPr lang="en-US" sz="1200" dirty="0"/>
           </a:p>
@@ -15718,7 +16608,7 @@
                 <a:ea typeface="Arial" pitchFamily="34" charset="-122"/>
                 <a:cs typeface="Arial" pitchFamily="34" charset="-120"/>
               </a:rPr>
-              <a:t>"The probability of observing z,</a:t>
+              <a:t>The probability of observing z,</a:t>
             </a:r>
             <a:endParaRPr lang="en-US" sz="1200" dirty="0"/>
           </a:p>
@@ -15752,7 +16642,7 @@
                 <a:ea typeface="Arial" pitchFamily="34" charset="-122"/>
                 <a:cs typeface="Arial" pitchFamily="34" charset="-120"/>
               </a:rPr>
-              <a:t>is Gaussian centered on h(x) with spread R."</a:t>
+              <a:t>is Gaussian centered on h(x) with spread R.</a:t>
             </a:r>
             <a:endParaRPr lang="en-US" sz="1200" dirty="0"/>
           </a:p>
@@ -17567,7 +18457,29 @@
                 <a:ea typeface="Arial" pitchFamily="34" charset="-122"/>
                 <a:cs typeface="Arial" pitchFamily="34" charset="-120"/>
               </a:rPr>
-              <a:t>It repeats: predict → update → predict → update → ...
+              <a:t>It repeats</a:t>
+            </a:r>
+            <a:r>
+              <a:rPr lang="en-US" sz="1200">
+                <a:solidFill>
+                  <a:srgbClr val="1F2937"/>
+                </a:solidFill>
+                <a:latin typeface="Arial" pitchFamily="34" charset="0"/>
+                <a:ea typeface="Arial" pitchFamily="34" charset="-122"/>
+                <a:cs typeface="Arial" pitchFamily="34" charset="-120"/>
+              </a:rPr>
+              <a:t>: predict → update → predict → update </a:t>
+            </a:r>
+            <a:r>
+              <a:rPr lang="en-US" sz="1200" dirty="0">
+                <a:solidFill>
+                  <a:srgbClr val="1F2937"/>
+                </a:solidFill>
+                <a:latin typeface="Arial" pitchFamily="34" charset="0"/>
+                <a:ea typeface="Arial" pitchFamily="34" charset="-122"/>
+                <a:cs typeface="Arial" pitchFamily="34" charset="-120"/>
+              </a:rPr>
+              <a:t>→ ...
 </a:t>
             </a:r>
             <a:endParaRPr lang="en-US" sz="1200" dirty="0"/>
@@ -17791,7 +18703,23 @@
                 <a:ea typeface="Arial" pitchFamily="34" charset="-122"/>
                 <a:cs typeface="Arial" pitchFamily="34" charset="-120"/>
               </a:rPr>
-              <a:t>Robot is on a 10-meter line. One landmark at position 7m.</a:t>
+              <a:t>Robot is on a 10-meter line. </a:t>
+            </a:r>
+          </a:p>
+          <a:p>
+            <a:pPr marL="0" indent="0">
+              <a:buNone/>
+            </a:pPr>
+            <a:r>
+              <a:rPr lang="en-US" sz="1300" dirty="0">
+                <a:solidFill>
+                  <a:srgbClr val="1F2937"/>
+                </a:solidFill>
+                <a:latin typeface="Arial" pitchFamily="34" charset="0"/>
+                <a:ea typeface="Arial" pitchFamily="34" charset="-122"/>
+                <a:cs typeface="Arial" pitchFamily="34" charset="-120"/>
+              </a:rPr>
+              <a:t>One landmark at position 7m.</a:t>
             </a:r>
             <a:endParaRPr lang="en-US" sz="1300" dirty="0"/>
           </a:p>
@@ -17811,10 +18739,10 @@
         </p:nvGrpSpPr>
         <p:grpSpPr>
           <a:xfrm>
-            <a:off x="344920" y="1011156"/>
-            <a:ext cx="8503920" cy="1371600"/>
+            <a:off x="365760" y="1165860"/>
+            <a:ext cx="8595356" cy="1371600"/>
             <a:chOff x="338328" y="1027105"/>
-            <a:chExt cx="8503920" cy="1371600"/>
+            <a:chExt cx="8595356" cy="1371600"/>
           </a:xfrm>
         </p:grpSpPr>
         <p:sp>
@@ -18491,8 +19419,8 @@
           </p:nvSpPr>
           <p:spPr>
             <a:xfrm>
-              <a:off x="8567928" y="2170105"/>
-              <a:ext cx="274320" cy="228600"/>
+              <a:off x="8567927" y="2170105"/>
+              <a:ext cx="365757" cy="228600"/>
             </a:xfrm>
             <a:prstGeom prst="rect">
               <a:avLst/>
@@ -19190,7 +20118,7 @@
         </p:nvSpPr>
         <p:spPr>
           <a:xfrm>
-            <a:off x="365760" y="2377440"/>
+            <a:off x="365760" y="2537460"/>
             <a:ext cx="8229600" cy="274320"/>
           </a:xfrm>
           <a:prstGeom prst="rect">
@@ -20313,7 +21241,18 @@
                         <a:ea typeface="Arial" pitchFamily="34" charset="-122"/>
                         <a:cs typeface="Arial" pitchFamily="34" charset="-120"/>
                       </a:rPr>
-                      <m:t>′|</m:t>
+                      <m:t>′</m:t>
+                    </m:r>
+                    <m:r>
+                      <a:rPr lang="en-US" sz="1300" b="1" i="1" dirty="0" smtClean="0">
+                        <a:solidFill>
+                          <a:srgbClr val="EF4444"/>
+                        </a:solidFill>
+                        <a:latin typeface="Cambria Math" panose="02040503050406030204" pitchFamily="18" charset="0"/>
+                        <a:ea typeface="Arial" pitchFamily="34" charset="-122"/>
+                        <a:cs typeface="Arial" pitchFamily="34" charset="-120"/>
+                      </a:rPr>
+                      <m:t>|</m:t>
                     </m:r>
                     <m:r>
                       <a:rPr lang="en-US" sz="1300" b="1" i="1" dirty="0" smtClean="0">
@@ -23238,1676 +24177,3439 @@
           </a:p>
         </p:txBody>
       </p:sp>
-      <p:graphicFrame>
-        <p:nvGraphicFramePr>
-          <p:cNvPr id="32" name="Table 0"/>
-          <p:cNvGraphicFramePr>
-            <a:graphicFrameLocks noGrp="1"/>
-          </p:cNvGraphicFramePr>
-          <p:nvPr>
-            <p:extLst>
-              <p:ext uri="{D42A27DB-BD31-4B8C-83A1-F6EECF244321}">
-                <p14:modId xmlns:p14="http://schemas.microsoft.com/office/powerpoint/2010/main" val="1436227910"/>
-              </p:ext>
-            </p:extLst>
-          </p:nvPr>
-        </p:nvGraphicFramePr>
-        <p:xfrm>
-          <a:off x="269358" y="2468880"/>
-          <a:ext cx="8600322" cy="1645920"/>
-        </p:xfrm>
-        <a:graphic>
-          <a:graphicData uri="http://schemas.openxmlformats.org/drawingml/2006/table">
-            <a:tbl>
-              <a:tblPr/>
-              <a:tblGrid>
-                <a:gridCol w="914928">
-                  <a:extLst>
-                    <a:ext uri="{9D8B030D-6E8A-4147-A177-3AD203B41FA5}">
-                      <a16:colId xmlns:a16="http://schemas.microsoft.com/office/drawing/2014/main" val="20000"/>
-                    </a:ext>
-                  </a:extLst>
-                </a:gridCol>
-                <a:gridCol w="914928">
-                  <a:extLst>
-                    <a:ext uri="{9D8B030D-6E8A-4147-A177-3AD203B41FA5}">
-                      <a16:colId xmlns:a16="http://schemas.microsoft.com/office/drawing/2014/main" val="20001"/>
-                    </a:ext>
-                  </a:extLst>
-                </a:gridCol>
-                <a:gridCol w="2927769">
-                  <a:extLst>
-                    <a:ext uri="{9D8B030D-6E8A-4147-A177-3AD203B41FA5}">
-                      <a16:colId xmlns:a16="http://schemas.microsoft.com/office/drawing/2014/main" val="20002"/>
-                    </a:ext>
-                  </a:extLst>
-                </a:gridCol>
-                <a:gridCol w="3842697">
-                  <a:extLst>
-                    <a:ext uri="{9D8B030D-6E8A-4147-A177-3AD203B41FA5}">
-                      <a16:colId xmlns:a16="http://schemas.microsoft.com/office/drawing/2014/main" val="20003"/>
-                    </a:ext>
-                  </a:extLst>
-                </a:gridCol>
-              </a:tblGrid>
-              <a:tr h="272312">
-                <a:tc>
-                  <a:txBody>
-                    <a:bodyPr/>
-                    <a:lstStyle/>
-                    <a:p>
-                      <a:pPr marL="0" indent="0">
-                        <a:buNone/>
-                      </a:pPr>
-                      <a:r>
-                        <a:rPr lang="en-US" sz="1200" b="1" dirty="0">
+      <mc:AlternateContent xmlns:mc="http://schemas.openxmlformats.org/markup-compatibility/2006">
+        <mc:Choice xmlns:a14="http://schemas.microsoft.com/office/drawing/2010/main" Requires="a14">
+          <p:graphicFrame>
+            <p:nvGraphicFramePr>
+              <p:cNvPr id="32" name="Table 0"/>
+              <p:cNvGraphicFramePr>
+                <a:graphicFrameLocks noGrp="1"/>
+              </p:cNvGraphicFramePr>
+              <p:nvPr>
+                <p:extLst>
+                  <p:ext uri="{D42A27DB-BD31-4B8C-83A1-F6EECF244321}">
+                    <p14:modId xmlns:p14="http://schemas.microsoft.com/office/powerpoint/2010/main" val="3580551478"/>
+                  </p:ext>
+                </p:extLst>
+              </p:nvPr>
+            </p:nvGraphicFramePr>
+            <p:xfrm>
+              <a:off x="269358" y="2468880"/>
+              <a:ext cx="8600322" cy="1660843"/>
+            </p:xfrm>
+            <a:graphic>
+              <a:graphicData uri="http://schemas.openxmlformats.org/drawingml/2006/table">
+                <a:tbl>
+                  <a:tblPr/>
+                  <a:tblGrid>
+                    <a:gridCol w="914928">
+                      <a:extLst>
+                        <a:ext uri="{9D8B030D-6E8A-4147-A177-3AD203B41FA5}">
+                          <a16:colId xmlns:a16="http://schemas.microsoft.com/office/drawing/2014/main" val="20000"/>
+                        </a:ext>
+                      </a:extLst>
+                    </a:gridCol>
+                    <a:gridCol w="914928">
+                      <a:extLst>
+                        <a:ext uri="{9D8B030D-6E8A-4147-A177-3AD203B41FA5}">
+                          <a16:colId xmlns:a16="http://schemas.microsoft.com/office/drawing/2014/main" val="20001"/>
+                        </a:ext>
+                      </a:extLst>
+                    </a:gridCol>
+                    <a:gridCol w="2927769">
+                      <a:extLst>
+                        <a:ext uri="{9D8B030D-6E8A-4147-A177-3AD203B41FA5}">
+                          <a16:colId xmlns:a16="http://schemas.microsoft.com/office/drawing/2014/main" val="20002"/>
+                        </a:ext>
+                      </a:extLst>
+                    </a:gridCol>
+                    <a:gridCol w="3842697">
+                      <a:extLst>
+                        <a:ext uri="{9D8B030D-6E8A-4147-A177-3AD203B41FA5}">
+                          <a16:colId xmlns:a16="http://schemas.microsoft.com/office/drawing/2014/main" val="20003"/>
+                        </a:ext>
+                      </a:extLst>
+                    </a:gridCol>
+                  </a:tblGrid>
+                  <a:tr h="272312">
+                    <a:tc>
+                      <a:txBody>
+                        <a:bodyPr/>
+                        <a:lstStyle/>
+                        <a:p>
+                          <a:pPr marL="0" indent="0">
+                            <a:buNone/>
+                          </a:pPr>
+                          <a:r>
+                            <a:rPr lang="en-US" sz="1200" b="1" dirty="0">
+                              <a:solidFill>
+                                <a:srgbClr val="FFFFFF"/>
+                              </a:solidFill>
+                              <a:latin typeface="Arial" pitchFamily="34" charset="0"/>
+                              <a:ea typeface="Arial" pitchFamily="34" charset="-122"/>
+                              <a:cs typeface="Arial" pitchFamily="34" charset="-120"/>
+                            </a:rPr>
+                            <a:t>Matrix</a:t>
+                          </a:r>
+                          <a:endParaRPr lang="en-US" sz="1200" dirty="0">
+                            <a:latin typeface="Arial" charset="0"/>
+                            <a:ea typeface="Arial" charset="0"/>
+                            <a:cs typeface="Arial" charset="0"/>
+                          </a:endParaRPr>
+                        </a:p>
+                      </a:txBody>
+                      <a:tcPr>
+                        <a:lnL w="6350" cap="flat" cmpd="sng" algn="ctr">
                           <a:solidFill>
-                            <a:srgbClr val="FFFFFF"/>
+                            <a:srgbClr val="D1D5DB"/>
                           </a:solidFill>
-                          <a:latin typeface="Arial" pitchFamily="34" charset="0"/>
-                          <a:ea typeface="Arial" pitchFamily="34" charset="-122"/>
-                          <a:cs typeface="Arial" pitchFamily="34" charset="-120"/>
-                        </a:rPr>
-                        <a:t>Matrix</a:t>
-                      </a:r>
-                      <a:endParaRPr lang="en-US" sz="1200" dirty="0">
-                        <a:latin typeface="Arial" charset="0"/>
-                        <a:ea typeface="Arial" charset="0"/>
-                        <a:cs typeface="Arial" charset="0"/>
-                      </a:endParaRPr>
-                    </a:p>
-                  </a:txBody>
-                  <a:tcPr>
-                    <a:lnL w="6350" cap="flat" cmpd="sng" algn="ctr">
-                      <a:solidFill>
-                        <a:srgbClr val="D1D5DB"/>
-                      </a:solidFill>
-                      <a:prstDash val="solid"/>
-                      <a:round/>
-                      <a:headEnd type="none" w="med" len="med"/>
-                      <a:tailEnd type="none" w="med" len="med"/>
-                    </a:lnL>
-                    <a:lnR w="6350" cap="flat" cmpd="sng" algn="ctr">
-                      <a:solidFill>
-                        <a:srgbClr val="D1D5DB"/>
-                      </a:solidFill>
-                      <a:prstDash val="solid"/>
-                      <a:round/>
-                      <a:headEnd type="none" w="med" len="med"/>
-                      <a:tailEnd type="none" w="med" len="med"/>
-                    </a:lnR>
-                    <a:lnT w="6350" cap="flat" cmpd="sng" algn="ctr">
-                      <a:solidFill>
-                        <a:srgbClr val="D1D5DB"/>
-                      </a:solidFill>
-                      <a:prstDash val="solid"/>
-                      <a:round/>
-                      <a:headEnd type="none" w="med" len="med"/>
-                      <a:tailEnd type="none" w="med" len="med"/>
-                    </a:lnT>
-                    <a:lnB w="6350" cap="flat" cmpd="sng" algn="ctr">
-                      <a:solidFill>
-                        <a:srgbClr val="D1D5DB"/>
-                      </a:solidFill>
-                      <a:prstDash val="solid"/>
-                      <a:round/>
-                      <a:headEnd type="none" w="med" len="med"/>
-                      <a:tailEnd type="none" w="med" len="med"/>
-                    </a:lnB>
-                    <a:solidFill>
-                      <a:srgbClr val="0F4C81"/>
-                    </a:solidFill>
-                  </a:tcPr>
-                </a:tc>
-                <a:tc>
-                  <a:txBody>
-                    <a:bodyPr/>
-                    <a:lstStyle/>
-                    <a:p>
-                      <a:pPr marL="0" indent="0">
-                        <a:buNone/>
-                      </a:pPr>
-                      <a:r>
-                        <a:rPr lang="en-US" sz="1200" b="1" dirty="0">
+                          <a:prstDash val="solid"/>
+                          <a:round/>
+                          <a:headEnd type="none" w="med" len="med"/>
+                          <a:tailEnd type="none" w="med" len="med"/>
+                        </a:lnL>
+                        <a:lnR w="6350" cap="flat" cmpd="sng" algn="ctr">
                           <a:solidFill>
-                            <a:srgbClr val="FFFFFF"/>
+                            <a:srgbClr val="D1D5DB"/>
                           </a:solidFill>
-                          <a:latin typeface="Arial" pitchFamily="34" charset="0"/>
-                          <a:ea typeface="Arial" pitchFamily="34" charset="-122"/>
-                          <a:cs typeface="Arial" pitchFamily="34" charset="-120"/>
-                        </a:rPr>
-                        <a:t>Size</a:t>
-                      </a:r>
-                      <a:endParaRPr lang="en-US" sz="1200" dirty="0">
-                        <a:latin typeface="Arial" charset="0"/>
-                        <a:ea typeface="Arial" charset="0"/>
-                        <a:cs typeface="Arial" charset="0"/>
-                      </a:endParaRPr>
-                    </a:p>
-                  </a:txBody>
-                  <a:tcPr>
-                    <a:lnL w="6350" cap="flat" cmpd="sng" algn="ctr">
-                      <a:solidFill>
-                        <a:srgbClr val="D1D5DB"/>
-                      </a:solidFill>
-                      <a:prstDash val="solid"/>
-                      <a:round/>
-                      <a:headEnd type="none" w="med" len="med"/>
-                      <a:tailEnd type="none" w="med" len="med"/>
-                    </a:lnL>
-                    <a:lnR w="6350" cap="flat" cmpd="sng" algn="ctr">
-                      <a:solidFill>
-                        <a:srgbClr val="D1D5DB"/>
-                      </a:solidFill>
-                      <a:prstDash val="solid"/>
-                      <a:round/>
-                      <a:headEnd type="none" w="med" len="med"/>
-                      <a:tailEnd type="none" w="med" len="med"/>
-                    </a:lnR>
-                    <a:lnT w="6350" cap="flat" cmpd="sng" algn="ctr">
-                      <a:solidFill>
-                        <a:srgbClr val="D1D5DB"/>
-                      </a:solidFill>
-                      <a:prstDash val="solid"/>
-                      <a:round/>
-                      <a:headEnd type="none" w="med" len="med"/>
-                      <a:tailEnd type="none" w="med" len="med"/>
-                    </a:lnT>
-                    <a:lnB w="6350" cap="flat" cmpd="sng" algn="ctr">
-                      <a:solidFill>
-                        <a:srgbClr val="D1D5DB"/>
-                      </a:solidFill>
-                      <a:prstDash val="solid"/>
-                      <a:round/>
-                      <a:headEnd type="none" w="med" len="med"/>
-                      <a:tailEnd type="none" w="med" len="med"/>
-                    </a:lnB>
-                    <a:solidFill>
-                      <a:srgbClr val="0F4C81"/>
-                    </a:solidFill>
-                  </a:tcPr>
-                </a:tc>
-                <a:tc>
-                  <a:txBody>
-                    <a:bodyPr/>
-                    <a:lstStyle/>
-                    <a:p>
-                      <a:pPr marL="0" indent="0">
-                        <a:buNone/>
-                      </a:pPr>
-                      <a:r>
-                        <a:rPr lang="en-US" sz="1200" b="1" dirty="0">
+                          <a:prstDash val="solid"/>
+                          <a:round/>
+                          <a:headEnd type="none" w="med" len="med"/>
+                          <a:tailEnd type="none" w="med" len="med"/>
+                        </a:lnR>
+                        <a:lnT w="6350" cap="flat" cmpd="sng" algn="ctr">
                           <a:solidFill>
-                            <a:srgbClr val="FFFFFF"/>
+                            <a:srgbClr val="D1D5DB"/>
                           </a:solidFill>
-                          <a:latin typeface="Arial" pitchFamily="34" charset="0"/>
-                          <a:ea typeface="Arial" pitchFamily="34" charset="-122"/>
-                          <a:cs typeface="Arial" pitchFamily="34" charset="-120"/>
-                        </a:rPr>
-                        <a:t>Meaning</a:t>
-                      </a:r>
-                      <a:endParaRPr lang="en-US" sz="1200" dirty="0">
-                        <a:latin typeface="Arial" charset="0"/>
-                        <a:ea typeface="Arial" charset="0"/>
-                        <a:cs typeface="Arial" charset="0"/>
-                      </a:endParaRPr>
-                    </a:p>
-                  </a:txBody>
-                  <a:tcPr>
-                    <a:lnL w="6350" cap="flat" cmpd="sng" algn="ctr">
-                      <a:solidFill>
-                        <a:srgbClr val="D1D5DB"/>
-                      </a:solidFill>
-                      <a:prstDash val="solid"/>
-                      <a:round/>
-                      <a:headEnd type="none" w="med" len="med"/>
-                      <a:tailEnd type="none" w="med" len="med"/>
-                    </a:lnL>
-                    <a:lnR w="6350" cap="flat" cmpd="sng" algn="ctr">
-                      <a:solidFill>
-                        <a:srgbClr val="D1D5DB"/>
-                      </a:solidFill>
-                      <a:prstDash val="solid"/>
-                      <a:round/>
-                      <a:headEnd type="none" w="med" len="med"/>
-                      <a:tailEnd type="none" w="med" len="med"/>
-                    </a:lnR>
-                    <a:lnT w="6350" cap="flat" cmpd="sng" algn="ctr">
-                      <a:solidFill>
-                        <a:srgbClr val="D1D5DB"/>
-                      </a:solidFill>
-                      <a:prstDash val="solid"/>
-                      <a:round/>
-                      <a:headEnd type="none" w="med" len="med"/>
-                      <a:tailEnd type="none" w="med" len="med"/>
-                    </a:lnT>
-                    <a:lnB w="6350" cap="flat" cmpd="sng" algn="ctr">
-                      <a:solidFill>
-                        <a:srgbClr val="D1D5DB"/>
-                      </a:solidFill>
-                      <a:prstDash val="solid"/>
-                      <a:round/>
-                      <a:headEnd type="none" w="med" len="med"/>
-                      <a:tailEnd type="none" w="med" len="med"/>
-                    </a:lnB>
-                    <a:solidFill>
-                      <a:srgbClr val="0F4C81"/>
-                    </a:solidFill>
-                  </a:tcPr>
-                </a:tc>
-                <a:tc>
-                  <a:txBody>
-                    <a:bodyPr/>
-                    <a:lstStyle/>
-                    <a:p>
-                      <a:pPr marL="0" indent="0">
-                        <a:buNone/>
-                      </a:pPr>
-                      <a:r>
-                        <a:rPr lang="en-US" sz="1200" b="1" dirty="0">
+                          <a:prstDash val="solid"/>
+                          <a:round/>
+                          <a:headEnd type="none" w="med" len="med"/>
+                          <a:tailEnd type="none" w="med" len="med"/>
+                        </a:lnT>
+                        <a:lnB w="6350" cap="flat" cmpd="sng" algn="ctr">
                           <a:solidFill>
-                            <a:srgbClr val="FFFFFF"/>
+                            <a:srgbClr val="D1D5DB"/>
                           </a:solidFill>
-                          <a:latin typeface="Arial" pitchFamily="34" charset="0"/>
-                          <a:ea typeface="Arial" pitchFamily="34" charset="-122"/>
-                          <a:cs typeface="Arial" pitchFamily="34" charset="-120"/>
-                        </a:rPr>
-                        <a:t>Robot Example</a:t>
-                      </a:r>
-                      <a:endParaRPr lang="en-US" sz="1200" dirty="0">
-                        <a:latin typeface="Arial" charset="0"/>
-                        <a:ea typeface="Arial" charset="0"/>
-                        <a:cs typeface="Arial" charset="0"/>
-                      </a:endParaRPr>
-                    </a:p>
-                  </a:txBody>
-                  <a:tcPr>
-                    <a:lnL w="6350" cap="flat" cmpd="sng" algn="ctr">
-                      <a:solidFill>
-                        <a:srgbClr val="D1D5DB"/>
-                      </a:solidFill>
-                      <a:prstDash val="solid"/>
-                      <a:round/>
-                      <a:headEnd type="none" w="med" len="med"/>
-                      <a:tailEnd type="none" w="med" len="med"/>
-                    </a:lnL>
-                    <a:lnR w="6350" cap="flat" cmpd="sng" algn="ctr">
-                      <a:solidFill>
-                        <a:srgbClr val="D1D5DB"/>
-                      </a:solidFill>
-                      <a:prstDash val="solid"/>
-                      <a:round/>
-                      <a:headEnd type="none" w="med" len="med"/>
-                      <a:tailEnd type="none" w="med" len="med"/>
-                    </a:lnR>
-                    <a:lnT w="6350" cap="flat" cmpd="sng" algn="ctr">
-                      <a:solidFill>
-                        <a:srgbClr val="D1D5DB"/>
-                      </a:solidFill>
-                      <a:prstDash val="solid"/>
-                      <a:round/>
-                      <a:headEnd type="none" w="med" len="med"/>
-                      <a:tailEnd type="none" w="med" len="med"/>
-                    </a:lnT>
-                    <a:lnB w="6350" cap="flat" cmpd="sng" algn="ctr">
-                      <a:solidFill>
-                        <a:srgbClr val="D1D5DB"/>
-                      </a:solidFill>
-                      <a:prstDash val="solid"/>
-                      <a:round/>
-                      <a:headEnd type="none" w="med" len="med"/>
-                      <a:tailEnd type="none" w="med" len="med"/>
-                    </a:lnB>
-                    <a:solidFill>
-                      <a:srgbClr val="0F4C81"/>
-                    </a:solidFill>
-                  </a:tcPr>
-                </a:tc>
-                <a:extLst>
-                  <a:ext uri="{0D108BD9-81ED-4DB2-BD59-A6C34878D82A}">
-                    <a16:rowId xmlns:a16="http://schemas.microsoft.com/office/drawing/2014/main" val="10000"/>
-                  </a:ext>
-                </a:extLst>
-              </a:tr>
-              <a:tr h="272312">
-                <a:tc>
-                  <a:txBody>
-                    <a:bodyPr/>
-                    <a:lstStyle/>
-                    <a:p>
-                      <a:pPr marL="0" indent="0">
-                        <a:buNone/>
-                      </a:pPr>
-                      <a:r>
-                        <a:rPr lang="en-US" sz="1200" dirty="0">
+                          <a:prstDash val="solid"/>
+                          <a:round/>
+                          <a:headEnd type="none" w="med" len="med"/>
+                          <a:tailEnd type="none" w="med" len="med"/>
+                        </a:lnB>
+                        <a:solidFill>
+                          <a:srgbClr val="0F4C81"/>
+                        </a:solidFill>
+                      </a:tcPr>
+                    </a:tc>
+                    <a:tc>
+                      <a:txBody>
+                        <a:bodyPr/>
+                        <a:lstStyle/>
+                        <a:p>
+                          <a:pPr marL="0" indent="0">
+                            <a:buNone/>
+                          </a:pPr>
+                          <a:r>
+                            <a:rPr lang="en-US" sz="1200" b="1" dirty="0">
+                              <a:solidFill>
+                                <a:srgbClr val="FFFFFF"/>
+                              </a:solidFill>
+                              <a:latin typeface="Arial" pitchFamily="34" charset="0"/>
+                              <a:ea typeface="Arial" pitchFamily="34" charset="-122"/>
+                              <a:cs typeface="Arial" pitchFamily="34" charset="-120"/>
+                            </a:rPr>
+                            <a:t>Size</a:t>
+                          </a:r>
+                          <a:endParaRPr lang="en-US" sz="1200" dirty="0">
+                            <a:latin typeface="Arial" charset="0"/>
+                            <a:ea typeface="Arial" charset="0"/>
+                            <a:cs typeface="Arial" charset="0"/>
+                          </a:endParaRPr>
+                        </a:p>
+                      </a:txBody>
+                      <a:tcPr>
+                        <a:lnL w="6350" cap="flat" cmpd="sng" algn="ctr">
                           <a:solidFill>
-                            <a:srgbClr val="000000"/>
+                            <a:srgbClr val="D1D5DB"/>
                           </a:solidFill>
-                          <a:latin typeface="Arial" pitchFamily="34" charset="0"/>
-                          <a:ea typeface="Arial" pitchFamily="34" charset="-122"/>
-                          <a:cs typeface="Arial" pitchFamily="34" charset="-120"/>
-                        </a:rPr>
-                        <a:t>A</a:t>
-                      </a:r>
-                      <a:endParaRPr lang="en-US" sz="1200" dirty="0">
-                        <a:latin typeface="Arial" charset="0"/>
-                        <a:ea typeface="Arial" charset="0"/>
-                        <a:cs typeface="Arial" charset="0"/>
-                      </a:endParaRPr>
-                    </a:p>
-                  </a:txBody>
-                  <a:tcPr>
-                    <a:lnL w="6350" cap="flat" cmpd="sng" algn="ctr">
-                      <a:solidFill>
-                        <a:srgbClr val="D1D5DB"/>
-                      </a:solidFill>
-                      <a:prstDash val="solid"/>
-                      <a:round/>
-                      <a:headEnd type="none" w="med" len="med"/>
-                      <a:tailEnd type="none" w="med" len="med"/>
-                    </a:lnL>
-                    <a:lnR w="6350" cap="flat" cmpd="sng" algn="ctr">
-                      <a:solidFill>
-                        <a:srgbClr val="D1D5DB"/>
-                      </a:solidFill>
-                      <a:prstDash val="solid"/>
-                      <a:round/>
-                      <a:headEnd type="none" w="med" len="med"/>
-                      <a:tailEnd type="none" w="med" len="med"/>
-                    </a:lnR>
-                    <a:lnT w="6350" cap="flat" cmpd="sng" algn="ctr">
-                      <a:solidFill>
-                        <a:srgbClr val="D1D5DB"/>
-                      </a:solidFill>
-                      <a:prstDash val="solid"/>
-                      <a:round/>
-                      <a:headEnd type="none" w="med" len="med"/>
-                      <a:tailEnd type="none" w="med" len="med"/>
-                    </a:lnT>
-                    <a:lnB w="6350" cap="flat" cmpd="sng" algn="ctr">
-                      <a:solidFill>
-                        <a:srgbClr val="D1D5DB"/>
-                      </a:solidFill>
-                      <a:prstDash val="solid"/>
-                      <a:round/>
-                      <a:headEnd type="none" w="med" len="med"/>
-                      <a:tailEnd type="none" w="med" len="med"/>
-                    </a:lnB>
-                  </a:tcPr>
-                </a:tc>
-                <a:tc>
-                  <a:txBody>
-                    <a:bodyPr/>
-                    <a:lstStyle/>
-                    <a:p>
-                      <a:pPr marL="0" indent="0">
-                        <a:buNone/>
-                      </a:pPr>
-                      <a:r>
-                        <a:rPr lang="en-US" sz="1200" dirty="0">
+                          <a:prstDash val="solid"/>
+                          <a:round/>
+                          <a:headEnd type="none" w="med" len="med"/>
+                          <a:tailEnd type="none" w="med" len="med"/>
+                        </a:lnL>
+                        <a:lnR w="6350" cap="flat" cmpd="sng" algn="ctr">
                           <a:solidFill>
-                            <a:srgbClr val="000000"/>
+                            <a:srgbClr val="D1D5DB"/>
                           </a:solidFill>
-                          <a:latin typeface="Arial" pitchFamily="34" charset="0"/>
-                          <a:ea typeface="Arial" pitchFamily="34" charset="-122"/>
-                          <a:cs typeface="Arial" pitchFamily="34" charset="-120"/>
-                        </a:rPr>
-                        <a:t>n×n</a:t>
-                      </a:r>
-                      <a:endParaRPr lang="en-US" sz="1200" dirty="0">
-                        <a:latin typeface="Arial" charset="0"/>
-                        <a:ea typeface="Arial" charset="0"/>
-                        <a:cs typeface="Arial" charset="0"/>
-                      </a:endParaRPr>
-                    </a:p>
-                  </a:txBody>
-                  <a:tcPr>
-                    <a:lnL w="6350" cap="flat" cmpd="sng" algn="ctr">
-                      <a:solidFill>
-                        <a:srgbClr val="D1D5DB"/>
-                      </a:solidFill>
-                      <a:prstDash val="solid"/>
-                      <a:round/>
-                      <a:headEnd type="none" w="med" len="med"/>
-                      <a:tailEnd type="none" w="med" len="med"/>
-                    </a:lnL>
-                    <a:lnR w="6350" cap="flat" cmpd="sng" algn="ctr">
-                      <a:solidFill>
-                        <a:srgbClr val="D1D5DB"/>
-                      </a:solidFill>
-                      <a:prstDash val="solid"/>
-                      <a:round/>
-                      <a:headEnd type="none" w="med" len="med"/>
-                      <a:tailEnd type="none" w="med" len="med"/>
-                    </a:lnR>
-                    <a:lnT w="6350" cap="flat" cmpd="sng" algn="ctr">
-                      <a:solidFill>
-                        <a:srgbClr val="D1D5DB"/>
-                      </a:solidFill>
-                      <a:prstDash val="solid"/>
-                      <a:round/>
-                      <a:headEnd type="none" w="med" len="med"/>
-                      <a:tailEnd type="none" w="med" len="med"/>
-                    </a:lnT>
-                    <a:lnB w="6350" cap="flat" cmpd="sng" algn="ctr">
-                      <a:solidFill>
-                        <a:srgbClr val="D1D5DB"/>
-                      </a:solidFill>
-                      <a:prstDash val="solid"/>
-                      <a:round/>
-                      <a:headEnd type="none" w="med" len="med"/>
-                      <a:tailEnd type="none" w="med" len="med"/>
-                    </a:lnB>
-                  </a:tcPr>
-                </a:tc>
-                <a:tc>
-                  <a:txBody>
-                    <a:bodyPr/>
-                    <a:lstStyle/>
-                    <a:p>
-                      <a:pPr marL="0" indent="0">
-                        <a:buNone/>
-                      </a:pPr>
-                      <a:r>
-                        <a:rPr lang="en-US" sz="1200" dirty="0">
+                          <a:prstDash val="solid"/>
+                          <a:round/>
+                          <a:headEnd type="none" w="med" len="med"/>
+                          <a:tailEnd type="none" w="med" len="med"/>
+                        </a:lnR>
+                        <a:lnT w="6350" cap="flat" cmpd="sng" algn="ctr">
                           <a:solidFill>
-                            <a:srgbClr val="000000"/>
+                            <a:srgbClr val="D1D5DB"/>
                           </a:solidFill>
-                          <a:latin typeface="Arial" pitchFamily="34" charset="0"/>
-                          <a:ea typeface="Arial" pitchFamily="34" charset="-122"/>
-                          <a:cs typeface="Arial" pitchFamily="34" charset="-120"/>
-                        </a:rPr>
-                        <a:t>How state evolves in one step</a:t>
-                      </a:r>
-                      <a:endParaRPr lang="en-US" sz="1200" dirty="0">
-                        <a:latin typeface="Arial" charset="0"/>
-                        <a:ea typeface="Arial" charset="0"/>
-                        <a:cs typeface="Arial" charset="0"/>
-                      </a:endParaRPr>
-                    </a:p>
-                  </a:txBody>
-                  <a:tcPr>
-                    <a:lnL w="6350" cap="flat" cmpd="sng" algn="ctr">
-                      <a:solidFill>
-                        <a:srgbClr val="D1D5DB"/>
-                      </a:solidFill>
-                      <a:prstDash val="solid"/>
-                      <a:round/>
-                      <a:headEnd type="none" w="med" len="med"/>
-                      <a:tailEnd type="none" w="med" len="med"/>
-                    </a:lnL>
-                    <a:lnR w="6350" cap="flat" cmpd="sng" algn="ctr">
-                      <a:solidFill>
-                        <a:srgbClr val="D1D5DB"/>
-                      </a:solidFill>
-                      <a:prstDash val="solid"/>
-                      <a:round/>
-                      <a:headEnd type="none" w="med" len="med"/>
-                      <a:tailEnd type="none" w="med" len="med"/>
-                    </a:lnR>
-                    <a:lnT w="6350" cap="flat" cmpd="sng" algn="ctr">
-                      <a:solidFill>
-                        <a:srgbClr val="D1D5DB"/>
-                      </a:solidFill>
-                      <a:prstDash val="solid"/>
-                      <a:round/>
-                      <a:headEnd type="none" w="med" len="med"/>
-                      <a:tailEnd type="none" w="med" len="med"/>
-                    </a:lnT>
-                    <a:lnB w="6350" cap="flat" cmpd="sng" algn="ctr">
-                      <a:solidFill>
-                        <a:srgbClr val="D1D5DB"/>
-                      </a:solidFill>
-                      <a:prstDash val="solid"/>
-                      <a:round/>
-                      <a:headEnd type="none" w="med" len="med"/>
-                      <a:tailEnd type="none" w="med" len="med"/>
-                    </a:lnB>
-                  </a:tcPr>
-                </a:tc>
-                <a:tc>
-                  <a:txBody>
-                    <a:bodyPr/>
-                    <a:lstStyle/>
-                    <a:p>
-                      <a:pPr marL="0" indent="0">
-                        <a:buNone/>
-                      </a:pPr>
-                      <a:r>
-                        <a:rPr lang="en-US" sz="1200" dirty="0">
+                          <a:prstDash val="solid"/>
+                          <a:round/>
+                          <a:headEnd type="none" w="med" len="med"/>
+                          <a:tailEnd type="none" w="med" len="med"/>
+                        </a:lnT>
+                        <a:lnB w="6350" cap="flat" cmpd="sng" algn="ctr">
                           <a:solidFill>
-                            <a:srgbClr val="000000"/>
+                            <a:srgbClr val="D1D5DB"/>
                           </a:solidFill>
-                          <a:latin typeface="Arial" pitchFamily="34" charset="0"/>
-                          <a:ea typeface="Arial" pitchFamily="34" charset="-122"/>
-                          <a:cs typeface="Arial" pitchFamily="34" charset="-120"/>
-                        </a:rPr>
-                        <a:t>Position update from velocity</a:t>
-                      </a:r>
-                      <a:endParaRPr lang="en-US" sz="1200" dirty="0">
-                        <a:latin typeface="Arial" charset="0"/>
-                        <a:ea typeface="Arial" charset="0"/>
-                        <a:cs typeface="Arial" charset="0"/>
-                      </a:endParaRPr>
-                    </a:p>
-                  </a:txBody>
-                  <a:tcPr>
-                    <a:lnL w="6350" cap="flat" cmpd="sng" algn="ctr">
-                      <a:solidFill>
-                        <a:srgbClr val="D1D5DB"/>
-                      </a:solidFill>
-                      <a:prstDash val="solid"/>
-                      <a:round/>
-                      <a:headEnd type="none" w="med" len="med"/>
-                      <a:tailEnd type="none" w="med" len="med"/>
-                    </a:lnL>
-                    <a:lnR w="6350" cap="flat" cmpd="sng" algn="ctr">
-                      <a:solidFill>
-                        <a:srgbClr val="D1D5DB"/>
-                      </a:solidFill>
-                      <a:prstDash val="solid"/>
-                      <a:round/>
-                      <a:headEnd type="none" w="med" len="med"/>
-                      <a:tailEnd type="none" w="med" len="med"/>
-                    </a:lnR>
-                    <a:lnT w="6350" cap="flat" cmpd="sng" algn="ctr">
-                      <a:solidFill>
-                        <a:srgbClr val="D1D5DB"/>
-                      </a:solidFill>
-                      <a:prstDash val="solid"/>
-                      <a:round/>
-                      <a:headEnd type="none" w="med" len="med"/>
-                      <a:tailEnd type="none" w="med" len="med"/>
-                    </a:lnT>
-                    <a:lnB w="6350" cap="flat" cmpd="sng" algn="ctr">
-                      <a:solidFill>
-                        <a:srgbClr val="D1D5DB"/>
-                      </a:solidFill>
-                      <a:prstDash val="solid"/>
-                      <a:round/>
-                      <a:headEnd type="none" w="med" len="med"/>
-                      <a:tailEnd type="none" w="med" len="med"/>
-                    </a:lnB>
-                  </a:tcPr>
-                </a:tc>
-                <a:extLst>
-                  <a:ext uri="{0D108BD9-81ED-4DB2-BD59-A6C34878D82A}">
-                    <a16:rowId xmlns:a16="http://schemas.microsoft.com/office/drawing/2014/main" val="10001"/>
-                  </a:ext>
-                </a:extLst>
-              </a:tr>
-              <a:tr h="272312">
-                <a:tc>
-                  <a:txBody>
-                    <a:bodyPr/>
-                    <a:lstStyle/>
-                    <a:p>
-                      <a:pPr marL="0" indent="0">
-                        <a:buNone/>
-                      </a:pPr>
-                      <a:r>
-                        <a:rPr lang="en-US" sz="1200" dirty="0">
+                          <a:prstDash val="solid"/>
+                          <a:round/>
+                          <a:headEnd type="none" w="med" len="med"/>
+                          <a:tailEnd type="none" w="med" len="med"/>
+                        </a:lnB>
+                        <a:solidFill>
+                          <a:srgbClr val="0F4C81"/>
+                        </a:solidFill>
+                      </a:tcPr>
+                    </a:tc>
+                    <a:tc>
+                      <a:txBody>
+                        <a:bodyPr/>
+                        <a:lstStyle/>
+                        <a:p>
+                          <a:pPr marL="0" indent="0">
+                            <a:buNone/>
+                          </a:pPr>
+                          <a:r>
+                            <a:rPr lang="en-US" sz="1200" b="1" dirty="0">
+                              <a:solidFill>
+                                <a:srgbClr val="FFFFFF"/>
+                              </a:solidFill>
+                              <a:latin typeface="Arial" pitchFamily="34" charset="0"/>
+                              <a:ea typeface="Arial" pitchFamily="34" charset="-122"/>
+                              <a:cs typeface="Arial" pitchFamily="34" charset="-120"/>
+                            </a:rPr>
+                            <a:t>Meaning</a:t>
+                          </a:r>
+                          <a:endParaRPr lang="en-US" sz="1200" dirty="0">
+                            <a:latin typeface="Arial" charset="0"/>
+                            <a:ea typeface="Arial" charset="0"/>
+                            <a:cs typeface="Arial" charset="0"/>
+                          </a:endParaRPr>
+                        </a:p>
+                      </a:txBody>
+                      <a:tcPr>
+                        <a:lnL w="6350" cap="flat" cmpd="sng" algn="ctr">
                           <a:solidFill>
-                            <a:srgbClr val="000000"/>
+                            <a:srgbClr val="D1D5DB"/>
                           </a:solidFill>
-                          <a:latin typeface="Arial" pitchFamily="34" charset="0"/>
-                          <a:ea typeface="Arial" pitchFamily="34" charset="-122"/>
-                          <a:cs typeface="Arial" pitchFamily="34" charset="-120"/>
-                        </a:rPr>
-                        <a:t>B</a:t>
-                      </a:r>
-                      <a:endParaRPr lang="en-US" sz="1200" dirty="0">
-                        <a:latin typeface="Arial" charset="0"/>
-                        <a:ea typeface="Arial" charset="0"/>
-                        <a:cs typeface="Arial" charset="0"/>
-                      </a:endParaRPr>
-                    </a:p>
-                  </a:txBody>
-                  <a:tcPr>
-                    <a:lnL w="6350" cap="flat" cmpd="sng" algn="ctr">
-                      <a:solidFill>
-                        <a:srgbClr val="D1D5DB"/>
-                      </a:solidFill>
-                      <a:prstDash val="solid"/>
-                      <a:round/>
-                      <a:headEnd type="none" w="med" len="med"/>
-                      <a:tailEnd type="none" w="med" len="med"/>
-                    </a:lnL>
-                    <a:lnR w="6350" cap="flat" cmpd="sng" algn="ctr">
-                      <a:solidFill>
-                        <a:srgbClr val="D1D5DB"/>
-                      </a:solidFill>
-                      <a:prstDash val="solid"/>
-                      <a:round/>
-                      <a:headEnd type="none" w="med" len="med"/>
-                      <a:tailEnd type="none" w="med" len="med"/>
-                    </a:lnR>
-                    <a:lnT w="6350" cap="flat" cmpd="sng" algn="ctr">
-                      <a:solidFill>
-                        <a:srgbClr val="D1D5DB"/>
-                      </a:solidFill>
-                      <a:prstDash val="solid"/>
-                      <a:round/>
-                      <a:headEnd type="none" w="med" len="med"/>
-                      <a:tailEnd type="none" w="med" len="med"/>
-                    </a:lnT>
-                    <a:lnB w="6350" cap="flat" cmpd="sng" algn="ctr">
-                      <a:solidFill>
-                        <a:srgbClr val="D1D5DB"/>
-                      </a:solidFill>
-                      <a:prstDash val="solid"/>
-                      <a:round/>
-                      <a:headEnd type="none" w="med" len="med"/>
-                      <a:tailEnd type="none" w="med" len="med"/>
-                    </a:lnB>
-                  </a:tcPr>
-                </a:tc>
-                <a:tc>
-                  <a:txBody>
-                    <a:bodyPr/>
-                    <a:lstStyle/>
-                    <a:p>
-                      <a:pPr marL="0" indent="0">
-                        <a:buNone/>
-                      </a:pPr>
-                      <a:r>
-                        <a:rPr lang="en-US" sz="1200" dirty="0">
+                          <a:prstDash val="solid"/>
+                          <a:round/>
+                          <a:headEnd type="none" w="med" len="med"/>
+                          <a:tailEnd type="none" w="med" len="med"/>
+                        </a:lnL>
+                        <a:lnR w="6350" cap="flat" cmpd="sng" algn="ctr">
                           <a:solidFill>
-                            <a:srgbClr val="000000"/>
+                            <a:srgbClr val="D1D5DB"/>
                           </a:solidFill>
-                          <a:latin typeface="Arial" pitchFamily="34" charset="0"/>
-                          <a:ea typeface="Arial" pitchFamily="34" charset="-122"/>
-                          <a:cs typeface="Arial" pitchFamily="34" charset="-120"/>
-                        </a:rPr>
-                        <a:t>n×m</a:t>
-                      </a:r>
-                      <a:endParaRPr lang="en-US" sz="1200" dirty="0">
-                        <a:latin typeface="Arial" charset="0"/>
-                        <a:ea typeface="Arial" charset="0"/>
-                        <a:cs typeface="Arial" charset="0"/>
-                      </a:endParaRPr>
-                    </a:p>
-                  </a:txBody>
-                  <a:tcPr>
-                    <a:lnL w="6350" cap="flat" cmpd="sng" algn="ctr">
-                      <a:solidFill>
-                        <a:srgbClr val="D1D5DB"/>
-                      </a:solidFill>
-                      <a:prstDash val="solid"/>
-                      <a:round/>
-                      <a:headEnd type="none" w="med" len="med"/>
-                      <a:tailEnd type="none" w="med" len="med"/>
-                    </a:lnL>
-                    <a:lnR w="6350" cap="flat" cmpd="sng" algn="ctr">
-                      <a:solidFill>
-                        <a:srgbClr val="D1D5DB"/>
-                      </a:solidFill>
-                      <a:prstDash val="solid"/>
-                      <a:round/>
-                      <a:headEnd type="none" w="med" len="med"/>
-                      <a:tailEnd type="none" w="med" len="med"/>
-                    </a:lnR>
-                    <a:lnT w="6350" cap="flat" cmpd="sng" algn="ctr">
-                      <a:solidFill>
-                        <a:srgbClr val="D1D5DB"/>
-                      </a:solidFill>
-                      <a:prstDash val="solid"/>
-                      <a:round/>
-                      <a:headEnd type="none" w="med" len="med"/>
-                      <a:tailEnd type="none" w="med" len="med"/>
-                    </a:lnT>
-                    <a:lnB w="6350" cap="flat" cmpd="sng" algn="ctr">
-                      <a:solidFill>
-                        <a:srgbClr val="D1D5DB"/>
-                      </a:solidFill>
-                      <a:prstDash val="solid"/>
-                      <a:round/>
-                      <a:headEnd type="none" w="med" len="med"/>
-                      <a:tailEnd type="none" w="med" len="med"/>
-                    </a:lnB>
-                  </a:tcPr>
-                </a:tc>
-                <a:tc>
-                  <a:txBody>
-                    <a:bodyPr/>
-                    <a:lstStyle/>
-                    <a:p>
-                      <a:pPr marL="0" indent="0">
-                        <a:buNone/>
-                      </a:pPr>
-                      <a:r>
-                        <a:rPr lang="en-US" sz="1200" dirty="0">
+                          <a:prstDash val="solid"/>
+                          <a:round/>
+                          <a:headEnd type="none" w="med" len="med"/>
+                          <a:tailEnd type="none" w="med" len="med"/>
+                        </a:lnR>
+                        <a:lnT w="6350" cap="flat" cmpd="sng" algn="ctr">
                           <a:solidFill>
-                            <a:srgbClr val="000000"/>
+                            <a:srgbClr val="D1D5DB"/>
                           </a:solidFill>
-                          <a:latin typeface="Arial" pitchFamily="34" charset="0"/>
-                          <a:ea typeface="Arial" pitchFamily="34" charset="-122"/>
-                          <a:cs typeface="Arial" pitchFamily="34" charset="-120"/>
-                        </a:rPr>
-                        <a:t>How control affects state</a:t>
-                      </a:r>
-                      <a:endParaRPr lang="en-US" sz="1200" dirty="0">
-                        <a:latin typeface="Arial" charset="0"/>
-                        <a:ea typeface="Arial" charset="0"/>
-                        <a:cs typeface="Arial" charset="0"/>
-                      </a:endParaRPr>
-                    </a:p>
-                  </a:txBody>
-                  <a:tcPr>
-                    <a:lnL w="6350" cap="flat" cmpd="sng" algn="ctr">
-                      <a:solidFill>
-                        <a:srgbClr val="D1D5DB"/>
-                      </a:solidFill>
-                      <a:prstDash val="solid"/>
-                      <a:round/>
-                      <a:headEnd type="none" w="med" len="med"/>
-                      <a:tailEnd type="none" w="med" len="med"/>
-                    </a:lnL>
-                    <a:lnR w="6350" cap="flat" cmpd="sng" algn="ctr">
-                      <a:solidFill>
-                        <a:srgbClr val="D1D5DB"/>
-                      </a:solidFill>
-                      <a:prstDash val="solid"/>
-                      <a:round/>
-                      <a:headEnd type="none" w="med" len="med"/>
-                      <a:tailEnd type="none" w="med" len="med"/>
-                    </a:lnR>
-                    <a:lnT w="6350" cap="flat" cmpd="sng" algn="ctr">
-                      <a:solidFill>
-                        <a:srgbClr val="D1D5DB"/>
-                      </a:solidFill>
-                      <a:prstDash val="solid"/>
-                      <a:round/>
-                      <a:headEnd type="none" w="med" len="med"/>
-                      <a:tailEnd type="none" w="med" len="med"/>
-                    </a:lnT>
-                    <a:lnB w="6350" cap="flat" cmpd="sng" algn="ctr">
-                      <a:solidFill>
-                        <a:srgbClr val="D1D5DB"/>
-                      </a:solidFill>
-                      <a:prstDash val="solid"/>
-                      <a:round/>
-                      <a:headEnd type="none" w="med" len="med"/>
-                      <a:tailEnd type="none" w="med" len="med"/>
-                    </a:lnB>
-                  </a:tcPr>
-                </a:tc>
-                <a:tc>
-                  <a:txBody>
-                    <a:bodyPr/>
-                    <a:lstStyle/>
-                    <a:p>
-                      <a:pPr marL="0" indent="0">
-                        <a:buNone/>
-                      </a:pPr>
-                      <a:r>
-                        <a:rPr lang="en-US" sz="1200" dirty="0">
+                          <a:prstDash val="solid"/>
+                          <a:round/>
+                          <a:headEnd type="none" w="med" len="med"/>
+                          <a:tailEnd type="none" w="med" len="med"/>
+                        </a:lnT>
+                        <a:lnB w="6350" cap="flat" cmpd="sng" algn="ctr">
                           <a:solidFill>
-                            <a:srgbClr val="000000"/>
+                            <a:srgbClr val="D1D5DB"/>
                           </a:solidFill>
-                          <a:latin typeface="Arial" pitchFamily="34" charset="0"/>
-                          <a:ea typeface="Arial" pitchFamily="34" charset="-122"/>
-                          <a:cs typeface="Arial" pitchFamily="34" charset="-120"/>
-                        </a:rPr>
-                        <a:t>Steering command → position change</a:t>
-                      </a:r>
-                      <a:endParaRPr lang="en-US" sz="1200" dirty="0">
-                        <a:latin typeface="Arial" charset="0"/>
-                        <a:ea typeface="Arial" charset="0"/>
-                        <a:cs typeface="Arial" charset="0"/>
-                      </a:endParaRPr>
-                    </a:p>
-                  </a:txBody>
-                  <a:tcPr>
-                    <a:lnL w="6350" cap="flat" cmpd="sng" algn="ctr">
-                      <a:solidFill>
-                        <a:srgbClr val="D1D5DB"/>
-                      </a:solidFill>
-                      <a:prstDash val="solid"/>
-                      <a:round/>
-                      <a:headEnd type="none" w="med" len="med"/>
-                      <a:tailEnd type="none" w="med" len="med"/>
-                    </a:lnL>
-                    <a:lnR w="6350" cap="flat" cmpd="sng" algn="ctr">
-                      <a:solidFill>
-                        <a:srgbClr val="D1D5DB"/>
-                      </a:solidFill>
-                      <a:prstDash val="solid"/>
-                      <a:round/>
-                      <a:headEnd type="none" w="med" len="med"/>
-                      <a:tailEnd type="none" w="med" len="med"/>
-                    </a:lnR>
-                    <a:lnT w="6350" cap="flat" cmpd="sng" algn="ctr">
-                      <a:solidFill>
-                        <a:srgbClr val="D1D5DB"/>
-                      </a:solidFill>
-                      <a:prstDash val="solid"/>
-                      <a:round/>
-                      <a:headEnd type="none" w="med" len="med"/>
-                      <a:tailEnd type="none" w="med" len="med"/>
-                    </a:lnT>
-                    <a:lnB w="6350" cap="flat" cmpd="sng" algn="ctr">
-                      <a:solidFill>
-                        <a:srgbClr val="D1D5DB"/>
-                      </a:solidFill>
-                      <a:prstDash val="solid"/>
-                      <a:round/>
-                      <a:headEnd type="none" w="med" len="med"/>
-                      <a:tailEnd type="none" w="med" len="med"/>
-                    </a:lnB>
-                  </a:tcPr>
-                </a:tc>
-                <a:extLst>
-                  <a:ext uri="{0D108BD9-81ED-4DB2-BD59-A6C34878D82A}">
-                    <a16:rowId xmlns:a16="http://schemas.microsoft.com/office/drawing/2014/main" val="10002"/>
-                  </a:ext>
-                </a:extLst>
-              </a:tr>
-              <a:tr h="272312">
-                <a:tc>
-                  <a:txBody>
-                    <a:bodyPr/>
-                    <a:lstStyle/>
-                    <a:p>
-                      <a:pPr marL="0" indent="0">
-                        <a:buNone/>
-                      </a:pPr>
-                      <a:r>
-                        <a:rPr lang="en-US" sz="1200" dirty="0">
+                          <a:prstDash val="solid"/>
+                          <a:round/>
+                          <a:headEnd type="none" w="med" len="med"/>
+                          <a:tailEnd type="none" w="med" len="med"/>
+                        </a:lnB>
+                        <a:solidFill>
+                          <a:srgbClr val="0F4C81"/>
+                        </a:solidFill>
+                      </a:tcPr>
+                    </a:tc>
+                    <a:tc>
+                      <a:txBody>
+                        <a:bodyPr/>
+                        <a:lstStyle/>
+                        <a:p>
+                          <a:pPr marL="0" indent="0">
+                            <a:buNone/>
+                          </a:pPr>
+                          <a:r>
+                            <a:rPr lang="en-US" sz="1200" b="1" dirty="0">
+                              <a:solidFill>
+                                <a:srgbClr val="FFFFFF"/>
+                              </a:solidFill>
+                              <a:latin typeface="Arial" pitchFamily="34" charset="0"/>
+                              <a:ea typeface="Arial" pitchFamily="34" charset="-122"/>
+                              <a:cs typeface="Arial" pitchFamily="34" charset="-120"/>
+                            </a:rPr>
+                            <a:t>Robot Example</a:t>
+                          </a:r>
+                          <a:endParaRPr lang="en-US" sz="1200" dirty="0">
+                            <a:latin typeface="Arial" charset="0"/>
+                            <a:ea typeface="Arial" charset="0"/>
+                            <a:cs typeface="Arial" charset="0"/>
+                          </a:endParaRPr>
+                        </a:p>
+                      </a:txBody>
+                      <a:tcPr>
+                        <a:lnL w="6350" cap="flat" cmpd="sng" algn="ctr">
                           <a:solidFill>
-                            <a:srgbClr val="000000"/>
+                            <a:srgbClr val="D1D5DB"/>
                           </a:solidFill>
-                          <a:latin typeface="Arial" pitchFamily="34" charset="0"/>
-                          <a:ea typeface="Arial" pitchFamily="34" charset="-122"/>
-                          <a:cs typeface="Arial" pitchFamily="34" charset="-120"/>
-                        </a:rPr>
-                        <a:t>H</a:t>
-                      </a:r>
-                      <a:endParaRPr lang="en-US" sz="1200" dirty="0">
-                        <a:latin typeface="Arial" charset="0"/>
-                        <a:ea typeface="Arial" charset="0"/>
-                        <a:cs typeface="Arial" charset="0"/>
-                      </a:endParaRPr>
-                    </a:p>
-                  </a:txBody>
-                  <a:tcPr>
-                    <a:lnL w="6350" cap="flat" cmpd="sng" algn="ctr">
-                      <a:solidFill>
-                        <a:srgbClr val="D1D5DB"/>
-                      </a:solidFill>
-                      <a:prstDash val="solid"/>
-                      <a:round/>
-                      <a:headEnd type="none" w="med" len="med"/>
-                      <a:tailEnd type="none" w="med" len="med"/>
-                    </a:lnL>
-                    <a:lnR w="6350" cap="flat" cmpd="sng" algn="ctr">
-                      <a:solidFill>
-                        <a:srgbClr val="D1D5DB"/>
-                      </a:solidFill>
-                      <a:prstDash val="solid"/>
-                      <a:round/>
-                      <a:headEnd type="none" w="med" len="med"/>
-                      <a:tailEnd type="none" w="med" len="med"/>
-                    </a:lnR>
-                    <a:lnT w="6350" cap="flat" cmpd="sng" algn="ctr">
-                      <a:solidFill>
-                        <a:srgbClr val="D1D5DB"/>
-                      </a:solidFill>
-                      <a:prstDash val="solid"/>
-                      <a:round/>
-                      <a:headEnd type="none" w="med" len="med"/>
-                      <a:tailEnd type="none" w="med" len="med"/>
-                    </a:lnT>
-                    <a:lnB w="6350" cap="flat" cmpd="sng" algn="ctr">
-                      <a:solidFill>
-                        <a:srgbClr val="D1D5DB"/>
-                      </a:solidFill>
-                      <a:prstDash val="solid"/>
-                      <a:round/>
-                      <a:headEnd type="none" w="med" len="med"/>
-                      <a:tailEnd type="none" w="med" len="med"/>
-                    </a:lnB>
-                  </a:tcPr>
-                </a:tc>
-                <a:tc>
-                  <a:txBody>
-                    <a:bodyPr/>
-                    <a:lstStyle/>
-                    <a:p>
-                      <a:pPr marL="0" indent="0">
-                        <a:buNone/>
-                      </a:pPr>
-                      <a:r>
-                        <a:rPr lang="en-US" sz="1200" dirty="0">
+                          <a:prstDash val="solid"/>
+                          <a:round/>
+                          <a:headEnd type="none" w="med" len="med"/>
+                          <a:tailEnd type="none" w="med" len="med"/>
+                        </a:lnL>
+                        <a:lnR w="6350" cap="flat" cmpd="sng" algn="ctr">
                           <a:solidFill>
-                            <a:srgbClr val="000000"/>
+                            <a:srgbClr val="D1D5DB"/>
                           </a:solidFill>
-                          <a:latin typeface="Arial" pitchFamily="34" charset="0"/>
-                          <a:ea typeface="Arial" pitchFamily="34" charset="-122"/>
-                          <a:cs typeface="Arial" pitchFamily="34" charset="-120"/>
-                        </a:rPr>
-                        <a:t>k×n</a:t>
-                      </a:r>
-                      <a:endParaRPr lang="en-US" sz="1200" dirty="0">
-                        <a:latin typeface="Arial" charset="0"/>
-                        <a:ea typeface="Arial" charset="0"/>
-                        <a:cs typeface="Arial" charset="0"/>
-                      </a:endParaRPr>
-                    </a:p>
-                  </a:txBody>
-                  <a:tcPr>
-                    <a:lnL w="6350" cap="flat" cmpd="sng" algn="ctr">
-                      <a:solidFill>
-                        <a:srgbClr val="D1D5DB"/>
-                      </a:solidFill>
-                      <a:prstDash val="solid"/>
-                      <a:round/>
-                      <a:headEnd type="none" w="med" len="med"/>
-                      <a:tailEnd type="none" w="med" len="med"/>
-                    </a:lnL>
-                    <a:lnR w="6350" cap="flat" cmpd="sng" algn="ctr">
-                      <a:solidFill>
-                        <a:srgbClr val="D1D5DB"/>
-                      </a:solidFill>
-                      <a:prstDash val="solid"/>
-                      <a:round/>
-                      <a:headEnd type="none" w="med" len="med"/>
-                      <a:tailEnd type="none" w="med" len="med"/>
-                    </a:lnR>
-                    <a:lnT w="6350" cap="flat" cmpd="sng" algn="ctr">
-                      <a:solidFill>
-                        <a:srgbClr val="D1D5DB"/>
-                      </a:solidFill>
-                      <a:prstDash val="solid"/>
-                      <a:round/>
-                      <a:headEnd type="none" w="med" len="med"/>
-                      <a:tailEnd type="none" w="med" len="med"/>
-                    </a:lnT>
-                    <a:lnB w="6350" cap="flat" cmpd="sng" algn="ctr">
-                      <a:solidFill>
-                        <a:srgbClr val="D1D5DB"/>
-                      </a:solidFill>
-                      <a:prstDash val="solid"/>
-                      <a:round/>
-                      <a:headEnd type="none" w="med" len="med"/>
-                      <a:tailEnd type="none" w="med" len="med"/>
-                    </a:lnB>
-                  </a:tcPr>
-                </a:tc>
-                <a:tc>
-                  <a:txBody>
-                    <a:bodyPr/>
-                    <a:lstStyle/>
-                    <a:p>
-                      <a:pPr marL="0" indent="0">
-                        <a:buNone/>
-                      </a:pPr>
-                      <a:r>
-                        <a:rPr lang="en-US" sz="1200" dirty="0">
+                          <a:prstDash val="solid"/>
+                          <a:round/>
+                          <a:headEnd type="none" w="med" len="med"/>
+                          <a:tailEnd type="none" w="med" len="med"/>
+                        </a:lnR>
+                        <a:lnT w="6350" cap="flat" cmpd="sng" algn="ctr">
                           <a:solidFill>
-                            <a:srgbClr val="000000"/>
+                            <a:srgbClr val="D1D5DB"/>
                           </a:solidFill>
-                          <a:latin typeface="Arial" pitchFamily="34" charset="0"/>
-                          <a:ea typeface="Arial" pitchFamily="34" charset="-122"/>
-                          <a:cs typeface="Arial" pitchFamily="34" charset="-120"/>
-                        </a:rPr>
-                        <a:t>What sensor measures from state</a:t>
-                      </a:r>
-                      <a:endParaRPr lang="en-US" sz="1200" dirty="0">
-                        <a:latin typeface="Arial" charset="0"/>
-                        <a:ea typeface="Arial" charset="0"/>
-                        <a:cs typeface="Arial" charset="0"/>
-                      </a:endParaRPr>
-                    </a:p>
-                  </a:txBody>
-                  <a:tcPr>
-                    <a:lnL w="6350" cap="flat" cmpd="sng" algn="ctr">
-                      <a:solidFill>
-                        <a:srgbClr val="D1D5DB"/>
-                      </a:solidFill>
-                      <a:prstDash val="solid"/>
-                      <a:round/>
-                      <a:headEnd type="none" w="med" len="med"/>
-                      <a:tailEnd type="none" w="med" len="med"/>
-                    </a:lnL>
-                    <a:lnR w="6350" cap="flat" cmpd="sng" algn="ctr">
-                      <a:solidFill>
-                        <a:srgbClr val="D1D5DB"/>
-                      </a:solidFill>
-                      <a:prstDash val="solid"/>
-                      <a:round/>
-                      <a:headEnd type="none" w="med" len="med"/>
-                      <a:tailEnd type="none" w="med" len="med"/>
-                    </a:lnR>
-                    <a:lnT w="6350" cap="flat" cmpd="sng" algn="ctr">
-                      <a:solidFill>
-                        <a:srgbClr val="D1D5DB"/>
-                      </a:solidFill>
-                      <a:prstDash val="solid"/>
-                      <a:round/>
-                      <a:headEnd type="none" w="med" len="med"/>
-                      <a:tailEnd type="none" w="med" len="med"/>
-                    </a:lnT>
-                    <a:lnB w="6350" cap="flat" cmpd="sng" algn="ctr">
-                      <a:solidFill>
-                        <a:srgbClr val="D1D5DB"/>
-                      </a:solidFill>
-                      <a:prstDash val="solid"/>
-                      <a:round/>
-                      <a:headEnd type="none" w="med" len="med"/>
-                      <a:tailEnd type="none" w="med" len="med"/>
-                    </a:lnB>
-                  </a:tcPr>
-                </a:tc>
-                <a:tc>
-                  <a:txBody>
-                    <a:bodyPr/>
-                    <a:lstStyle/>
-                    <a:p>
-                      <a:pPr marL="0" indent="0">
-                        <a:buNone/>
-                      </a:pPr>
-                      <a:r>
-                        <a:rPr lang="en-US" sz="1200" dirty="0">
+                          <a:prstDash val="solid"/>
+                          <a:round/>
+                          <a:headEnd type="none" w="med" len="med"/>
+                          <a:tailEnd type="none" w="med" len="med"/>
+                        </a:lnT>
+                        <a:lnB w="6350" cap="flat" cmpd="sng" algn="ctr">
                           <a:solidFill>
-                            <a:srgbClr val="000000"/>
+                            <a:srgbClr val="D1D5DB"/>
                           </a:solidFill>
-                          <a:latin typeface="Arial" pitchFamily="34" charset="0"/>
-                          <a:ea typeface="Arial" pitchFamily="34" charset="-122"/>
-                          <a:cs typeface="Arial" pitchFamily="34" charset="-120"/>
-                        </a:rPr>
-                        <a:t>LiDAR measures distance from position</a:t>
-                      </a:r>
-                      <a:endParaRPr lang="en-US" sz="1200" dirty="0">
-                        <a:latin typeface="Arial" charset="0"/>
-                        <a:ea typeface="Arial" charset="0"/>
-                        <a:cs typeface="Arial" charset="0"/>
-                      </a:endParaRPr>
-                    </a:p>
-                  </a:txBody>
-                  <a:tcPr>
-                    <a:lnL w="6350" cap="flat" cmpd="sng" algn="ctr">
-                      <a:solidFill>
-                        <a:srgbClr val="D1D5DB"/>
-                      </a:solidFill>
-                      <a:prstDash val="solid"/>
-                      <a:round/>
-                      <a:headEnd type="none" w="med" len="med"/>
-                      <a:tailEnd type="none" w="med" len="med"/>
-                    </a:lnL>
-                    <a:lnR w="6350" cap="flat" cmpd="sng" algn="ctr">
-                      <a:solidFill>
-                        <a:srgbClr val="D1D5DB"/>
-                      </a:solidFill>
-                      <a:prstDash val="solid"/>
-                      <a:round/>
-                      <a:headEnd type="none" w="med" len="med"/>
-                      <a:tailEnd type="none" w="med" len="med"/>
-                    </a:lnR>
-                    <a:lnT w="6350" cap="flat" cmpd="sng" algn="ctr">
-                      <a:solidFill>
-                        <a:srgbClr val="D1D5DB"/>
-                      </a:solidFill>
-                      <a:prstDash val="solid"/>
-                      <a:round/>
-                      <a:headEnd type="none" w="med" len="med"/>
-                      <a:tailEnd type="none" w="med" len="med"/>
-                    </a:lnT>
-                    <a:lnB w="6350" cap="flat" cmpd="sng" algn="ctr">
-                      <a:solidFill>
-                        <a:srgbClr val="D1D5DB"/>
-                      </a:solidFill>
-                      <a:prstDash val="solid"/>
-                      <a:round/>
-                      <a:headEnd type="none" w="med" len="med"/>
-                      <a:tailEnd type="none" w="med" len="med"/>
-                    </a:lnB>
-                  </a:tcPr>
-                </a:tc>
-                <a:extLst>
-                  <a:ext uri="{0D108BD9-81ED-4DB2-BD59-A6C34878D82A}">
-                    <a16:rowId xmlns:a16="http://schemas.microsoft.com/office/drawing/2014/main" val="10003"/>
-                  </a:ext>
-                </a:extLst>
-              </a:tr>
-              <a:tr h="272312">
-                <a:tc>
-                  <a:txBody>
-                    <a:bodyPr/>
-                    <a:lstStyle/>
-                    <a:p>
-                      <a:pPr marL="0" indent="0">
-                        <a:buNone/>
-                      </a:pPr>
-                      <a:r>
-                        <a:rPr lang="en-US" sz="1200" dirty="0">
+                          <a:prstDash val="solid"/>
+                          <a:round/>
+                          <a:headEnd type="none" w="med" len="med"/>
+                          <a:tailEnd type="none" w="med" len="med"/>
+                        </a:lnB>
+                        <a:solidFill>
+                          <a:srgbClr val="0F4C81"/>
+                        </a:solidFill>
+                      </a:tcPr>
+                    </a:tc>
+                    <a:extLst>
+                      <a:ext uri="{0D108BD9-81ED-4DB2-BD59-A6C34878D82A}">
+                        <a16:rowId xmlns:a16="http://schemas.microsoft.com/office/drawing/2014/main" val="10000"/>
+                      </a:ext>
+                    </a:extLst>
+                  </a:tr>
+                  <a:tr h="272312">
+                    <a:tc>
+                      <a:txBody>
+                        <a:bodyPr/>
+                        <a:lstStyle/>
+                        <a:p>
+                          <a:pPr marL="0" indent="0">
+                            <a:buNone/>
+                          </a:pPr>
+                          <a:r>
+                            <a:rPr lang="en-US" sz="1200" dirty="0">
+                              <a:solidFill>
+                                <a:srgbClr val="000000"/>
+                              </a:solidFill>
+                              <a:latin typeface="Arial" pitchFamily="34" charset="0"/>
+                              <a:ea typeface="Arial" pitchFamily="34" charset="-122"/>
+                              <a:cs typeface="Arial" pitchFamily="34" charset="-120"/>
+                            </a:rPr>
+                            <a:t>A</a:t>
+                          </a:r>
+                          <a:endParaRPr lang="en-US" sz="1200" dirty="0">
+                            <a:latin typeface="Arial" charset="0"/>
+                            <a:ea typeface="Arial" charset="0"/>
+                            <a:cs typeface="Arial" charset="0"/>
+                          </a:endParaRPr>
+                        </a:p>
+                      </a:txBody>
+                      <a:tcPr>
+                        <a:lnL w="6350" cap="flat" cmpd="sng" algn="ctr">
                           <a:solidFill>
-                            <a:srgbClr val="000000"/>
+                            <a:srgbClr val="D1D5DB"/>
                           </a:solidFill>
-                          <a:latin typeface="Arial" pitchFamily="34" charset="0"/>
-                          <a:ea typeface="Arial" pitchFamily="34" charset="-122"/>
-                          <a:cs typeface="Arial" pitchFamily="34" charset="-120"/>
-                        </a:rPr>
-                        <a:t>Q</a:t>
-                      </a:r>
-                      <a:endParaRPr lang="en-US" sz="1200" dirty="0">
-                        <a:latin typeface="Arial" charset="0"/>
-                        <a:ea typeface="Arial" charset="0"/>
-                        <a:cs typeface="Arial" charset="0"/>
-                      </a:endParaRPr>
-                    </a:p>
-                  </a:txBody>
-                  <a:tcPr>
-                    <a:lnL w="6350" cap="flat" cmpd="sng" algn="ctr">
-                      <a:solidFill>
-                        <a:srgbClr val="D1D5DB"/>
-                      </a:solidFill>
-                      <a:prstDash val="solid"/>
-                      <a:round/>
-                      <a:headEnd type="none" w="med" len="med"/>
-                      <a:tailEnd type="none" w="med" len="med"/>
-                    </a:lnL>
-                    <a:lnR w="6350" cap="flat" cmpd="sng" algn="ctr">
-                      <a:solidFill>
-                        <a:srgbClr val="D1D5DB"/>
-                      </a:solidFill>
-                      <a:prstDash val="solid"/>
-                      <a:round/>
-                      <a:headEnd type="none" w="med" len="med"/>
-                      <a:tailEnd type="none" w="med" len="med"/>
-                    </a:lnR>
-                    <a:lnT w="6350" cap="flat" cmpd="sng" algn="ctr">
-                      <a:solidFill>
-                        <a:srgbClr val="D1D5DB"/>
-                      </a:solidFill>
-                      <a:prstDash val="solid"/>
-                      <a:round/>
-                      <a:headEnd type="none" w="med" len="med"/>
-                      <a:tailEnd type="none" w="med" len="med"/>
-                    </a:lnT>
-                    <a:lnB w="6350" cap="flat" cmpd="sng" algn="ctr">
-                      <a:solidFill>
-                        <a:srgbClr val="D1D5DB"/>
-                      </a:solidFill>
-                      <a:prstDash val="solid"/>
-                      <a:round/>
-                      <a:headEnd type="none" w="med" len="med"/>
-                      <a:tailEnd type="none" w="med" len="med"/>
-                    </a:lnB>
-                  </a:tcPr>
-                </a:tc>
-                <a:tc>
-                  <a:txBody>
-                    <a:bodyPr/>
-                    <a:lstStyle/>
-                    <a:p>
-                      <a:pPr marL="0" indent="0">
-                        <a:buNone/>
-                      </a:pPr>
-                      <a:r>
-                        <a:rPr lang="en-US" sz="1200" dirty="0">
+                          <a:prstDash val="solid"/>
+                          <a:round/>
+                          <a:headEnd type="none" w="med" len="med"/>
+                          <a:tailEnd type="none" w="med" len="med"/>
+                        </a:lnL>
+                        <a:lnR w="6350" cap="flat" cmpd="sng" algn="ctr">
                           <a:solidFill>
-                            <a:srgbClr val="000000"/>
+                            <a:srgbClr val="D1D5DB"/>
                           </a:solidFill>
-                          <a:latin typeface="Arial" pitchFamily="34" charset="0"/>
-                          <a:ea typeface="Arial" pitchFamily="34" charset="-122"/>
-                          <a:cs typeface="Arial" pitchFamily="34" charset="-120"/>
-                        </a:rPr>
-                        <a:t>n×n</a:t>
-                      </a:r>
-                      <a:endParaRPr lang="en-US" sz="1200" dirty="0">
-                        <a:latin typeface="Arial" charset="0"/>
-                        <a:ea typeface="Arial" charset="0"/>
-                        <a:cs typeface="Arial" charset="0"/>
-                      </a:endParaRPr>
-                    </a:p>
-                  </a:txBody>
-                  <a:tcPr>
-                    <a:lnL w="6350" cap="flat" cmpd="sng" algn="ctr">
-                      <a:solidFill>
-                        <a:srgbClr val="D1D5DB"/>
-                      </a:solidFill>
-                      <a:prstDash val="solid"/>
-                      <a:round/>
-                      <a:headEnd type="none" w="med" len="med"/>
-                      <a:tailEnd type="none" w="med" len="med"/>
-                    </a:lnL>
-                    <a:lnR w="6350" cap="flat" cmpd="sng" algn="ctr">
-                      <a:solidFill>
-                        <a:srgbClr val="D1D5DB"/>
-                      </a:solidFill>
-                      <a:prstDash val="solid"/>
-                      <a:round/>
-                      <a:headEnd type="none" w="med" len="med"/>
-                      <a:tailEnd type="none" w="med" len="med"/>
-                    </a:lnR>
-                    <a:lnT w="6350" cap="flat" cmpd="sng" algn="ctr">
-                      <a:solidFill>
-                        <a:srgbClr val="D1D5DB"/>
-                      </a:solidFill>
-                      <a:prstDash val="solid"/>
-                      <a:round/>
-                      <a:headEnd type="none" w="med" len="med"/>
-                      <a:tailEnd type="none" w="med" len="med"/>
-                    </a:lnT>
-                    <a:lnB w="6350" cap="flat" cmpd="sng" algn="ctr">
-                      <a:solidFill>
-                        <a:srgbClr val="D1D5DB"/>
-                      </a:solidFill>
-                      <a:prstDash val="solid"/>
-                      <a:round/>
-                      <a:headEnd type="none" w="med" len="med"/>
-                      <a:tailEnd type="none" w="med" len="med"/>
-                    </a:lnB>
-                  </a:tcPr>
-                </a:tc>
-                <a:tc>
-                  <a:txBody>
-                    <a:bodyPr/>
-                    <a:lstStyle/>
-                    <a:p>
-                      <a:pPr marL="0" indent="0">
-                        <a:buNone/>
-                      </a:pPr>
-                      <a:r>
-                        <a:rPr lang="en-US" sz="1200" dirty="0">
+                          <a:prstDash val="solid"/>
+                          <a:round/>
+                          <a:headEnd type="none" w="med" len="med"/>
+                          <a:tailEnd type="none" w="med" len="med"/>
+                        </a:lnR>
+                        <a:lnT w="6350" cap="flat" cmpd="sng" algn="ctr">
                           <a:solidFill>
-                            <a:srgbClr val="000000"/>
+                            <a:srgbClr val="D1D5DB"/>
                           </a:solidFill>
-                          <a:latin typeface="Arial" pitchFamily="34" charset="0"/>
-                          <a:ea typeface="Arial" pitchFamily="34" charset="-122"/>
-                          <a:cs typeface="Arial" pitchFamily="34" charset="-120"/>
-                        </a:rPr>
-                        <a:t>Process noise (motion uncertainty)</a:t>
-                      </a:r>
-                      <a:endParaRPr lang="en-US" sz="1200" dirty="0">
-                        <a:latin typeface="Arial" charset="0"/>
-                        <a:ea typeface="Arial" charset="0"/>
-                        <a:cs typeface="Arial" charset="0"/>
-                      </a:endParaRPr>
-                    </a:p>
-                  </a:txBody>
-                  <a:tcPr>
-                    <a:lnL w="6350" cap="flat" cmpd="sng" algn="ctr">
-                      <a:solidFill>
-                        <a:srgbClr val="D1D5DB"/>
-                      </a:solidFill>
-                      <a:prstDash val="solid"/>
-                      <a:round/>
-                      <a:headEnd type="none" w="med" len="med"/>
-                      <a:tailEnd type="none" w="med" len="med"/>
-                    </a:lnL>
-                    <a:lnR w="6350" cap="flat" cmpd="sng" algn="ctr">
-                      <a:solidFill>
-                        <a:srgbClr val="D1D5DB"/>
-                      </a:solidFill>
-                      <a:prstDash val="solid"/>
-                      <a:round/>
-                      <a:headEnd type="none" w="med" len="med"/>
-                      <a:tailEnd type="none" w="med" len="med"/>
-                    </a:lnR>
-                    <a:lnT w="6350" cap="flat" cmpd="sng" algn="ctr">
-                      <a:solidFill>
-                        <a:srgbClr val="D1D5DB"/>
-                      </a:solidFill>
-                      <a:prstDash val="solid"/>
-                      <a:round/>
-                      <a:headEnd type="none" w="med" len="med"/>
-                      <a:tailEnd type="none" w="med" len="med"/>
-                    </a:lnT>
-                    <a:lnB w="6350" cap="flat" cmpd="sng" algn="ctr">
-                      <a:solidFill>
-                        <a:srgbClr val="D1D5DB"/>
-                      </a:solidFill>
-                      <a:prstDash val="solid"/>
-                      <a:round/>
-                      <a:headEnd type="none" w="med" len="med"/>
-                      <a:tailEnd type="none" w="med" len="med"/>
-                    </a:lnB>
-                  </a:tcPr>
-                </a:tc>
-                <a:tc>
-                  <a:txBody>
-                    <a:bodyPr/>
-                    <a:lstStyle/>
-                    <a:p>
-                      <a:pPr marL="0" indent="0">
-                        <a:buNone/>
-                      </a:pPr>
-                      <a:r>
-                        <a:rPr lang="en-US" sz="1200" dirty="0">
+                          <a:prstDash val="solid"/>
+                          <a:round/>
+                          <a:headEnd type="none" w="med" len="med"/>
+                          <a:tailEnd type="none" w="med" len="med"/>
+                        </a:lnT>
+                        <a:lnB w="6350" cap="flat" cmpd="sng" algn="ctr">
                           <a:solidFill>
-                            <a:srgbClr val="000000"/>
+                            <a:srgbClr val="D1D5DB"/>
                           </a:solidFill>
-                          <a:latin typeface="Arial" pitchFamily="34" charset="0"/>
-                          <a:ea typeface="Arial" pitchFamily="34" charset="-122"/>
-                          <a:cs typeface="Arial" pitchFamily="34" charset="-120"/>
-                        </a:rPr>
-                        <a:t>Wheel slip, motor noise</a:t>
-                      </a:r>
-                      <a:endParaRPr lang="en-US" sz="1200" dirty="0">
-                        <a:latin typeface="Arial" charset="0"/>
-                        <a:ea typeface="Arial" charset="0"/>
-                        <a:cs typeface="Arial" charset="0"/>
-                      </a:endParaRPr>
-                    </a:p>
-                  </a:txBody>
-                  <a:tcPr>
-                    <a:lnL w="6350" cap="flat" cmpd="sng" algn="ctr">
-                      <a:solidFill>
-                        <a:srgbClr val="D1D5DB"/>
-                      </a:solidFill>
-                      <a:prstDash val="solid"/>
-                      <a:round/>
-                      <a:headEnd type="none" w="med" len="med"/>
-                      <a:tailEnd type="none" w="med" len="med"/>
-                    </a:lnL>
-                    <a:lnR w="6350" cap="flat" cmpd="sng" algn="ctr">
-                      <a:solidFill>
-                        <a:srgbClr val="D1D5DB"/>
-                      </a:solidFill>
-                      <a:prstDash val="solid"/>
-                      <a:round/>
-                      <a:headEnd type="none" w="med" len="med"/>
-                      <a:tailEnd type="none" w="med" len="med"/>
-                    </a:lnR>
-                    <a:lnT w="6350" cap="flat" cmpd="sng" algn="ctr">
-                      <a:solidFill>
-                        <a:srgbClr val="D1D5DB"/>
-                      </a:solidFill>
-                      <a:prstDash val="solid"/>
-                      <a:round/>
-                      <a:headEnd type="none" w="med" len="med"/>
-                      <a:tailEnd type="none" w="med" len="med"/>
-                    </a:lnT>
-                    <a:lnB w="6350" cap="flat" cmpd="sng" algn="ctr">
-                      <a:solidFill>
-                        <a:srgbClr val="D1D5DB"/>
-                      </a:solidFill>
-                      <a:prstDash val="solid"/>
-                      <a:round/>
-                      <a:headEnd type="none" w="med" len="med"/>
-                      <a:tailEnd type="none" w="med" len="med"/>
-                    </a:lnB>
-                  </a:tcPr>
-                </a:tc>
-                <a:extLst>
-                  <a:ext uri="{0D108BD9-81ED-4DB2-BD59-A6C34878D82A}">
-                    <a16:rowId xmlns:a16="http://schemas.microsoft.com/office/drawing/2014/main" val="10004"/>
-                  </a:ext>
-                </a:extLst>
-              </a:tr>
-              <a:tr h="272312">
-                <a:tc>
-                  <a:txBody>
-                    <a:bodyPr/>
-                    <a:lstStyle/>
-                    <a:p>
-                      <a:pPr marL="0" indent="0">
-                        <a:buNone/>
-                      </a:pPr>
-                      <a:r>
-                        <a:rPr lang="en-US" sz="1200" dirty="0">
+                          <a:prstDash val="solid"/>
+                          <a:round/>
+                          <a:headEnd type="none" w="med" len="med"/>
+                          <a:tailEnd type="none" w="med" len="med"/>
+                        </a:lnB>
+                      </a:tcPr>
+                    </a:tc>
+                    <a:tc>
+                      <a:txBody>
+                        <a:bodyPr/>
+                        <a:lstStyle/>
+                        <a:p>
+                          <a:pPr marL="0" indent="0">
+                            <a:buNone/>
+                          </a:pPr>
+                          <a:r>
+                            <a:rPr lang="en-US" sz="1200" dirty="0">
+                              <a:solidFill>
+                                <a:srgbClr val="000000"/>
+                              </a:solidFill>
+                              <a:latin typeface="Arial" pitchFamily="34" charset="0"/>
+                              <a:ea typeface="Arial" pitchFamily="34" charset="-122"/>
+                              <a:cs typeface="Arial" pitchFamily="34" charset="-120"/>
+                            </a:rPr>
+                            <a:t>n×n</a:t>
+                          </a:r>
+                          <a:endParaRPr lang="en-US" sz="1200" dirty="0">
+                            <a:latin typeface="Arial" charset="0"/>
+                            <a:ea typeface="Arial" charset="0"/>
+                            <a:cs typeface="Arial" charset="0"/>
+                          </a:endParaRPr>
+                        </a:p>
+                      </a:txBody>
+                      <a:tcPr>
+                        <a:lnL w="6350" cap="flat" cmpd="sng" algn="ctr">
                           <a:solidFill>
-                            <a:srgbClr val="000000"/>
+                            <a:srgbClr val="D1D5DB"/>
                           </a:solidFill>
-                          <a:latin typeface="Arial" pitchFamily="34" charset="0"/>
-                          <a:ea typeface="Arial" pitchFamily="34" charset="-122"/>
-                          <a:cs typeface="Arial" pitchFamily="34" charset="-120"/>
-                        </a:rPr>
-                        <a:t>R</a:t>
-                      </a:r>
-                      <a:endParaRPr lang="en-US" sz="1200" dirty="0">
-                        <a:latin typeface="Arial" charset="0"/>
-                        <a:ea typeface="Arial" charset="0"/>
-                        <a:cs typeface="Arial" charset="0"/>
-                      </a:endParaRPr>
-                    </a:p>
-                  </a:txBody>
-                  <a:tcPr>
-                    <a:lnL w="6350" cap="flat" cmpd="sng" algn="ctr">
-                      <a:solidFill>
-                        <a:srgbClr val="D1D5DB"/>
-                      </a:solidFill>
-                      <a:prstDash val="solid"/>
-                      <a:round/>
-                      <a:headEnd type="none" w="med" len="med"/>
-                      <a:tailEnd type="none" w="med" len="med"/>
-                    </a:lnL>
-                    <a:lnR w="6350" cap="flat" cmpd="sng" algn="ctr">
-                      <a:solidFill>
-                        <a:srgbClr val="D1D5DB"/>
-                      </a:solidFill>
-                      <a:prstDash val="solid"/>
-                      <a:round/>
-                      <a:headEnd type="none" w="med" len="med"/>
-                      <a:tailEnd type="none" w="med" len="med"/>
-                    </a:lnR>
-                    <a:lnT w="6350" cap="flat" cmpd="sng" algn="ctr">
-                      <a:solidFill>
-                        <a:srgbClr val="D1D5DB"/>
-                      </a:solidFill>
-                      <a:prstDash val="solid"/>
-                      <a:round/>
-                      <a:headEnd type="none" w="med" len="med"/>
-                      <a:tailEnd type="none" w="med" len="med"/>
-                    </a:lnT>
-                    <a:lnB w="6350" cap="flat" cmpd="sng" algn="ctr">
-                      <a:solidFill>
-                        <a:srgbClr val="D1D5DB"/>
-                      </a:solidFill>
-                      <a:prstDash val="solid"/>
-                      <a:round/>
-                      <a:headEnd type="none" w="med" len="med"/>
-                      <a:tailEnd type="none" w="med" len="med"/>
-                    </a:lnB>
-                  </a:tcPr>
-                </a:tc>
-                <a:tc>
-                  <a:txBody>
-                    <a:bodyPr/>
-                    <a:lstStyle/>
-                    <a:p>
-                      <a:pPr marL="0" indent="0">
-                        <a:buNone/>
-                      </a:pPr>
-                      <a:r>
-                        <a:rPr lang="en-US" sz="1200" dirty="0">
+                          <a:prstDash val="solid"/>
+                          <a:round/>
+                          <a:headEnd type="none" w="med" len="med"/>
+                          <a:tailEnd type="none" w="med" len="med"/>
+                        </a:lnL>
+                        <a:lnR w="6350" cap="flat" cmpd="sng" algn="ctr">
                           <a:solidFill>
-                            <a:srgbClr val="000000"/>
+                            <a:srgbClr val="D1D5DB"/>
                           </a:solidFill>
-                          <a:latin typeface="Arial" pitchFamily="34" charset="0"/>
-                          <a:ea typeface="Arial" pitchFamily="34" charset="-122"/>
-                          <a:cs typeface="Arial" pitchFamily="34" charset="-120"/>
-                        </a:rPr>
-                        <a:t>k×k</a:t>
-                      </a:r>
-                      <a:endParaRPr lang="en-US" sz="1200" dirty="0">
-                        <a:latin typeface="Arial" charset="0"/>
-                        <a:ea typeface="Arial" charset="0"/>
-                        <a:cs typeface="Arial" charset="0"/>
-                      </a:endParaRPr>
-                    </a:p>
-                  </a:txBody>
-                  <a:tcPr>
-                    <a:lnL w="6350" cap="flat" cmpd="sng" algn="ctr">
-                      <a:solidFill>
-                        <a:srgbClr val="D1D5DB"/>
-                      </a:solidFill>
-                      <a:prstDash val="solid"/>
-                      <a:round/>
-                      <a:headEnd type="none" w="med" len="med"/>
-                      <a:tailEnd type="none" w="med" len="med"/>
-                    </a:lnL>
-                    <a:lnR w="6350" cap="flat" cmpd="sng" algn="ctr">
-                      <a:solidFill>
-                        <a:srgbClr val="D1D5DB"/>
-                      </a:solidFill>
-                      <a:prstDash val="solid"/>
-                      <a:round/>
-                      <a:headEnd type="none" w="med" len="med"/>
-                      <a:tailEnd type="none" w="med" len="med"/>
-                    </a:lnR>
-                    <a:lnT w="6350" cap="flat" cmpd="sng" algn="ctr">
-                      <a:solidFill>
-                        <a:srgbClr val="D1D5DB"/>
-                      </a:solidFill>
-                      <a:prstDash val="solid"/>
-                      <a:round/>
-                      <a:headEnd type="none" w="med" len="med"/>
-                      <a:tailEnd type="none" w="med" len="med"/>
-                    </a:lnT>
-                    <a:lnB w="6350" cap="flat" cmpd="sng" algn="ctr">
-                      <a:solidFill>
-                        <a:srgbClr val="D1D5DB"/>
-                      </a:solidFill>
-                      <a:prstDash val="solid"/>
-                      <a:round/>
-                      <a:headEnd type="none" w="med" len="med"/>
-                      <a:tailEnd type="none" w="med" len="med"/>
-                    </a:lnB>
-                  </a:tcPr>
-                </a:tc>
-                <a:tc>
-                  <a:txBody>
-                    <a:bodyPr/>
-                    <a:lstStyle/>
-                    <a:p>
-                      <a:pPr marL="0" indent="0">
-                        <a:buNone/>
-                      </a:pPr>
-                      <a:r>
-                        <a:rPr lang="en-US" sz="1200" dirty="0">
+                          <a:prstDash val="solid"/>
+                          <a:round/>
+                          <a:headEnd type="none" w="med" len="med"/>
+                          <a:tailEnd type="none" w="med" len="med"/>
+                        </a:lnR>
+                        <a:lnT w="6350" cap="flat" cmpd="sng" algn="ctr">
                           <a:solidFill>
-                            <a:srgbClr val="000000"/>
+                            <a:srgbClr val="D1D5DB"/>
                           </a:solidFill>
-                          <a:latin typeface="Arial" pitchFamily="34" charset="0"/>
-                          <a:ea typeface="Arial" pitchFamily="34" charset="-122"/>
-                          <a:cs typeface="Arial" pitchFamily="34" charset="-120"/>
-                        </a:rPr>
-                        <a:t>Measurement noise (sensor uncertainty)</a:t>
-                      </a:r>
-                      <a:endParaRPr lang="en-US" sz="1200" dirty="0">
-                        <a:latin typeface="Arial" charset="0"/>
-                        <a:ea typeface="Arial" charset="0"/>
-                        <a:cs typeface="Arial" charset="0"/>
-                      </a:endParaRPr>
-                    </a:p>
-                  </a:txBody>
-                  <a:tcPr>
-                    <a:lnL w="6350" cap="flat" cmpd="sng" algn="ctr">
-                      <a:solidFill>
-                        <a:srgbClr val="D1D5DB"/>
-                      </a:solidFill>
-                      <a:prstDash val="solid"/>
-                      <a:round/>
-                      <a:headEnd type="none" w="med" len="med"/>
-                      <a:tailEnd type="none" w="med" len="med"/>
-                    </a:lnL>
-                    <a:lnR w="6350" cap="flat" cmpd="sng" algn="ctr">
-                      <a:solidFill>
-                        <a:srgbClr val="D1D5DB"/>
-                      </a:solidFill>
-                      <a:prstDash val="solid"/>
-                      <a:round/>
-                      <a:headEnd type="none" w="med" len="med"/>
-                      <a:tailEnd type="none" w="med" len="med"/>
-                    </a:lnR>
-                    <a:lnT w="6350" cap="flat" cmpd="sng" algn="ctr">
-                      <a:solidFill>
-                        <a:srgbClr val="D1D5DB"/>
-                      </a:solidFill>
-                      <a:prstDash val="solid"/>
-                      <a:round/>
-                      <a:headEnd type="none" w="med" len="med"/>
-                      <a:tailEnd type="none" w="med" len="med"/>
-                    </a:lnT>
-                    <a:lnB w="6350" cap="flat" cmpd="sng" algn="ctr">
-                      <a:solidFill>
-                        <a:srgbClr val="D1D5DB"/>
-                      </a:solidFill>
-                      <a:prstDash val="solid"/>
-                      <a:round/>
-                      <a:headEnd type="none" w="med" len="med"/>
-                      <a:tailEnd type="none" w="med" len="med"/>
-                    </a:lnB>
-                  </a:tcPr>
-                </a:tc>
-                <a:tc>
-                  <a:txBody>
-                    <a:bodyPr/>
-                    <a:lstStyle/>
-                    <a:p>
-                      <a:pPr marL="0" indent="0">
-                        <a:buNone/>
-                      </a:pPr>
-                      <a:r>
-                        <a:rPr lang="en-US" sz="1200" dirty="0">
+                          <a:prstDash val="solid"/>
+                          <a:round/>
+                          <a:headEnd type="none" w="med" len="med"/>
+                          <a:tailEnd type="none" w="med" len="med"/>
+                        </a:lnT>
+                        <a:lnB w="6350" cap="flat" cmpd="sng" algn="ctr">
                           <a:solidFill>
-                            <a:srgbClr val="000000"/>
+                            <a:srgbClr val="D1D5DB"/>
                           </a:solidFill>
-                          <a:latin typeface="Arial" pitchFamily="34" charset="0"/>
-                          <a:ea typeface="Arial" pitchFamily="34" charset="-122"/>
-                          <a:cs typeface="Arial" pitchFamily="34" charset="-120"/>
-                        </a:rPr>
-                        <a:t>LiDAR noise σ_r, GPS noise σ_gps</a:t>
-                      </a:r>
-                      <a:endParaRPr lang="en-US" sz="1200" dirty="0">
-                        <a:latin typeface="Arial" charset="0"/>
-                        <a:ea typeface="Arial" charset="0"/>
-                        <a:cs typeface="Arial" charset="0"/>
-                      </a:endParaRPr>
-                    </a:p>
-                  </a:txBody>
-                  <a:tcPr>
-                    <a:lnL w="6350" cap="flat" cmpd="sng" algn="ctr">
-                      <a:solidFill>
-                        <a:srgbClr val="D1D5DB"/>
-                      </a:solidFill>
-                      <a:prstDash val="solid"/>
-                      <a:round/>
-                      <a:headEnd type="none" w="med" len="med"/>
-                      <a:tailEnd type="none" w="med" len="med"/>
-                    </a:lnL>
-                    <a:lnR w="6350" cap="flat" cmpd="sng" algn="ctr">
-                      <a:solidFill>
-                        <a:srgbClr val="D1D5DB"/>
-                      </a:solidFill>
-                      <a:prstDash val="solid"/>
-                      <a:round/>
-                      <a:headEnd type="none" w="med" len="med"/>
-                      <a:tailEnd type="none" w="med" len="med"/>
-                    </a:lnR>
-                    <a:lnT w="6350" cap="flat" cmpd="sng" algn="ctr">
-                      <a:solidFill>
-                        <a:srgbClr val="D1D5DB"/>
-                      </a:solidFill>
-                      <a:prstDash val="solid"/>
-                      <a:round/>
-                      <a:headEnd type="none" w="med" len="med"/>
-                      <a:tailEnd type="none" w="med" len="med"/>
-                    </a:lnT>
-                    <a:lnB w="6350" cap="flat" cmpd="sng" algn="ctr">
-                      <a:solidFill>
-                        <a:srgbClr val="D1D5DB"/>
-                      </a:solidFill>
-                      <a:prstDash val="solid"/>
-                      <a:round/>
-                      <a:headEnd type="none" w="med" len="med"/>
-                      <a:tailEnd type="none" w="med" len="med"/>
-                    </a:lnB>
-                  </a:tcPr>
-                </a:tc>
-                <a:extLst>
-                  <a:ext uri="{0D108BD9-81ED-4DB2-BD59-A6C34878D82A}">
-                    <a16:rowId xmlns:a16="http://schemas.microsoft.com/office/drawing/2014/main" val="10005"/>
-                  </a:ext>
-                </a:extLst>
-              </a:tr>
-            </a:tbl>
-          </a:graphicData>
-        </a:graphic>
-      </p:graphicFrame>
+                          <a:prstDash val="solid"/>
+                          <a:round/>
+                          <a:headEnd type="none" w="med" len="med"/>
+                          <a:tailEnd type="none" w="med" len="med"/>
+                        </a:lnB>
+                      </a:tcPr>
+                    </a:tc>
+                    <a:tc>
+                      <a:txBody>
+                        <a:bodyPr/>
+                        <a:lstStyle/>
+                        <a:p>
+                          <a:pPr marL="0" indent="0">
+                            <a:buNone/>
+                          </a:pPr>
+                          <a:r>
+                            <a:rPr lang="en-US" sz="1200" dirty="0">
+                              <a:solidFill>
+                                <a:srgbClr val="000000"/>
+                              </a:solidFill>
+                              <a:latin typeface="Arial" pitchFamily="34" charset="0"/>
+                              <a:ea typeface="Arial" pitchFamily="34" charset="-122"/>
+                              <a:cs typeface="Arial" pitchFamily="34" charset="-120"/>
+                            </a:rPr>
+                            <a:t>How state evolves in one step</a:t>
+                          </a:r>
+                          <a:endParaRPr lang="en-US" sz="1200" dirty="0">
+                            <a:latin typeface="Arial" charset="0"/>
+                            <a:ea typeface="Arial" charset="0"/>
+                            <a:cs typeface="Arial" charset="0"/>
+                          </a:endParaRPr>
+                        </a:p>
+                      </a:txBody>
+                      <a:tcPr>
+                        <a:lnL w="6350" cap="flat" cmpd="sng" algn="ctr">
+                          <a:solidFill>
+                            <a:srgbClr val="D1D5DB"/>
+                          </a:solidFill>
+                          <a:prstDash val="solid"/>
+                          <a:round/>
+                          <a:headEnd type="none" w="med" len="med"/>
+                          <a:tailEnd type="none" w="med" len="med"/>
+                        </a:lnL>
+                        <a:lnR w="6350" cap="flat" cmpd="sng" algn="ctr">
+                          <a:solidFill>
+                            <a:srgbClr val="D1D5DB"/>
+                          </a:solidFill>
+                          <a:prstDash val="solid"/>
+                          <a:round/>
+                          <a:headEnd type="none" w="med" len="med"/>
+                          <a:tailEnd type="none" w="med" len="med"/>
+                        </a:lnR>
+                        <a:lnT w="6350" cap="flat" cmpd="sng" algn="ctr">
+                          <a:solidFill>
+                            <a:srgbClr val="D1D5DB"/>
+                          </a:solidFill>
+                          <a:prstDash val="solid"/>
+                          <a:round/>
+                          <a:headEnd type="none" w="med" len="med"/>
+                          <a:tailEnd type="none" w="med" len="med"/>
+                        </a:lnT>
+                        <a:lnB w="6350" cap="flat" cmpd="sng" algn="ctr">
+                          <a:solidFill>
+                            <a:srgbClr val="D1D5DB"/>
+                          </a:solidFill>
+                          <a:prstDash val="solid"/>
+                          <a:round/>
+                          <a:headEnd type="none" w="med" len="med"/>
+                          <a:tailEnd type="none" w="med" len="med"/>
+                        </a:lnB>
+                      </a:tcPr>
+                    </a:tc>
+                    <a:tc>
+                      <a:txBody>
+                        <a:bodyPr/>
+                        <a:lstStyle/>
+                        <a:p>
+                          <a:pPr marL="0" indent="0">
+                            <a:buNone/>
+                          </a:pPr>
+                          <a:r>
+                            <a:rPr lang="en-US" sz="1200" dirty="0">
+                              <a:solidFill>
+                                <a:srgbClr val="000000"/>
+                              </a:solidFill>
+                              <a:latin typeface="Arial" pitchFamily="34" charset="0"/>
+                              <a:ea typeface="Arial" pitchFamily="34" charset="-122"/>
+                              <a:cs typeface="Arial" pitchFamily="34" charset="-120"/>
+                            </a:rPr>
+                            <a:t>Position update from velocity</a:t>
+                          </a:r>
+                          <a:endParaRPr lang="en-US" sz="1200" dirty="0">
+                            <a:latin typeface="Arial" charset="0"/>
+                            <a:ea typeface="Arial" charset="0"/>
+                            <a:cs typeface="Arial" charset="0"/>
+                          </a:endParaRPr>
+                        </a:p>
+                      </a:txBody>
+                      <a:tcPr>
+                        <a:lnL w="6350" cap="flat" cmpd="sng" algn="ctr">
+                          <a:solidFill>
+                            <a:srgbClr val="D1D5DB"/>
+                          </a:solidFill>
+                          <a:prstDash val="solid"/>
+                          <a:round/>
+                          <a:headEnd type="none" w="med" len="med"/>
+                          <a:tailEnd type="none" w="med" len="med"/>
+                        </a:lnL>
+                        <a:lnR w="6350" cap="flat" cmpd="sng" algn="ctr">
+                          <a:solidFill>
+                            <a:srgbClr val="D1D5DB"/>
+                          </a:solidFill>
+                          <a:prstDash val="solid"/>
+                          <a:round/>
+                          <a:headEnd type="none" w="med" len="med"/>
+                          <a:tailEnd type="none" w="med" len="med"/>
+                        </a:lnR>
+                        <a:lnT w="6350" cap="flat" cmpd="sng" algn="ctr">
+                          <a:solidFill>
+                            <a:srgbClr val="D1D5DB"/>
+                          </a:solidFill>
+                          <a:prstDash val="solid"/>
+                          <a:round/>
+                          <a:headEnd type="none" w="med" len="med"/>
+                          <a:tailEnd type="none" w="med" len="med"/>
+                        </a:lnT>
+                        <a:lnB w="6350" cap="flat" cmpd="sng" algn="ctr">
+                          <a:solidFill>
+                            <a:srgbClr val="D1D5DB"/>
+                          </a:solidFill>
+                          <a:prstDash val="solid"/>
+                          <a:round/>
+                          <a:headEnd type="none" w="med" len="med"/>
+                          <a:tailEnd type="none" w="med" len="med"/>
+                        </a:lnB>
+                      </a:tcPr>
+                    </a:tc>
+                    <a:extLst>
+                      <a:ext uri="{0D108BD9-81ED-4DB2-BD59-A6C34878D82A}">
+                        <a16:rowId xmlns:a16="http://schemas.microsoft.com/office/drawing/2014/main" val="10001"/>
+                      </a:ext>
+                    </a:extLst>
+                  </a:tr>
+                  <a:tr h="272312">
+                    <a:tc>
+                      <a:txBody>
+                        <a:bodyPr/>
+                        <a:lstStyle/>
+                        <a:p>
+                          <a:pPr marL="0" indent="0">
+                            <a:buNone/>
+                          </a:pPr>
+                          <a:r>
+                            <a:rPr lang="en-US" sz="1200" dirty="0">
+                              <a:solidFill>
+                                <a:srgbClr val="000000"/>
+                              </a:solidFill>
+                              <a:latin typeface="Arial" pitchFamily="34" charset="0"/>
+                              <a:ea typeface="Arial" pitchFamily="34" charset="-122"/>
+                              <a:cs typeface="Arial" pitchFamily="34" charset="-120"/>
+                            </a:rPr>
+                            <a:t>B</a:t>
+                          </a:r>
+                          <a:endParaRPr lang="en-US" sz="1200" dirty="0">
+                            <a:latin typeface="Arial" charset="0"/>
+                            <a:ea typeface="Arial" charset="0"/>
+                            <a:cs typeface="Arial" charset="0"/>
+                          </a:endParaRPr>
+                        </a:p>
+                      </a:txBody>
+                      <a:tcPr>
+                        <a:lnL w="6350" cap="flat" cmpd="sng" algn="ctr">
+                          <a:solidFill>
+                            <a:srgbClr val="D1D5DB"/>
+                          </a:solidFill>
+                          <a:prstDash val="solid"/>
+                          <a:round/>
+                          <a:headEnd type="none" w="med" len="med"/>
+                          <a:tailEnd type="none" w="med" len="med"/>
+                        </a:lnL>
+                        <a:lnR w="6350" cap="flat" cmpd="sng" algn="ctr">
+                          <a:solidFill>
+                            <a:srgbClr val="D1D5DB"/>
+                          </a:solidFill>
+                          <a:prstDash val="solid"/>
+                          <a:round/>
+                          <a:headEnd type="none" w="med" len="med"/>
+                          <a:tailEnd type="none" w="med" len="med"/>
+                        </a:lnR>
+                        <a:lnT w="6350" cap="flat" cmpd="sng" algn="ctr">
+                          <a:solidFill>
+                            <a:srgbClr val="D1D5DB"/>
+                          </a:solidFill>
+                          <a:prstDash val="solid"/>
+                          <a:round/>
+                          <a:headEnd type="none" w="med" len="med"/>
+                          <a:tailEnd type="none" w="med" len="med"/>
+                        </a:lnT>
+                        <a:lnB w="6350" cap="flat" cmpd="sng" algn="ctr">
+                          <a:solidFill>
+                            <a:srgbClr val="D1D5DB"/>
+                          </a:solidFill>
+                          <a:prstDash val="solid"/>
+                          <a:round/>
+                          <a:headEnd type="none" w="med" len="med"/>
+                          <a:tailEnd type="none" w="med" len="med"/>
+                        </a:lnB>
+                      </a:tcPr>
+                    </a:tc>
+                    <a:tc>
+                      <a:txBody>
+                        <a:bodyPr/>
+                        <a:lstStyle/>
+                        <a:p>
+                          <a:pPr marL="0" indent="0">
+                            <a:buNone/>
+                          </a:pPr>
+                          <a:r>
+                            <a:rPr lang="en-US" sz="1200" dirty="0">
+                              <a:solidFill>
+                                <a:srgbClr val="000000"/>
+                              </a:solidFill>
+                              <a:latin typeface="Arial" pitchFamily="34" charset="0"/>
+                              <a:ea typeface="Arial" pitchFamily="34" charset="-122"/>
+                              <a:cs typeface="Arial" pitchFamily="34" charset="-120"/>
+                            </a:rPr>
+                            <a:t>n×m</a:t>
+                          </a:r>
+                          <a:endParaRPr lang="en-US" sz="1200" dirty="0">
+                            <a:latin typeface="Arial" charset="0"/>
+                            <a:ea typeface="Arial" charset="0"/>
+                            <a:cs typeface="Arial" charset="0"/>
+                          </a:endParaRPr>
+                        </a:p>
+                      </a:txBody>
+                      <a:tcPr>
+                        <a:lnL w="6350" cap="flat" cmpd="sng" algn="ctr">
+                          <a:solidFill>
+                            <a:srgbClr val="D1D5DB"/>
+                          </a:solidFill>
+                          <a:prstDash val="solid"/>
+                          <a:round/>
+                          <a:headEnd type="none" w="med" len="med"/>
+                          <a:tailEnd type="none" w="med" len="med"/>
+                        </a:lnL>
+                        <a:lnR w="6350" cap="flat" cmpd="sng" algn="ctr">
+                          <a:solidFill>
+                            <a:srgbClr val="D1D5DB"/>
+                          </a:solidFill>
+                          <a:prstDash val="solid"/>
+                          <a:round/>
+                          <a:headEnd type="none" w="med" len="med"/>
+                          <a:tailEnd type="none" w="med" len="med"/>
+                        </a:lnR>
+                        <a:lnT w="6350" cap="flat" cmpd="sng" algn="ctr">
+                          <a:solidFill>
+                            <a:srgbClr val="D1D5DB"/>
+                          </a:solidFill>
+                          <a:prstDash val="solid"/>
+                          <a:round/>
+                          <a:headEnd type="none" w="med" len="med"/>
+                          <a:tailEnd type="none" w="med" len="med"/>
+                        </a:lnT>
+                        <a:lnB w="6350" cap="flat" cmpd="sng" algn="ctr">
+                          <a:solidFill>
+                            <a:srgbClr val="D1D5DB"/>
+                          </a:solidFill>
+                          <a:prstDash val="solid"/>
+                          <a:round/>
+                          <a:headEnd type="none" w="med" len="med"/>
+                          <a:tailEnd type="none" w="med" len="med"/>
+                        </a:lnB>
+                      </a:tcPr>
+                    </a:tc>
+                    <a:tc>
+                      <a:txBody>
+                        <a:bodyPr/>
+                        <a:lstStyle/>
+                        <a:p>
+                          <a:pPr marL="0" indent="0">
+                            <a:buNone/>
+                          </a:pPr>
+                          <a:r>
+                            <a:rPr lang="en-US" sz="1200" dirty="0">
+                              <a:solidFill>
+                                <a:srgbClr val="000000"/>
+                              </a:solidFill>
+                              <a:latin typeface="Arial" pitchFamily="34" charset="0"/>
+                              <a:ea typeface="Arial" pitchFamily="34" charset="-122"/>
+                              <a:cs typeface="Arial" pitchFamily="34" charset="-120"/>
+                            </a:rPr>
+                            <a:t>How control affects state</a:t>
+                          </a:r>
+                          <a:endParaRPr lang="en-US" sz="1200" dirty="0">
+                            <a:latin typeface="Arial" charset="0"/>
+                            <a:ea typeface="Arial" charset="0"/>
+                            <a:cs typeface="Arial" charset="0"/>
+                          </a:endParaRPr>
+                        </a:p>
+                      </a:txBody>
+                      <a:tcPr>
+                        <a:lnL w="6350" cap="flat" cmpd="sng" algn="ctr">
+                          <a:solidFill>
+                            <a:srgbClr val="D1D5DB"/>
+                          </a:solidFill>
+                          <a:prstDash val="solid"/>
+                          <a:round/>
+                          <a:headEnd type="none" w="med" len="med"/>
+                          <a:tailEnd type="none" w="med" len="med"/>
+                        </a:lnL>
+                        <a:lnR w="6350" cap="flat" cmpd="sng" algn="ctr">
+                          <a:solidFill>
+                            <a:srgbClr val="D1D5DB"/>
+                          </a:solidFill>
+                          <a:prstDash val="solid"/>
+                          <a:round/>
+                          <a:headEnd type="none" w="med" len="med"/>
+                          <a:tailEnd type="none" w="med" len="med"/>
+                        </a:lnR>
+                        <a:lnT w="6350" cap="flat" cmpd="sng" algn="ctr">
+                          <a:solidFill>
+                            <a:srgbClr val="D1D5DB"/>
+                          </a:solidFill>
+                          <a:prstDash val="solid"/>
+                          <a:round/>
+                          <a:headEnd type="none" w="med" len="med"/>
+                          <a:tailEnd type="none" w="med" len="med"/>
+                        </a:lnT>
+                        <a:lnB w="6350" cap="flat" cmpd="sng" algn="ctr">
+                          <a:solidFill>
+                            <a:srgbClr val="D1D5DB"/>
+                          </a:solidFill>
+                          <a:prstDash val="solid"/>
+                          <a:round/>
+                          <a:headEnd type="none" w="med" len="med"/>
+                          <a:tailEnd type="none" w="med" len="med"/>
+                        </a:lnB>
+                      </a:tcPr>
+                    </a:tc>
+                    <a:tc>
+                      <a:txBody>
+                        <a:bodyPr/>
+                        <a:lstStyle/>
+                        <a:p>
+                          <a:pPr marL="0" indent="0">
+                            <a:buNone/>
+                          </a:pPr>
+                          <a:r>
+                            <a:rPr lang="en-US" sz="1200" dirty="0">
+                              <a:solidFill>
+                                <a:srgbClr val="000000"/>
+                              </a:solidFill>
+                              <a:latin typeface="Arial" pitchFamily="34" charset="0"/>
+                              <a:ea typeface="Arial" pitchFamily="34" charset="-122"/>
+                              <a:cs typeface="Arial" pitchFamily="34" charset="-120"/>
+                            </a:rPr>
+                            <a:t>Steering command → position change</a:t>
+                          </a:r>
+                          <a:endParaRPr lang="en-US" sz="1200" dirty="0">
+                            <a:latin typeface="Arial" charset="0"/>
+                            <a:ea typeface="Arial" charset="0"/>
+                            <a:cs typeface="Arial" charset="0"/>
+                          </a:endParaRPr>
+                        </a:p>
+                      </a:txBody>
+                      <a:tcPr>
+                        <a:lnL w="6350" cap="flat" cmpd="sng" algn="ctr">
+                          <a:solidFill>
+                            <a:srgbClr val="D1D5DB"/>
+                          </a:solidFill>
+                          <a:prstDash val="solid"/>
+                          <a:round/>
+                          <a:headEnd type="none" w="med" len="med"/>
+                          <a:tailEnd type="none" w="med" len="med"/>
+                        </a:lnL>
+                        <a:lnR w="6350" cap="flat" cmpd="sng" algn="ctr">
+                          <a:solidFill>
+                            <a:srgbClr val="D1D5DB"/>
+                          </a:solidFill>
+                          <a:prstDash val="solid"/>
+                          <a:round/>
+                          <a:headEnd type="none" w="med" len="med"/>
+                          <a:tailEnd type="none" w="med" len="med"/>
+                        </a:lnR>
+                        <a:lnT w="6350" cap="flat" cmpd="sng" algn="ctr">
+                          <a:solidFill>
+                            <a:srgbClr val="D1D5DB"/>
+                          </a:solidFill>
+                          <a:prstDash val="solid"/>
+                          <a:round/>
+                          <a:headEnd type="none" w="med" len="med"/>
+                          <a:tailEnd type="none" w="med" len="med"/>
+                        </a:lnT>
+                        <a:lnB w="6350" cap="flat" cmpd="sng" algn="ctr">
+                          <a:solidFill>
+                            <a:srgbClr val="D1D5DB"/>
+                          </a:solidFill>
+                          <a:prstDash val="solid"/>
+                          <a:round/>
+                          <a:headEnd type="none" w="med" len="med"/>
+                          <a:tailEnd type="none" w="med" len="med"/>
+                        </a:lnB>
+                      </a:tcPr>
+                    </a:tc>
+                    <a:extLst>
+                      <a:ext uri="{0D108BD9-81ED-4DB2-BD59-A6C34878D82A}">
+                        <a16:rowId xmlns:a16="http://schemas.microsoft.com/office/drawing/2014/main" val="10002"/>
+                      </a:ext>
+                    </a:extLst>
+                  </a:tr>
+                  <a:tr h="272312">
+                    <a:tc>
+                      <a:txBody>
+                        <a:bodyPr/>
+                        <a:lstStyle/>
+                        <a:p>
+                          <a:pPr marL="0" indent="0">
+                            <a:buNone/>
+                          </a:pPr>
+                          <a:r>
+                            <a:rPr lang="en-US" sz="1200" dirty="0">
+                              <a:solidFill>
+                                <a:srgbClr val="000000"/>
+                              </a:solidFill>
+                              <a:latin typeface="Arial" pitchFamily="34" charset="0"/>
+                              <a:ea typeface="Arial" pitchFamily="34" charset="-122"/>
+                              <a:cs typeface="Arial" pitchFamily="34" charset="-120"/>
+                            </a:rPr>
+                            <a:t>H</a:t>
+                          </a:r>
+                          <a:endParaRPr lang="en-US" sz="1200" dirty="0">
+                            <a:latin typeface="Arial" charset="0"/>
+                            <a:ea typeface="Arial" charset="0"/>
+                            <a:cs typeface="Arial" charset="0"/>
+                          </a:endParaRPr>
+                        </a:p>
+                      </a:txBody>
+                      <a:tcPr>
+                        <a:lnL w="6350" cap="flat" cmpd="sng" algn="ctr">
+                          <a:solidFill>
+                            <a:srgbClr val="D1D5DB"/>
+                          </a:solidFill>
+                          <a:prstDash val="solid"/>
+                          <a:round/>
+                          <a:headEnd type="none" w="med" len="med"/>
+                          <a:tailEnd type="none" w="med" len="med"/>
+                        </a:lnL>
+                        <a:lnR w="6350" cap="flat" cmpd="sng" algn="ctr">
+                          <a:solidFill>
+                            <a:srgbClr val="D1D5DB"/>
+                          </a:solidFill>
+                          <a:prstDash val="solid"/>
+                          <a:round/>
+                          <a:headEnd type="none" w="med" len="med"/>
+                          <a:tailEnd type="none" w="med" len="med"/>
+                        </a:lnR>
+                        <a:lnT w="6350" cap="flat" cmpd="sng" algn="ctr">
+                          <a:solidFill>
+                            <a:srgbClr val="D1D5DB"/>
+                          </a:solidFill>
+                          <a:prstDash val="solid"/>
+                          <a:round/>
+                          <a:headEnd type="none" w="med" len="med"/>
+                          <a:tailEnd type="none" w="med" len="med"/>
+                        </a:lnT>
+                        <a:lnB w="6350" cap="flat" cmpd="sng" algn="ctr">
+                          <a:solidFill>
+                            <a:srgbClr val="D1D5DB"/>
+                          </a:solidFill>
+                          <a:prstDash val="solid"/>
+                          <a:round/>
+                          <a:headEnd type="none" w="med" len="med"/>
+                          <a:tailEnd type="none" w="med" len="med"/>
+                        </a:lnB>
+                      </a:tcPr>
+                    </a:tc>
+                    <a:tc>
+                      <a:txBody>
+                        <a:bodyPr/>
+                        <a:lstStyle/>
+                        <a:p>
+                          <a:pPr marL="0" indent="0">
+                            <a:buNone/>
+                          </a:pPr>
+                          <a:r>
+                            <a:rPr lang="en-US" sz="1200" dirty="0">
+                              <a:solidFill>
+                                <a:srgbClr val="000000"/>
+                              </a:solidFill>
+                              <a:latin typeface="Arial" pitchFamily="34" charset="0"/>
+                              <a:ea typeface="Arial" pitchFamily="34" charset="-122"/>
+                              <a:cs typeface="Arial" pitchFamily="34" charset="-120"/>
+                            </a:rPr>
+                            <a:t>k×n</a:t>
+                          </a:r>
+                          <a:endParaRPr lang="en-US" sz="1200" dirty="0">
+                            <a:latin typeface="Arial" charset="0"/>
+                            <a:ea typeface="Arial" charset="0"/>
+                            <a:cs typeface="Arial" charset="0"/>
+                          </a:endParaRPr>
+                        </a:p>
+                      </a:txBody>
+                      <a:tcPr>
+                        <a:lnL w="6350" cap="flat" cmpd="sng" algn="ctr">
+                          <a:solidFill>
+                            <a:srgbClr val="D1D5DB"/>
+                          </a:solidFill>
+                          <a:prstDash val="solid"/>
+                          <a:round/>
+                          <a:headEnd type="none" w="med" len="med"/>
+                          <a:tailEnd type="none" w="med" len="med"/>
+                        </a:lnL>
+                        <a:lnR w="6350" cap="flat" cmpd="sng" algn="ctr">
+                          <a:solidFill>
+                            <a:srgbClr val="D1D5DB"/>
+                          </a:solidFill>
+                          <a:prstDash val="solid"/>
+                          <a:round/>
+                          <a:headEnd type="none" w="med" len="med"/>
+                          <a:tailEnd type="none" w="med" len="med"/>
+                        </a:lnR>
+                        <a:lnT w="6350" cap="flat" cmpd="sng" algn="ctr">
+                          <a:solidFill>
+                            <a:srgbClr val="D1D5DB"/>
+                          </a:solidFill>
+                          <a:prstDash val="solid"/>
+                          <a:round/>
+                          <a:headEnd type="none" w="med" len="med"/>
+                          <a:tailEnd type="none" w="med" len="med"/>
+                        </a:lnT>
+                        <a:lnB w="6350" cap="flat" cmpd="sng" algn="ctr">
+                          <a:solidFill>
+                            <a:srgbClr val="D1D5DB"/>
+                          </a:solidFill>
+                          <a:prstDash val="solid"/>
+                          <a:round/>
+                          <a:headEnd type="none" w="med" len="med"/>
+                          <a:tailEnd type="none" w="med" len="med"/>
+                        </a:lnB>
+                      </a:tcPr>
+                    </a:tc>
+                    <a:tc>
+                      <a:txBody>
+                        <a:bodyPr/>
+                        <a:lstStyle/>
+                        <a:p>
+                          <a:pPr marL="0" indent="0">
+                            <a:buNone/>
+                          </a:pPr>
+                          <a:r>
+                            <a:rPr lang="en-US" sz="1200" dirty="0">
+                              <a:solidFill>
+                                <a:srgbClr val="000000"/>
+                              </a:solidFill>
+                              <a:latin typeface="Arial" pitchFamily="34" charset="0"/>
+                              <a:ea typeface="Arial" pitchFamily="34" charset="-122"/>
+                              <a:cs typeface="Arial" pitchFamily="34" charset="-120"/>
+                            </a:rPr>
+                            <a:t>What sensor measures from state</a:t>
+                          </a:r>
+                          <a:endParaRPr lang="en-US" sz="1200" dirty="0">
+                            <a:latin typeface="Arial" charset="0"/>
+                            <a:ea typeface="Arial" charset="0"/>
+                            <a:cs typeface="Arial" charset="0"/>
+                          </a:endParaRPr>
+                        </a:p>
+                      </a:txBody>
+                      <a:tcPr>
+                        <a:lnL w="6350" cap="flat" cmpd="sng" algn="ctr">
+                          <a:solidFill>
+                            <a:srgbClr val="D1D5DB"/>
+                          </a:solidFill>
+                          <a:prstDash val="solid"/>
+                          <a:round/>
+                          <a:headEnd type="none" w="med" len="med"/>
+                          <a:tailEnd type="none" w="med" len="med"/>
+                        </a:lnL>
+                        <a:lnR w="6350" cap="flat" cmpd="sng" algn="ctr">
+                          <a:solidFill>
+                            <a:srgbClr val="D1D5DB"/>
+                          </a:solidFill>
+                          <a:prstDash val="solid"/>
+                          <a:round/>
+                          <a:headEnd type="none" w="med" len="med"/>
+                          <a:tailEnd type="none" w="med" len="med"/>
+                        </a:lnR>
+                        <a:lnT w="6350" cap="flat" cmpd="sng" algn="ctr">
+                          <a:solidFill>
+                            <a:srgbClr val="D1D5DB"/>
+                          </a:solidFill>
+                          <a:prstDash val="solid"/>
+                          <a:round/>
+                          <a:headEnd type="none" w="med" len="med"/>
+                          <a:tailEnd type="none" w="med" len="med"/>
+                        </a:lnT>
+                        <a:lnB w="6350" cap="flat" cmpd="sng" algn="ctr">
+                          <a:solidFill>
+                            <a:srgbClr val="D1D5DB"/>
+                          </a:solidFill>
+                          <a:prstDash val="solid"/>
+                          <a:round/>
+                          <a:headEnd type="none" w="med" len="med"/>
+                          <a:tailEnd type="none" w="med" len="med"/>
+                        </a:lnB>
+                      </a:tcPr>
+                    </a:tc>
+                    <a:tc>
+                      <a:txBody>
+                        <a:bodyPr/>
+                        <a:lstStyle/>
+                        <a:p>
+                          <a:pPr marL="0" indent="0">
+                            <a:buNone/>
+                          </a:pPr>
+                          <a:r>
+                            <a:rPr lang="en-US" sz="1200" dirty="0">
+                              <a:solidFill>
+                                <a:srgbClr val="000000"/>
+                              </a:solidFill>
+                              <a:latin typeface="Arial" pitchFamily="34" charset="0"/>
+                              <a:ea typeface="Arial" pitchFamily="34" charset="-122"/>
+                              <a:cs typeface="Arial" pitchFamily="34" charset="-120"/>
+                            </a:rPr>
+                            <a:t>LiDAR measures distance from position</a:t>
+                          </a:r>
+                          <a:endParaRPr lang="en-US" sz="1200" dirty="0">
+                            <a:latin typeface="Arial" charset="0"/>
+                            <a:ea typeface="Arial" charset="0"/>
+                            <a:cs typeface="Arial" charset="0"/>
+                          </a:endParaRPr>
+                        </a:p>
+                      </a:txBody>
+                      <a:tcPr>
+                        <a:lnL w="6350" cap="flat" cmpd="sng" algn="ctr">
+                          <a:solidFill>
+                            <a:srgbClr val="D1D5DB"/>
+                          </a:solidFill>
+                          <a:prstDash val="solid"/>
+                          <a:round/>
+                          <a:headEnd type="none" w="med" len="med"/>
+                          <a:tailEnd type="none" w="med" len="med"/>
+                        </a:lnL>
+                        <a:lnR w="6350" cap="flat" cmpd="sng" algn="ctr">
+                          <a:solidFill>
+                            <a:srgbClr val="D1D5DB"/>
+                          </a:solidFill>
+                          <a:prstDash val="solid"/>
+                          <a:round/>
+                          <a:headEnd type="none" w="med" len="med"/>
+                          <a:tailEnd type="none" w="med" len="med"/>
+                        </a:lnR>
+                        <a:lnT w="6350" cap="flat" cmpd="sng" algn="ctr">
+                          <a:solidFill>
+                            <a:srgbClr val="D1D5DB"/>
+                          </a:solidFill>
+                          <a:prstDash val="solid"/>
+                          <a:round/>
+                          <a:headEnd type="none" w="med" len="med"/>
+                          <a:tailEnd type="none" w="med" len="med"/>
+                        </a:lnT>
+                        <a:lnB w="6350" cap="flat" cmpd="sng" algn="ctr">
+                          <a:solidFill>
+                            <a:srgbClr val="D1D5DB"/>
+                          </a:solidFill>
+                          <a:prstDash val="solid"/>
+                          <a:round/>
+                          <a:headEnd type="none" w="med" len="med"/>
+                          <a:tailEnd type="none" w="med" len="med"/>
+                        </a:lnB>
+                      </a:tcPr>
+                    </a:tc>
+                    <a:extLst>
+                      <a:ext uri="{0D108BD9-81ED-4DB2-BD59-A6C34878D82A}">
+                        <a16:rowId xmlns:a16="http://schemas.microsoft.com/office/drawing/2014/main" val="10003"/>
+                      </a:ext>
+                    </a:extLst>
+                  </a:tr>
+                  <a:tr h="272312">
+                    <a:tc>
+                      <a:txBody>
+                        <a:bodyPr/>
+                        <a:lstStyle/>
+                        <a:p>
+                          <a:pPr marL="0" indent="0">
+                            <a:buNone/>
+                          </a:pPr>
+                          <a:r>
+                            <a:rPr lang="en-US" sz="1200" dirty="0">
+                              <a:solidFill>
+                                <a:srgbClr val="000000"/>
+                              </a:solidFill>
+                              <a:latin typeface="Arial" pitchFamily="34" charset="0"/>
+                              <a:ea typeface="Arial" pitchFamily="34" charset="-122"/>
+                              <a:cs typeface="Arial" pitchFamily="34" charset="-120"/>
+                            </a:rPr>
+                            <a:t>Q</a:t>
+                          </a:r>
+                          <a:endParaRPr lang="en-US" sz="1200" dirty="0">
+                            <a:latin typeface="Arial" charset="0"/>
+                            <a:ea typeface="Arial" charset="0"/>
+                            <a:cs typeface="Arial" charset="0"/>
+                          </a:endParaRPr>
+                        </a:p>
+                      </a:txBody>
+                      <a:tcPr>
+                        <a:lnL w="6350" cap="flat" cmpd="sng" algn="ctr">
+                          <a:solidFill>
+                            <a:srgbClr val="D1D5DB"/>
+                          </a:solidFill>
+                          <a:prstDash val="solid"/>
+                          <a:round/>
+                          <a:headEnd type="none" w="med" len="med"/>
+                          <a:tailEnd type="none" w="med" len="med"/>
+                        </a:lnL>
+                        <a:lnR w="6350" cap="flat" cmpd="sng" algn="ctr">
+                          <a:solidFill>
+                            <a:srgbClr val="D1D5DB"/>
+                          </a:solidFill>
+                          <a:prstDash val="solid"/>
+                          <a:round/>
+                          <a:headEnd type="none" w="med" len="med"/>
+                          <a:tailEnd type="none" w="med" len="med"/>
+                        </a:lnR>
+                        <a:lnT w="6350" cap="flat" cmpd="sng" algn="ctr">
+                          <a:solidFill>
+                            <a:srgbClr val="D1D5DB"/>
+                          </a:solidFill>
+                          <a:prstDash val="solid"/>
+                          <a:round/>
+                          <a:headEnd type="none" w="med" len="med"/>
+                          <a:tailEnd type="none" w="med" len="med"/>
+                        </a:lnT>
+                        <a:lnB w="6350" cap="flat" cmpd="sng" algn="ctr">
+                          <a:solidFill>
+                            <a:srgbClr val="D1D5DB"/>
+                          </a:solidFill>
+                          <a:prstDash val="solid"/>
+                          <a:round/>
+                          <a:headEnd type="none" w="med" len="med"/>
+                          <a:tailEnd type="none" w="med" len="med"/>
+                        </a:lnB>
+                      </a:tcPr>
+                    </a:tc>
+                    <a:tc>
+                      <a:txBody>
+                        <a:bodyPr/>
+                        <a:lstStyle/>
+                        <a:p>
+                          <a:pPr marL="0" indent="0">
+                            <a:buNone/>
+                          </a:pPr>
+                          <a:r>
+                            <a:rPr lang="en-US" sz="1200" dirty="0">
+                              <a:solidFill>
+                                <a:srgbClr val="000000"/>
+                              </a:solidFill>
+                              <a:latin typeface="Arial" pitchFamily="34" charset="0"/>
+                              <a:ea typeface="Arial" pitchFamily="34" charset="-122"/>
+                              <a:cs typeface="Arial" pitchFamily="34" charset="-120"/>
+                            </a:rPr>
+                            <a:t>n×n</a:t>
+                          </a:r>
+                          <a:endParaRPr lang="en-US" sz="1200" dirty="0">
+                            <a:latin typeface="Arial" charset="0"/>
+                            <a:ea typeface="Arial" charset="0"/>
+                            <a:cs typeface="Arial" charset="0"/>
+                          </a:endParaRPr>
+                        </a:p>
+                      </a:txBody>
+                      <a:tcPr>
+                        <a:lnL w="6350" cap="flat" cmpd="sng" algn="ctr">
+                          <a:solidFill>
+                            <a:srgbClr val="D1D5DB"/>
+                          </a:solidFill>
+                          <a:prstDash val="solid"/>
+                          <a:round/>
+                          <a:headEnd type="none" w="med" len="med"/>
+                          <a:tailEnd type="none" w="med" len="med"/>
+                        </a:lnL>
+                        <a:lnR w="6350" cap="flat" cmpd="sng" algn="ctr">
+                          <a:solidFill>
+                            <a:srgbClr val="D1D5DB"/>
+                          </a:solidFill>
+                          <a:prstDash val="solid"/>
+                          <a:round/>
+                          <a:headEnd type="none" w="med" len="med"/>
+                          <a:tailEnd type="none" w="med" len="med"/>
+                        </a:lnR>
+                        <a:lnT w="6350" cap="flat" cmpd="sng" algn="ctr">
+                          <a:solidFill>
+                            <a:srgbClr val="D1D5DB"/>
+                          </a:solidFill>
+                          <a:prstDash val="solid"/>
+                          <a:round/>
+                          <a:headEnd type="none" w="med" len="med"/>
+                          <a:tailEnd type="none" w="med" len="med"/>
+                        </a:lnT>
+                        <a:lnB w="6350" cap="flat" cmpd="sng" algn="ctr">
+                          <a:solidFill>
+                            <a:srgbClr val="D1D5DB"/>
+                          </a:solidFill>
+                          <a:prstDash val="solid"/>
+                          <a:round/>
+                          <a:headEnd type="none" w="med" len="med"/>
+                          <a:tailEnd type="none" w="med" len="med"/>
+                        </a:lnB>
+                      </a:tcPr>
+                    </a:tc>
+                    <a:tc>
+                      <a:txBody>
+                        <a:bodyPr/>
+                        <a:lstStyle/>
+                        <a:p>
+                          <a:pPr marL="0" indent="0">
+                            <a:buNone/>
+                          </a:pPr>
+                          <a:r>
+                            <a:rPr lang="en-US" sz="1200" dirty="0">
+                              <a:solidFill>
+                                <a:srgbClr val="000000"/>
+                              </a:solidFill>
+                              <a:latin typeface="Arial" pitchFamily="34" charset="0"/>
+                              <a:ea typeface="Arial" pitchFamily="34" charset="-122"/>
+                              <a:cs typeface="Arial" pitchFamily="34" charset="-120"/>
+                            </a:rPr>
+                            <a:t>Process noise (motion uncertainty)</a:t>
+                          </a:r>
+                          <a:endParaRPr lang="en-US" sz="1200" dirty="0">
+                            <a:latin typeface="Arial" charset="0"/>
+                            <a:ea typeface="Arial" charset="0"/>
+                            <a:cs typeface="Arial" charset="0"/>
+                          </a:endParaRPr>
+                        </a:p>
+                      </a:txBody>
+                      <a:tcPr>
+                        <a:lnL w="6350" cap="flat" cmpd="sng" algn="ctr">
+                          <a:solidFill>
+                            <a:srgbClr val="D1D5DB"/>
+                          </a:solidFill>
+                          <a:prstDash val="solid"/>
+                          <a:round/>
+                          <a:headEnd type="none" w="med" len="med"/>
+                          <a:tailEnd type="none" w="med" len="med"/>
+                        </a:lnL>
+                        <a:lnR w="6350" cap="flat" cmpd="sng" algn="ctr">
+                          <a:solidFill>
+                            <a:srgbClr val="D1D5DB"/>
+                          </a:solidFill>
+                          <a:prstDash val="solid"/>
+                          <a:round/>
+                          <a:headEnd type="none" w="med" len="med"/>
+                          <a:tailEnd type="none" w="med" len="med"/>
+                        </a:lnR>
+                        <a:lnT w="6350" cap="flat" cmpd="sng" algn="ctr">
+                          <a:solidFill>
+                            <a:srgbClr val="D1D5DB"/>
+                          </a:solidFill>
+                          <a:prstDash val="solid"/>
+                          <a:round/>
+                          <a:headEnd type="none" w="med" len="med"/>
+                          <a:tailEnd type="none" w="med" len="med"/>
+                        </a:lnT>
+                        <a:lnB w="6350" cap="flat" cmpd="sng" algn="ctr">
+                          <a:solidFill>
+                            <a:srgbClr val="D1D5DB"/>
+                          </a:solidFill>
+                          <a:prstDash val="solid"/>
+                          <a:round/>
+                          <a:headEnd type="none" w="med" len="med"/>
+                          <a:tailEnd type="none" w="med" len="med"/>
+                        </a:lnB>
+                      </a:tcPr>
+                    </a:tc>
+                    <a:tc>
+                      <a:txBody>
+                        <a:bodyPr/>
+                        <a:lstStyle/>
+                        <a:p>
+                          <a:pPr marL="0" indent="0">
+                            <a:buNone/>
+                          </a:pPr>
+                          <a:r>
+                            <a:rPr lang="en-US" sz="1200" dirty="0">
+                              <a:solidFill>
+                                <a:srgbClr val="000000"/>
+                              </a:solidFill>
+                              <a:latin typeface="Arial" pitchFamily="34" charset="0"/>
+                              <a:ea typeface="Arial" pitchFamily="34" charset="-122"/>
+                              <a:cs typeface="Arial" pitchFamily="34" charset="-120"/>
+                            </a:rPr>
+                            <a:t>Wheel slip, motor noise</a:t>
+                          </a:r>
+                          <a:endParaRPr lang="en-US" sz="1200" dirty="0">
+                            <a:latin typeface="Arial" charset="0"/>
+                            <a:ea typeface="Arial" charset="0"/>
+                            <a:cs typeface="Arial" charset="0"/>
+                          </a:endParaRPr>
+                        </a:p>
+                      </a:txBody>
+                      <a:tcPr>
+                        <a:lnL w="6350" cap="flat" cmpd="sng" algn="ctr">
+                          <a:solidFill>
+                            <a:srgbClr val="D1D5DB"/>
+                          </a:solidFill>
+                          <a:prstDash val="solid"/>
+                          <a:round/>
+                          <a:headEnd type="none" w="med" len="med"/>
+                          <a:tailEnd type="none" w="med" len="med"/>
+                        </a:lnL>
+                        <a:lnR w="6350" cap="flat" cmpd="sng" algn="ctr">
+                          <a:solidFill>
+                            <a:srgbClr val="D1D5DB"/>
+                          </a:solidFill>
+                          <a:prstDash val="solid"/>
+                          <a:round/>
+                          <a:headEnd type="none" w="med" len="med"/>
+                          <a:tailEnd type="none" w="med" len="med"/>
+                        </a:lnR>
+                        <a:lnT w="6350" cap="flat" cmpd="sng" algn="ctr">
+                          <a:solidFill>
+                            <a:srgbClr val="D1D5DB"/>
+                          </a:solidFill>
+                          <a:prstDash val="solid"/>
+                          <a:round/>
+                          <a:headEnd type="none" w="med" len="med"/>
+                          <a:tailEnd type="none" w="med" len="med"/>
+                        </a:lnT>
+                        <a:lnB w="6350" cap="flat" cmpd="sng" algn="ctr">
+                          <a:solidFill>
+                            <a:srgbClr val="D1D5DB"/>
+                          </a:solidFill>
+                          <a:prstDash val="solid"/>
+                          <a:round/>
+                          <a:headEnd type="none" w="med" len="med"/>
+                          <a:tailEnd type="none" w="med" len="med"/>
+                        </a:lnB>
+                      </a:tcPr>
+                    </a:tc>
+                    <a:extLst>
+                      <a:ext uri="{0D108BD9-81ED-4DB2-BD59-A6C34878D82A}">
+                        <a16:rowId xmlns:a16="http://schemas.microsoft.com/office/drawing/2014/main" val="10004"/>
+                      </a:ext>
+                    </a:extLst>
+                  </a:tr>
+                  <a:tr h="272312">
+                    <a:tc>
+                      <a:txBody>
+                        <a:bodyPr/>
+                        <a:lstStyle/>
+                        <a:p>
+                          <a:pPr marL="0" indent="0">
+                            <a:buNone/>
+                          </a:pPr>
+                          <a:r>
+                            <a:rPr lang="en-US" sz="1200" dirty="0">
+                              <a:solidFill>
+                                <a:srgbClr val="000000"/>
+                              </a:solidFill>
+                              <a:latin typeface="Arial" pitchFamily="34" charset="0"/>
+                              <a:ea typeface="Arial" pitchFamily="34" charset="-122"/>
+                              <a:cs typeface="Arial" pitchFamily="34" charset="-120"/>
+                            </a:rPr>
+                            <a:t>R</a:t>
+                          </a:r>
+                          <a:endParaRPr lang="en-US" sz="1200" dirty="0">
+                            <a:latin typeface="Arial" charset="0"/>
+                            <a:ea typeface="Arial" charset="0"/>
+                            <a:cs typeface="Arial" charset="0"/>
+                          </a:endParaRPr>
+                        </a:p>
+                      </a:txBody>
+                      <a:tcPr>
+                        <a:lnL w="6350" cap="flat" cmpd="sng" algn="ctr">
+                          <a:solidFill>
+                            <a:srgbClr val="D1D5DB"/>
+                          </a:solidFill>
+                          <a:prstDash val="solid"/>
+                          <a:round/>
+                          <a:headEnd type="none" w="med" len="med"/>
+                          <a:tailEnd type="none" w="med" len="med"/>
+                        </a:lnL>
+                        <a:lnR w="6350" cap="flat" cmpd="sng" algn="ctr">
+                          <a:solidFill>
+                            <a:srgbClr val="D1D5DB"/>
+                          </a:solidFill>
+                          <a:prstDash val="solid"/>
+                          <a:round/>
+                          <a:headEnd type="none" w="med" len="med"/>
+                          <a:tailEnd type="none" w="med" len="med"/>
+                        </a:lnR>
+                        <a:lnT w="6350" cap="flat" cmpd="sng" algn="ctr">
+                          <a:solidFill>
+                            <a:srgbClr val="D1D5DB"/>
+                          </a:solidFill>
+                          <a:prstDash val="solid"/>
+                          <a:round/>
+                          <a:headEnd type="none" w="med" len="med"/>
+                          <a:tailEnd type="none" w="med" len="med"/>
+                        </a:lnT>
+                        <a:lnB w="6350" cap="flat" cmpd="sng" algn="ctr">
+                          <a:solidFill>
+                            <a:srgbClr val="D1D5DB"/>
+                          </a:solidFill>
+                          <a:prstDash val="solid"/>
+                          <a:round/>
+                          <a:headEnd type="none" w="med" len="med"/>
+                          <a:tailEnd type="none" w="med" len="med"/>
+                        </a:lnB>
+                      </a:tcPr>
+                    </a:tc>
+                    <a:tc>
+                      <a:txBody>
+                        <a:bodyPr/>
+                        <a:lstStyle/>
+                        <a:p>
+                          <a:pPr marL="0" indent="0">
+                            <a:buNone/>
+                          </a:pPr>
+                          <a:r>
+                            <a:rPr lang="en-US" sz="1200" dirty="0">
+                              <a:solidFill>
+                                <a:srgbClr val="000000"/>
+                              </a:solidFill>
+                              <a:latin typeface="Arial" pitchFamily="34" charset="0"/>
+                              <a:ea typeface="Arial" pitchFamily="34" charset="-122"/>
+                              <a:cs typeface="Arial" pitchFamily="34" charset="-120"/>
+                            </a:rPr>
+                            <a:t>k×k</a:t>
+                          </a:r>
+                          <a:endParaRPr lang="en-US" sz="1200" dirty="0">
+                            <a:latin typeface="Arial" charset="0"/>
+                            <a:ea typeface="Arial" charset="0"/>
+                            <a:cs typeface="Arial" charset="0"/>
+                          </a:endParaRPr>
+                        </a:p>
+                      </a:txBody>
+                      <a:tcPr>
+                        <a:lnL w="6350" cap="flat" cmpd="sng" algn="ctr">
+                          <a:solidFill>
+                            <a:srgbClr val="D1D5DB"/>
+                          </a:solidFill>
+                          <a:prstDash val="solid"/>
+                          <a:round/>
+                          <a:headEnd type="none" w="med" len="med"/>
+                          <a:tailEnd type="none" w="med" len="med"/>
+                        </a:lnL>
+                        <a:lnR w="6350" cap="flat" cmpd="sng" algn="ctr">
+                          <a:solidFill>
+                            <a:srgbClr val="D1D5DB"/>
+                          </a:solidFill>
+                          <a:prstDash val="solid"/>
+                          <a:round/>
+                          <a:headEnd type="none" w="med" len="med"/>
+                          <a:tailEnd type="none" w="med" len="med"/>
+                        </a:lnR>
+                        <a:lnT w="6350" cap="flat" cmpd="sng" algn="ctr">
+                          <a:solidFill>
+                            <a:srgbClr val="D1D5DB"/>
+                          </a:solidFill>
+                          <a:prstDash val="solid"/>
+                          <a:round/>
+                          <a:headEnd type="none" w="med" len="med"/>
+                          <a:tailEnd type="none" w="med" len="med"/>
+                        </a:lnT>
+                        <a:lnB w="6350" cap="flat" cmpd="sng" algn="ctr">
+                          <a:solidFill>
+                            <a:srgbClr val="D1D5DB"/>
+                          </a:solidFill>
+                          <a:prstDash val="solid"/>
+                          <a:round/>
+                          <a:headEnd type="none" w="med" len="med"/>
+                          <a:tailEnd type="none" w="med" len="med"/>
+                        </a:lnB>
+                      </a:tcPr>
+                    </a:tc>
+                    <a:tc>
+                      <a:txBody>
+                        <a:bodyPr/>
+                        <a:lstStyle/>
+                        <a:p>
+                          <a:pPr marL="0" indent="0">
+                            <a:buNone/>
+                          </a:pPr>
+                          <a:r>
+                            <a:rPr lang="en-US" sz="1200" dirty="0">
+                              <a:solidFill>
+                                <a:srgbClr val="000000"/>
+                              </a:solidFill>
+                              <a:latin typeface="Arial" pitchFamily="34" charset="0"/>
+                              <a:ea typeface="Arial" pitchFamily="34" charset="-122"/>
+                              <a:cs typeface="Arial" pitchFamily="34" charset="-120"/>
+                            </a:rPr>
+                            <a:t>Measurement noise (sensor uncertainty)</a:t>
+                          </a:r>
+                          <a:endParaRPr lang="en-US" sz="1200" dirty="0">
+                            <a:latin typeface="Arial" charset="0"/>
+                            <a:ea typeface="Arial" charset="0"/>
+                            <a:cs typeface="Arial" charset="0"/>
+                          </a:endParaRPr>
+                        </a:p>
+                      </a:txBody>
+                      <a:tcPr>
+                        <a:lnL w="6350" cap="flat" cmpd="sng" algn="ctr">
+                          <a:solidFill>
+                            <a:srgbClr val="D1D5DB"/>
+                          </a:solidFill>
+                          <a:prstDash val="solid"/>
+                          <a:round/>
+                          <a:headEnd type="none" w="med" len="med"/>
+                          <a:tailEnd type="none" w="med" len="med"/>
+                        </a:lnL>
+                        <a:lnR w="6350" cap="flat" cmpd="sng" algn="ctr">
+                          <a:solidFill>
+                            <a:srgbClr val="D1D5DB"/>
+                          </a:solidFill>
+                          <a:prstDash val="solid"/>
+                          <a:round/>
+                          <a:headEnd type="none" w="med" len="med"/>
+                          <a:tailEnd type="none" w="med" len="med"/>
+                        </a:lnR>
+                        <a:lnT w="6350" cap="flat" cmpd="sng" algn="ctr">
+                          <a:solidFill>
+                            <a:srgbClr val="D1D5DB"/>
+                          </a:solidFill>
+                          <a:prstDash val="solid"/>
+                          <a:round/>
+                          <a:headEnd type="none" w="med" len="med"/>
+                          <a:tailEnd type="none" w="med" len="med"/>
+                        </a:lnT>
+                        <a:lnB w="6350" cap="flat" cmpd="sng" algn="ctr">
+                          <a:solidFill>
+                            <a:srgbClr val="D1D5DB"/>
+                          </a:solidFill>
+                          <a:prstDash val="solid"/>
+                          <a:round/>
+                          <a:headEnd type="none" w="med" len="med"/>
+                          <a:tailEnd type="none" w="med" len="med"/>
+                        </a:lnB>
+                      </a:tcPr>
+                    </a:tc>
+                    <a:tc>
+                      <a:txBody>
+                        <a:bodyPr/>
+                        <a:lstStyle/>
+                        <a:p>
+                          <a:pPr marL="0" indent="0">
+                            <a:buNone/>
+                          </a:pPr>
+                          <a:r>
+                            <a:rPr lang="en-US" sz="1200" dirty="0">
+                              <a:solidFill>
+                                <a:srgbClr val="000000"/>
+                              </a:solidFill>
+                              <a:latin typeface="Arial" pitchFamily="34" charset="0"/>
+                              <a:ea typeface="Arial" pitchFamily="34" charset="-122"/>
+                              <a:cs typeface="Arial" pitchFamily="34" charset="-120"/>
+                            </a:rPr>
+                            <a:t>LiDAR noise </a:t>
+                          </a:r>
+                          <a14:m>
+                            <m:oMath xmlns:m="http://schemas.openxmlformats.org/officeDocument/2006/math">
+                              <m:sSub>
+                                <m:sSubPr>
+                                  <m:ctrlPr>
+                                    <a:rPr lang="en-US" sz="1200" i="1" dirty="0" smtClean="0">
+                                      <a:solidFill>
+                                        <a:srgbClr val="000000"/>
+                                      </a:solidFill>
+                                      <a:latin typeface="Cambria Math" panose="02040503050406030204" pitchFamily="18" charset="0"/>
+                                      <a:ea typeface="Arial" pitchFamily="34" charset="-122"/>
+                                      <a:cs typeface="Arial" pitchFamily="34" charset="-120"/>
+                                    </a:rPr>
+                                  </m:ctrlPr>
+                                </m:sSubPr>
+                                <m:e>
+                                  <m:r>
+                                    <a:rPr lang="en-US" sz="1200" i="1" dirty="0" smtClean="0">
+                                      <a:solidFill>
+                                        <a:srgbClr val="000000"/>
+                                      </a:solidFill>
+                                      <a:latin typeface="Cambria Math" panose="02040503050406030204" pitchFamily="18" charset="0"/>
+                                      <a:ea typeface="Arial" pitchFamily="34" charset="-122"/>
+                                      <a:cs typeface="Arial" pitchFamily="34" charset="-120"/>
+                                    </a:rPr>
+                                    <m:t>𝜎</m:t>
+                                  </m:r>
+                                </m:e>
+                                <m:sub>
+                                  <m:r>
+                                    <a:rPr lang="en-US" sz="1200" i="1" dirty="0" smtClean="0">
+                                      <a:solidFill>
+                                        <a:srgbClr val="000000"/>
+                                      </a:solidFill>
+                                      <a:latin typeface="Cambria Math" panose="02040503050406030204" pitchFamily="18" charset="0"/>
+                                      <a:ea typeface="Arial" pitchFamily="34" charset="-122"/>
+                                      <a:cs typeface="Arial" pitchFamily="34" charset="-120"/>
+                                    </a:rPr>
+                                    <m:t>𝑟</m:t>
+                                  </m:r>
+                                </m:sub>
+                              </m:sSub>
+                            </m:oMath>
+                          </a14:m>
+                          <a:r>
+                            <a:rPr lang="en-US" sz="1200" dirty="0">
+                              <a:solidFill>
+                                <a:srgbClr val="000000"/>
+                              </a:solidFill>
+                              <a:latin typeface="Arial" pitchFamily="34" charset="0"/>
+                              <a:ea typeface="Arial" pitchFamily="34" charset="-122"/>
+                              <a:cs typeface="Arial" pitchFamily="34" charset="-120"/>
+                            </a:rPr>
+                            <a:t>, GPS noise </a:t>
+                          </a:r>
+                          <a14:m>
+                            <m:oMath xmlns:m="http://schemas.openxmlformats.org/officeDocument/2006/math">
+                              <m:sSub>
+                                <m:sSubPr>
+                                  <m:ctrlPr>
+                                    <a:rPr lang="en-US" sz="1200" i="1" dirty="0" smtClean="0">
+                                      <a:solidFill>
+                                        <a:srgbClr val="000000"/>
+                                      </a:solidFill>
+                                      <a:latin typeface="Cambria Math" panose="02040503050406030204" pitchFamily="18" charset="0"/>
+                                      <a:ea typeface="Arial" pitchFamily="34" charset="-122"/>
+                                      <a:cs typeface="Arial" pitchFamily="34" charset="-120"/>
+                                    </a:rPr>
+                                  </m:ctrlPr>
+                                </m:sSubPr>
+                                <m:e>
+                                  <m:r>
+                                    <a:rPr lang="en-US" sz="1200" i="1" dirty="0" smtClean="0">
+                                      <a:solidFill>
+                                        <a:srgbClr val="000000"/>
+                                      </a:solidFill>
+                                      <a:latin typeface="Cambria Math" panose="02040503050406030204" pitchFamily="18" charset="0"/>
+                                      <a:ea typeface="Arial" pitchFamily="34" charset="-122"/>
+                                      <a:cs typeface="Arial" pitchFamily="34" charset="-120"/>
+                                    </a:rPr>
+                                    <m:t>𝜎</m:t>
+                                  </m:r>
+                                </m:e>
+                                <m:sub>
+                                  <m:r>
+                                    <a:rPr lang="en-US" sz="1200" i="1" dirty="0" smtClean="0">
+                                      <a:solidFill>
+                                        <a:srgbClr val="000000"/>
+                                      </a:solidFill>
+                                      <a:latin typeface="Cambria Math" panose="02040503050406030204" pitchFamily="18" charset="0"/>
+                                      <a:ea typeface="Arial" pitchFamily="34" charset="-122"/>
+                                      <a:cs typeface="Arial" pitchFamily="34" charset="-120"/>
+                                    </a:rPr>
+                                    <m:t>𝑔𝑝𝑠</m:t>
+                                  </m:r>
+                                </m:sub>
+                              </m:sSub>
+                            </m:oMath>
+                          </a14:m>
+                          <a:endParaRPr lang="en-US" sz="1200" dirty="0">
+                            <a:latin typeface="Arial" charset="0"/>
+                            <a:ea typeface="Arial" charset="0"/>
+                            <a:cs typeface="Arial" charset="0"/>
+                          </a:endParaRPr>
+                        </a:p>
+                      </a:txBody>
+                      <a:tcPr>
+                        <a:lnL w="6350" cap="flat" cmpd="sng" algn="ctr">
+                          <a:solidFill>
+                            <a:srgbClr val="D1D5DB"/>
+                          </a:solidFill>
+                          <a:prstDash val="solid"/>
+                          <a:round/>
+                          <a:headEnd type="none" w="med" len="med"/>
+                          <a:tailEnd type="none" w="med" len="med"/>
+                        </a:lnL>
+                        <a:lnR w="6350" cap="flat" cmpd="sng" algn="ctr">
+                          <a:solidFill>
+                            <a:srgbClr val="D1D5DB"/>
+                          </a:solidFill>
+                          <a:prstDash val="solid"/>
+                          <a:round/>
+                          <a:headEnd type="none" w="med" len="med"/>
+                          <a:tailEnd type="none" w="med" len="med"/>
+                        </a:lnR>
+                        <a:lnT w="6350" cap="flat" cmpd="sng" algn="ctr">
+                          <a:solidFill>
+                            <a:srgbClr val="D1D5DB"/>
+                          </a:solidFill>
+                          <a:prstDash val="solid"/>
+                          <a:round/>
+                          <a:headEnd type="none" w="med" len="med"/>
+                          <a:tailEnd type="none" w="med" len="med"/>
+                        </a:lnT>
+                        <a:lnB w="6350" cap="flat" cmpd="sng" algn="ctr">
+                          <a:solidFill>
+                            <a:srgbClr val="D1D5DB"/>
+                          </a:solidFill>
+                          <a:prstDash val="solid"/>
+                          <a:round/>
+                          <a:headEnd type="none" w="med" len="med"/>
+                          <a:tailEnd type="none" w="med" len="med"/>
+                        </a:lnB>
+                      </a:tcPr>
+                    </a:tc>
+                    <a:extLst>
+                      <a:ext uri="{0D108BD9-81ED-4DB2-BD59-A6C34878D82A}">
+                        <a16:rowId xmlns:a16="http://schemas.microsoft.com/office/drawing/2014/main" val="10005"/>
+                      </a:ext>
+                    </a:extLst>
+                  </a:tr>
+                </a:tbl>
+              </a:graphicData>
+            </a:graphic>
+          </p:graphicFrame>
+        </mc:Choice>
+        <mc:Fallback>
+          <p:graphicFrame>
+            <p:nvGraphicFramePr>
+              <p:cNvPr id="32" name="Table 0"/>
+              <p:cNvGraphicFramePr>
+                <a:graphicFrameLocks noGrp="1"/>
+              </p:cNvGraphicFramePr>
+              <p:nvPr>
+                <p:extLst>
+                  <p:ext uri="{D42A27DB-BD31-4B8C-83A1-F6EECF244321}">
+                    <p14:modId xmlns:p14="http://schemas.microsoft.com/office/powerpoint/2010/main" val="3580551478"/>
+                  </p:ext>
+                </p:extLst>
+              </p:nvPr>
+            </p:nvGraphicFramePr>
+            <p:xfrm>
+              <a:off x="269358" y="2468880"/>
+              <a:ext cx="8600322" cy="1660843"/>
+            </p:xfrm>
+            <a:graphic>
+              <a:graphicData uri="http://schemas.openxmlformats.org/drawingml/2006/table">
+                <a:tbl>
+                  <a:tblPr/>
+                  <a:tblGrid>
+                    <a:gridCol w="914928">
+                      <a:extLst>
+                        <a:ext uri="{9D8B030D-6E8A-4147-A177-3AD203B41FA5}">
+                          <a16:colId xmlns:a16="http://schemas.microsoft.com/office/drawing/2014/main" val="20000"/>
+                        </a:ext>
+                      </a:extLst>
+                    </a:gridCol>
+                    <a:gridCol w="914928">
+                      <a:extLst>
+                        <a:ext uri="{9D8B030D-6E8A-4147-A177-3AD203B41FA5}">
+                          <a16:colId xmlns:a16="http://schemas.microsoft.com/office/drawing/2014/main" val="20001"/>
+                        </a:ext>
+                      </a:extLst>
+                    </a:gridCol>
+                    <a:gridCol w="2927769">
+                      <a:extLst>
+                        <a:ext uri="{9D8B030D-6E8A-4147-A177-3AD203B41FA5}">
+                          <a16:colId xmlns:a16="http://schemas.microsoft.com/office/drawing/2014/main" val="20002"/>
+                        </a:ext>
+                      </a:extLst>
+                    </a:gridCol>
+                    <a:gridCol w="3842697">
+                      <a:extLst>
+                        <a:ext uri="{9D8B030D-6E8A-4147-A177-3AD203B41FA5}">
+                          <a16:colId xmlns:a16="http://schemas.microsoft.com/office/drawing/2014/main" val="20003"/>
+                        </a:ext>
+                      </a:extLst>
+                    </a:gridCol>
+                  </a:tblGrid>
+                  <a:tr h="274320">
+                    <a:tc>
+                      <a:txBody>
+                        <a:bodyPr/>
+                        <a:lstStyle/>
+                        <a:p>
+                          <a:pPr marL="0" indent="0">
+                            <a:buNone/>
+                          </a:pPr>
+                          <a:r>
+                            <a:rPr lang="en-US" sz="1200" b="1" dirty="0">
+                              <a:solidFill>
+                                <a:srgbClr val="FFFFFF"/>
+                              </a:solidFill>
+                              <a:latin typeface="Arial" pitchFamily="34" charset="0"/>
+                              <a:ea typeface="Arial" pitchFamily="34" charset="-122"/>
+                              <a:cs typeface="Arial" pitchFamily="34" charset="-120"/>
+                            </a:rPr>
+                            <a:t>Matrix</a:t>
+                          </a:r>
+                          <a:endParaRPr lang="en-US" sz="1200" dirty="0">
+                            <a:latin typeface="Arial" charset="0"/>
+                            <a:ea typeface="Arial" charset="0"/>
+                            <a:cs typeface="Arial" charset="0"/>
+                          </a:endParaRPr>
+                        </a:p>
+                      </a:txBody>
+                      <a:tcPr>
+                        <a:lnL w="6350" cap="flat" cmpd="sng" algn="ctr">
+                          <a:solidFill>
+                            <a:srgbClr val="D1D5DB"/>
+                          </a:solidFill>
+                          <a:prstDash val="solid"/>
+                          <a:round/>
+                          <a:headEnd type="none" w="med" len="med"/>
+                          <a:tailEnd type="none" w="med" len="med"/>
+                        </a:lnL>
+                        <a:lnR w="6350" cap="flat" cmpd="sng" algn="ctr">
+                          <a:solidFill>
+                            <a:srgbClr val="D1D5DB"/>
+                          </a:solidFill>
+                          <a:prstDash val="solid"/>
+                          <a:round/>
+                          <a:headEnd type="none" w="med" len="med"/>
+                          <a:tailEnd type="none" w="med" len="med"/>
+                        </a:lnR>
+                        <a:lnT w="6350" cap="flat" cmpd="sng" algn="ctr">
+                          <a:solidFill>
+                            <a:srgbClr val="D1D5DB"/>
+                          </a:solidFill>
+                          <a:prstDash val="solid"/>
+                          <a:round/>
+                          <a:headEnd type="none" w="med" len="med"/>
+                          <a:tailEnd type="none" w="med" len="med"/>
+                        </a:lnT>
+                        <a:lnB w="6350" cap="flat" cmpd="sng" algn="ctr">
+                          <a:solidFill>
+                            <a:srgbClr val="D1D5DB"/>
+                          </a:solidFill>
+                          <a:prstDash val="solid"/>
+                          <a:round/>
+                          <a:headEnd type="none" w="med" len="med"/>
+                          <a:tailEnd type="none" w="med" len="med"/>
+                        </a:lnB>
+                        <a:solidFill>
+                          <a:srgbClr val="0F4C81"/>
+                        </a:solidFill>
+                      </a:tcPr>
+                    </a:tc>
+                    <a:tc>
+                      <a:txBody>
+                        <a:bodyPr/>
+                        <a:lstStyle/>
+                        <a:p>
+                          <a:pPr marL="0" indent="0">
+                            <a:buNone/>
+                          </a:pPr>
+                          <a:r>
+                            <a:rPr lang="en-US" sz="1200" b="1" dirty="0">
+                              <a:solidFill>
+                                <a:srgbClr val="FFFFFF"/>
+                              </a:solidFill>
+                              <a:latin typeface="Arial" pitchFamily="34" charset="0"/>
+                              <a:ea typeface="Arial" pitchFamily="34" charset="-122"/>
+                              <a:cs typeface="Arial" pitchFamily="34" charset="-120"/>
+                            </a:rPr>
+                            <a:t>Size</a:t>
+                          </a:r>
+                          <a:endParaRPr lang="en-US" sz="1200" dirty="0">
+                            <a:latin typeface="Arial" charset="0"/>
+                            <a:ea typeface="Arial" charset="0"/>
+                            <a:cs typeface="Arial" charset="0"/>
+                          </a:endParaRPr>
+                        </a:p>
+                      </a:txBody>
+                      <a:tcPr>
+                        <a:lnL w="6350" cap="flat" cmpd="sng" algn="ctr">
+                          <a:solidFill>
+                            <a:srgbClr val="D1D5DB"/>
+                          </a:solidFill>
+                          <a:prstDash val="solid"/>
+                          <a:round/>
+                          <a:headEnd type="none" w="med" len="med"/>
+                          <a:tailEnd type="none" w="med" len="med"/>
+                        </a:lnL>
+                        <a:lnR w="6350" cap="flat" cmpd="sng" algn="ctr">
+                          <a:solidFill>
+                            <a:srgbClr val="D1D5DB"/>
+                          </a:solidFill>
+                          <a:prstDash val="solid"/>
+                          <a:round/>
+                          <a:headEnd type="none" w="med" len="med"/>
+                          <a:tailEnd type="none" w="med" len="med"/>
+                        </a:lnR>
+                        <a:lnT w="6350" cap="flat" cmpd="sng" algn="ctr">
+                          <a:solidFill>
+                            <a:srgbClr val="D1D5DB"/>
+                          </a:solidFill>
+                          <a:prstDash val="solid"/>
+                          <a:round/>
+                          <a:headEnd type="none" w="med" len="med"/>
+                          <a:tailEnd type="none" w="med" len="med"/>
+                        </a:lnT>
+                        <a:lnB w="6350" cap="flat" cmpd="sng" algn="ctr">
+                          <a:solidFill>
+                            <a:srgbClr val="D1D5DB"/>
+                          </a:solidFill>
+                          <a:prstDash val="solid"/>
+                          <a:round/>
+                          <a:headEnd type="none" w="med" len="med"/>
+                          <a:tailEnd type="none" w="med" len="med"/>
+                        </a:lnB>
+                        <a:solidFill>
+                          <a:srgbClr val="0F4C81"/>
+                        </a:solidFill>
+                      </a:tcPr>
+                    </a:tc>
+                    <a:tc>
+                      <a:txBody>
+                        <a:bodyPr/>
+                        <a:lstStyle/>
+                        <a:p>
+                          <a:pPr marL="0" indent="0">
+                            <a:buNone/>
+                          </a:pPr>
+                          <a:r>
+                            <a:rPr lang="en-US" sz="1200" b="1" dirty="0">
+                              <a:solidFill>
+                                <a:srgbClr val="FFFFFF"/>
+                              </a:solidFill>
+                              <a:latin typeface="Arial" pitchFamily="34" charset="0"/>
+                              <a:ea typeface="Arial" pitchFamily="34" charset="-122"/>
+                              <a:cs typeface="Arial" pitchFamily="34" charset="-120"/>
+                            </a:rPr>
+                            <a:t>Meaning</a:t>
+                          </a:r>
+                          <a:endParaRPr lang="en-US" sz="1200" dirty="0">
+                            <a:latin typeface="Arial" charset="0"/>
+                            <a:ea typeface="Arial" charset="0"/>
+                            <a:cs typeface="Arial" charset="0"/>
+                          </a:endParaRPr>
+                        </a:p>
+                      </a:txBody>
+                      <a:tcPr>
+                        <a:lnL w="6350" cap="flat" cmpd="sng" algn="ctr">
+                          <a:solidFill>
+                            <a:srgbClr val="D1D5DB"/>
+                          </a:solidFill>
+                          <a:prstDash val="solid"/>
+                          <a:round/>
+                          <a:headEnd type="none" w="med" len="med"/>
+                          <a:tailEnd type="none" w="med" len="med"/>
+                        </a:lnL>
+                        <a:lnR w="6350" cap="flat" cmpd="sng" algn="ctr">
+                          <a:solidFill>
+                            <a:srgbClr val="D1D5DB"/>
+                          </a:solidFill>
+                          <a:prstDash val="solid"/>
+                          <a:round/>
+                          <a:headEnd type="none" w="med" len="med"/>
+                          <a:tailEnd type="none" w="med" len="med"/>
+                        </a:lnR>
+                        <a:lnT w="6350" cap="flat" cmpd="sng" algn="ctr">
+                          <a:solidFill>
+                            <a:srgbClr val="D1D5DB"/>
+                          </a:solidFill>
+                          <a:prstDash val="solid"/>
+                          <a:round/>
+                          <a:headEnd type="none" w="med" len="med"/>
+                          <a:tailEnd type="none" w="med" len="med"/>
+                        </a:lnT>
+                        <a:lnB w="6350" cap="flat" cmpd="sng" algn="ctr">
+                          <a:solidFill>
+                            <a:srgbClr val="D1D5DB"/>
+                          </a:solidFill>
+                          <a:prstDash val="solid"/>
+                          <a:round/>
+                          <a:headEnd type="none" w="med" len="med"/>
+                          <a:tailEnd type="none" w="med" len="med"/>
+                        </a:lnB>
+                        <a:solidFill>
+                          <a:srgbClr val="0F4C81"/>
+                        </a:solidFill>
+                      </a:tcPr>
+                    </a:tc>
+                    <a:tc>
+                      <a:txBody>
+                        <a:bodyPr/>
+                        <a:lstStyle/>
+                        <a:p>
+                          <a:pPr marL="0" indent="0">
+                            <a:buNone/>
+                          </a:pPr>
+                          <a:r>
+                            <a:rPr lang="en-US" sz="1200" b="1" dirty="0">
+                              <a:solidFill>
+                                <a:srgbClr val="FFFFFF"/>
+                              </a:solidFill>
+                              <a:latin typeface="Arial" pitchFamily="34" charset="0"/>
+                              <a:ea typeface="Arial" pitchFamily="34" charset="-122"/>
+                              <a:cs typeface="Arial" pitchFamily="34" charset="-120"/>
+                            </a:rPr>
+                            <a:t>Robot Example</a:t>
+                          </a:r>
+                          <a:endParaRPr lang="en-US" sz="1200" dirty="0">
+                            <a:latin typeface="Arial" charset="0"/>
+                            <a:ea typeface="Arial" charset="0"/>
+                            <a:cs typeface="Arial" charset="0"/>
+                          </a:endParaRPr>
+                        </a:p>
+                      </a:txBody>
+                      <a:tcPr>
+                        <a:lnL w="6350" cap="flat" cmpd="sng" algn="ctr">
+                          <a:solidFill>
+                            <a:srgbClr val="D1D5DB"/>
+                          </a:solidFill>
+                          <a:prstDash val="solid"/>
+                          <a:round/>
+                          <a:headEnd type="none" w="med" len="med"/>
+                          <a:tailEnd type="none" w="med" len="med"/>
+                        </a:lnL>
+                        <a:lnR w="6350" cap="flat" cmpd="sng" algn="ctr">
+                          <a:solidFill>
+                            <a:srgbClr val="D1D5DB"/>
+                          </a:solidFill>
+                          <a:prstDash val="solid"/>
+                          <a:round/>
+                          <a:headEnd type="none" w="med" len="med"/>
+                          <a:tailEnd type="none" w="med" len="med"/>
+                        </a:lnR>
+                        <a:lnT w="6350" cap="flat" cmpd="sng" algn="ctr">
+                          <a:solidFill>
+                            <a:srgbClr val="D1D5DB"/>
+                          </a:solidFill>
+                          <a:prstDash val="solid"/>
+                          <a:round/>
+                          <a:headEnd type="none" w="med" len="med"/>
+                          <a:tailEnd type="none" w="med" len="med"/>
+                        </a:lnT>
+                        <a:lnB w="6350" cap="flat" cmpd="sng" algn="ctr">
+                          <a:solidFill>
+                            <a:srgbClr val="D1D5DB"/>
+                          </a:solidFill>
+                          <a:prstDash val="solid"/>
+                          <a:round/>
+                          <a:headEnd type="none" w="med" len="med"/>
+                          <a:tailEnd type="none" w="med" len="med"/>
+                        </a:lnB>
+                        <a:solidFill>
+                          <a:srgbClr val="0F4C81"/>
+                        </a:solidFill>
+                      </a:tcPr>
+                    </a:tc>
+                    <a:extLst>
+                      <a:ext uri="{0D108BD9-81ED-4DB2-BD59-A6C34878D82A}">
+                        <a16:rowId xmlns:a16="http://schemas.microsoft.com/office/drawing/2014/main" val="10000"/>
+                      </a:ext>
+                    </a:extLst>
+                  </a:tr>
+                  <a:tr h="274320">
+                    <a:tc>
+                      <a:txBody>
+                        <a:bodyPr/>
+                        <a:lstStyle/>
+                        <a:p>
+                          <a:pPr marL="0" indent="0">
+                            <a:buNone/>
+                          </a:pPr>
+                          <a:r>
+                            <a:rPr lang="en-US" sz="1200" dirty="0">
+                              <a:solidFill>
+                                <a:srgbClr val="000000"/>
+                              </a:solidFill>
+                              <a:latin typeface="Arial" pitchFamily="34" charset="0"/>
+                              <a:ea typeface="Arial" pitchFamily="34" charset="-122"/>
+                              <a:cs typeface="Arial" pitchFamily="34" charset="-120"/>
+                            </a:rPr>
+                            <a:t>A</a:t>
+                          </a:r>
+                          <a:endParaRPr lang="en-US" sz="1200" dirty="0">
+                            <a:latin typeface="Arial" charset="0"/>
+                            <a:ea typeface="Arial" charset="0"/>
+                            <a:cs typeface="Arial" charset="0"/>
+                          </a:endParaRPr>
+                        </a:p>
+                      </a:txBody>
+                      <a:tcPr>
+                        <a:lnL w="6350" cap="flat" cmpd="sng" algn="ctr">
+                          <a:solidFill>
+                            <a:srgbClr val="D1D5DB"/>
+                          </a:solidFill>
+                          <a:prstDash val="solid"/>
+                          <a:round/>
+                          <a:headEnd type="none" w="med" len="med"/>
+                          <a:tailEnd type="none" w="med" len="med"/>
+                        </a:lnL>
+                        <a:lnR w="6350" cap="flat" cmpd="sng" algn="ctr">
+                          <a:solidFill>
+                            <a:srgbClr val="D1D5DB"/>
+                          </a:solidFill>
+                          <a:prstDash val="solid"/>
+                          <a:round/>
+                          <a:headEnd type="none" w="med" len="med"/>
+                          <a:tailEnd type="none" w="med" len="med"/>
+                        </a:lnR>
+                        <a:lnT w="6350" cap="flat" cmpd="sng" algn="ctr">
+                          <a:solidFill>
+                            <a:srgbClr val="D1D5DB"/>
+                          </a:solidFill>
+                          <a:prstDash val="solid"/>
+                          <a:round/>
+                          <a:headEnd type="none" w="med" len="med"/>
+                          <a:tailEnd type="none" w="med" len="med"/>
+                        </a:lnT>
+                        <a:lnB w="6350" cap="flat" cmpd="sng" algn="ctr">
+                          <a:solidFill>
+                            <a:srgbClr val="D1D5DB"/>
+                          </a:solidFill>
+                          <a:prstDash val="solid"/>
+                          <a:round/>
+                          <a:headEnd type="none" w="med" len="med"/>
+                          <a:tailEnd type="none" w="med" len="med"/>
+                        </a:lnB>
+                      </a:tcPr>
+                    </a:tc>
+                    <a:tc>
+                      <a:txBody>
+                        <a:bodyPr/>
+                        <a:lstStyle/>
+                        <a:p>
+                          <a:pPr marL="0" indent="0">
+                            <a:buNone/>
+                          </a:pPr>
+                          <a:r>
+                            <a:rPr lang="en-US" sz="1200" dirty="0">
+                              <a:solidFill>
+                                <a:srgbClr val="000000"/>
+                              </a:solidFill>
+                              <a:latin typeface="Arial" pitchFamily="34" charset="0"/>
+                              <a:ea typeface="Arial" pitchFamily="34" charset="-122"/>
+                              <a:cs typeface="Arial" pitchFamily="34" charset="-120"/>
+                            </a:rPr>
+                            <a:t>n×n</a:t>
+                          </a:r>
+                          <a:endParaRPr lang="en-US" sz="1200" dirty="0">
+                            <a:latin typeface="Arial" charset="0"/>
+                            <a:ea typeface="Arial" charset="0"/>
+                            <a:cs typeface="Arial" charset="0"/>
+                          </a:endParaRPr>
+                        </a:p>
+                      </a:txBody>
+                      <a:tcPr>
+                        <a:lnL w="6350" cap="flat" cmpd="sng" algn="ctr">
+                          <a:solidFill>
+                            <a:srgbClr val="D1D5DB"/>
+                          </a:solidFill>
+                          <a:prstDash val="solid"/>
+                          <a:round/>
+                          <a:headEnd type="none" w="med" len="med"/>
+                          <a:tailEnd type="none" w="med" len="med"/>
+                        </a:lnL>
+                        <a:lnR w="6350" cap="flat" cmpd="sng" algn="ctr">
+                          <a:solidFill>
+                            <a:srgbClr val="D1D5DB"/>
+                          </a:solidFill>
+                          <a:prstDash val="solid"/>
+                          <a:round/>
+                          <a:headEnd type="none" w="med" len="med"/>
+                          <a:tailEnd type="none" w="med" len="med"/>
+                        </a:lnR>
+                        <a:lnT w="6350" cap="flat" cmpd="sng" algn="ctr">
+                          <a:solidFill>
+                            <a:srgbClr val="D1D5DB"/>
+                          </a:solidFill>
+                          <a:prstDash val="solid"/>
+                          <a:round/>
+                          <a:headEnd type="none" w="med" len="med"/>
+                          <a:tailEnd type="none" w="med" len="med"/>
+                        </a:lnT>
+                        <a:lnB w="6350" cap="flat" cmpd="sng" algn="ctr">
+                          <a:solidFill>
+                            <a:srgbClr val="D1D5DB"/>
+                          </a:solidFill>
+                          <a:prstDash val="solid"/>
+                          <a:round/>
+                          <a:headEnd type="none" w="med" len="med"/>
+                          <a:tailEnd type="none" w="med" len="med"/>
+                        </a:lnB>
+                      </a:tcPr>
+                    </a:tc>
+                    <a:tc>
+                      <a:txBody>
+                        <a:bodyPr/>
+                        <a:lstStyle/>
+                        <a:p>
+                          <a:pPr marL="0" indent="0">
+                            <a:buNone/>
+                          </a:pPr>
+                          <a:r>
+                            <a:rPr lang="en-US" sz="1200" dirty="0">
+                              <a:solidFill>
+                                <a:srgbClr val="000000"/>
+                              </a:solidFill>
+                              <a:latin typeface="Arial" pitchFamily="34" charset="0"/>
+                              <a:ea typeface="Arial" pitchFamily="34" charset="-122"/>
+                              <a:cs typeface="Arial" pitchFamily="34" charset="-120"/>
+                            </a:rPr>
+                            <a:t>How state evolves in one step</a:t>
+                          </a:r>
+                          <a:endParaRPr lang="en-US" sz="1200" dirty="0">
+                            <a:latin typeface="Arial" charset="0"/>
+                            <a:ea typeface="Arial" charset="0"/>
+                            <a:cs typeface="Arial" charset="0"/>
+                          </a:endParaRPr>
+                        </a:p>
+                      </a:txBody>
+                      <a:tcPr>
+                        <a:lnL w="6350" cap="flat" cmpd="sng" algn="ctr">
+                          <a:solidFill>
+                            <a:srgbClr val="D1D5DB"/>
+                          </a:solidFill>
+                          <a:prstDash val="solid"/>
+                          <a:round/>
+                          <a:headEnd type="none" w="med" len="med"/>
+                          <a:tailEnd type="none" w="med" len="med"/>
+                        </a:lnL>
+                        <a:lnR w="6350" cap="flat" cmpd="sng" algn="ctr">
+                          <a:solidFill>
+                            <a:srgbClr val="D1D5DB"/>
+                          </a:solidFill>
+                          <a:prstDash val="solid"/>
+                          <a:round/>
+                          <a:headEnd type="none" w="med" len="med"/>
+                          <a:tailEnd type="none" w="med" len="med"/>
+                        </a:lnR>
+                        <a:lnT w="6350" cap="flat" cmpd="sng" algn="ctr">
+                          <a:solidFill>
+                            <a:srgbClr val="D1D5DB"/>
+                          </a:solidFill>
+                          <a:prstDash val="solid"/>
+                          <a:round/>
+                          <a:headEnd type="none" w="med" len="med"/>
+                          <a:tailEnd type="none" w="med" len="med"/>
+                        </a:lnT>
+                        <a:lnB w="6350" cap="flat" cmpd="sng" algn="ctr">
+                          <a:solidFill>
+                            <a:srgbClr val="D1D5DB"/>
+                          </a:solidFill>
+                          <a:prstDash val="solid"/>
+                          <a:round/>
+                          <a:headEnd type="none" w="med" len="med"/>
+                          <a:tailEnd type="none" w="med" len="med"/>
+                        </a:lnB>
+                      </a:tcPr>
+                    </a:tc>
+                    <a:tc>
+                      <a:txBody>
+                        <a:bodyPr/>
+                        <a:lstStyle/>
+                        <a:p>
+                          <a:pPr marL="0" indent="0">
+                            <a:buNone/>
+                          </a:pPr>
+                          <a:r>
+                            <a:rPr lang="en-US" sz="1200" dirty="0">
+                              <a:solidFill>
+                                <a:srgbClr val="000000"/>
+                              </a:solidFill>
+                              <a:latin typeface="Arial" pitchFamily="34" charset="0"/>
+                              <a:ea typeface="Arial" pitchFamily="34" charset="-122"/>
+                              <a:cs typeface="Arial" pitchFamily="34" charset="-120"/>
+                            </a:rPr>
+                            <a:t>Position update from velocity</a:t>
+                          </a:r>
+                          <a:endParaRPr lang="en-US" sz="1200" dirty="0">
+                            <a:latin typeface="Arial" charset="0"/>
+                            <a:ea typeface="Arial" charset="0"/>
+                            <a:cs typeface="Arial" charset="0"/>
+                          </a:endParaRPr>
+                        </a:p>
+                      </a:txBody>
+                      <a:tcPr>
+                        <a:lnL w="6350" cap="flat" cmpd="sng" algn="ctr">
+                          <a:solidFill>
+                            <a:srgbClr val="D1D5DB"/>
+                          </a:solidFill>
+                          <a:prstDash val="solid"/>
+                          <a:round/>
+                          <a:headEnd type="none" w="med" len="med"/>
+                          <a:tailEnd type="none" w="med" len="med"/>
+                        </a:lnL>
+                        <a:lnR w="6350" cap="flat" cmpd="sng" algn="ctr">
+                          <a:solidFill>
+                            <a:srgbClr val="D1D5DB"/>
+                          </a:solidFill>
+                          <a:prstDash val="solid"/>
+                          <a:round/>
+                          <a:headEnd type="none" w="med" len="med"/>
+                          <a:tailEnd type="none" w="med" len="med"/>
+                        </a:lnR>
+                        <a:lnT w="6350" cap="flat" cmpd="sng" algn="ctr">
+                          <a:solidFill>
+                            <a:srgbClr val="D1D5DB"/>
+                          </a:solidFill>
+                          <a:prstDash val="solid"/>
+                          <a:round/>
+                          <a:headEnd type="none" w="med" len="med"/>
+                          <a:tailEnd type="none" w="med" len="med"/>
+                        </a:lnT>
+                        <a:lnB w="6350" cap="flat" cmpd="sng" algn="ctr">
+                          <a:solidFill>
+                            <a:srgbClr val="D1D5DB"/>
+                          </a:solidFill>
+                          <a:prstDash val="solid"/>
+                          <a:round/>
+                          <a:headEnd type="none" w="med" len="med"/>
+                          <a:tailEnd type="none" w="med" len="med"/>
+                        </a:lnB>
+                      </a:tcPr>
+                    </a:tc>
+                    <a:extLst>
+                      <a:ext uri="{0D108BD9-81ED-4DB2-BD59-A6C34878D82A}">
+                        <a16:rowId xmlns:a16="http://schemas.microsoft.com/office/drawing/2014/main" val="10001"/>
+                      </a:ext>
+                    </a:extLst>
+                  </a:tr>
+                  <a:tr h="274320">
+                    <a:tc>
+                      <a:txBody>
+                        <a:bodyPr/>
+                        <a:lstStyle/>
+                        <a:p>
+                          <a:pPr marL="0" indent="0">
+                            <a:buNone/>
+                          </a:pPr>
+                          <a:r>
+                            <a:rPr lang="en-US" sz="1200" dirty="0">
+                              <a:solidFill>
+                                <a:srgbClr val="000000"/>
+                              </a:solidFill>
+                              <a:latin typeface="Arial" pitchFamily="34" charset="0"/>
+                              <a:ea typeface="Arial" pitchFamily="34" charset="-122"/>
+                              <a:cs typeface="Arial" pitchFamily="34" charset="-120"/>
+                            </a:rPr>
+                            <a:t>B</a:t>
+                          </a:r>
+                          <a:endParaRPr lang="en-US" sz="1200" dirty="0">
+                            <a:latin typeface="Arial" charset="0"/>
+                            <a:ea typeface="Arial" charset="0"/>
+                            <a:cs typeface="Arial" charset="0"/>
+                          </a:endParaRPr>
+                        </a:p>
+                      </a:txBody>
+                      <a:tcPr>
+                        <a:lnL w="6350" cap="flat" cmpd="sng" algn="ctr">
+                          <a:solidFill>
+                            <a:srgbClr val="D1D5DB"/>
+                          </a:solidFill>
+                          <a:prstDash val="solid"/>
+                          <a:round/>
+                          <a:headEnd type="none" w="med" len="med"/>
+                          <a:tailEnd type="none" w="med" len="med"/>
+                        </a:lnL>
+                        <a:lnR w="6350" cap="flat" cmpd="sng" algn="ctr">
+                          <a:solidFill>
+                            <a:srgbClr val="D1D5DB"/>
+                          </a:solidFill>
+                          <a:prstDash val="solid"/>
+                          <a:round/>
+                          <a:headEnd type="none" w="med" len="med"/>
+                          <a:tailEnd type="none" w="med" len="med"/>
+                        </a:lnR>
+                        <a:lnT w="6350" cap="flat" cmpd="sng" algn="ctr">
+                          <a:solidFill>
+                            <a:srgbClr val="D1D5DB"/>
+                          </a:solidFill>
+                          <a:prstDash val="solid"/>
+                          <a:round/>
+                          <a:headEnd type="none" w="med" len="med"/>
+                          <a:tailEnd type="none" w="med" len="med"/>
+                        </a:lnT>
+                        <a:lnB w="6350" cap="flat" cmpd="sng" algn="ctr">
+                          <a:solidFill>
+                            <a:srgbClr val="D1D5DB"/>
+                          </a:solidFill>
+                          <a:prstDash val="solid"/>
+                          <a:round/>
+                          <a:headEnd type="none" w="med" len="med"/>
+                          <a:tailEnd type="none" w="med" len="med"/>
+                        </a:lnB>
+                      </a:tcPr>
+                    </a:tc>
+                    <a:tc>
+                      <a:txBody>
+                        <a:bodyPr/>
+                        <a:lstStyle/>
+                        <a:p>
+                          <a:pPr marL="0" indent="0">
+                            <a:buNone/>
+                          </a:pPr>
+                          <a:r>
+                            <a:rPr lang="en-US" sz="1200" dirty="0">
+                              <a:solidFill>
+                                <a:srgbClr val="000000"/>
+                              </a:solidFill>
+                              <a:latin typeface="Arial" pitchFamily="34" charset="0"/>
+                              <a:ea typeface="Arial" pitchFamily="34" charset="-122"/>
+                              <a:cs typeface="Arial" pitchFamily="34" charset="-120"/>
+                            </a:rPr>
+                            <a:t>n×m</a:t>
+                          </a:r>
+                          <a:endParaRPr lang="en-US" sz="1200" dirty="0">
+                            <a:latin typeface="Arial" charset="0"/>
+                            <a:ea typeface="Arial" charset="0"/>
+                            <a:cs typeface="Arial" charset="0"/>
+                          </a:endParaRPr>
+                        </a:p>
+                      </a:txBody>
+                      <a:tcPr>
+                        <a:lnL w="6350" cap="flat" cmpd="sng" algn="ctr">
+                          <a:solidFill>
+                            <a:srgbClr val="D1D5DB"/>
+                          </a:solidFill>
+                          <a:prstDash val="solid"/>
+                          <a:round/>
+                          <a:headEnd type="none" w="med" len="med"/>
+                          <a:tailEnd type="none" w="med" len="med"/>
+                        </a:lnL>
+                        <a:lnR w="6350" cap="flat" cmpd="sng" algn="ctr">
+                          <a:solidFill>
+                            <a:srgbClr val="D1D5DB"/>
+                          </a:solidFill>
+                          <a:prstDash val="solid"/>
+                          <a:round/>
+                          <a:headEnd type="none" w="med" len="med"/>
+                          <a:tailEnd type="none" w="med" len="med"/>
+                        </a:lnR>
+                        <a:lnT w="6350" cap="flat" cmpd="sng" algn="ctr">
+                          <a:solidFill>
+                            <a:srgbClr val="D1D5DB"/>
+                          </a:solidFill>
+                          <a:prstDash val="solid"/>
+                          <a:round/>
+                          <a:headEnd type="none" w="med" len="med"/>
+                          <a:tailEnd type="none" w="med" len="med"/>
+                        </a:lnT>
+                        <a:lnB w="6350" cap="flat" cmpd="sng" algn="ctr">
+                          <a:solidFill>
+                            <a:srgbClr val="D1D5DB"/>
+                          </a:solidFill>
+                          <a:prstDash val="solid"/>
+                          <a:round/>
+                          <a:headEnd type="none" w="med" len="med"/>
+                          <a:tailEnd type="none" w="med" len="med"/>
+                        </a:lnB>
+                      </a:tcPr>
+                    </a:tc>
+                    <a:tc>
+                      <a:txBody>
+                        <a:bodyPr/>
+                        <a:lstStyle/>
+                        <a:p>
+                          <a:pPr marL="0" indent="0">
+                            <a:buNone/>
+                          </a:pPr>
+                          <a:r>
+                            <a:rPr lang="en-US" sz="1200" dirty="0">
+                              <a:solidFill>
+                                <a:srgbClr val="000000"/>
+                              </a:solidFill>
+                              <a:latin typeface="Arial" pitchFamily="34" charset="0"/>
+                              <a:ea typeface="Arial" pitchFamily="34" charset="-122"/>
+                              <a:cs typeface="Arial" pitchFamily="34" charset="-120"/>
+                            </a:rPr>
+                            <a:t>How control affects state</a:t>
+                          </a:r>
+                          <a:endParaRPr lang="en-US" sz="1200" dirty="0">
+                            <a:latin typeface="Arial" charset="0"/>
+                            <a:ea typeface="Arial" charset="0"/>
+                            <a:cs typeface="Arial" charset="0"/>
+                          </a:endParaRPr>
+                        </a:p>
+                      </a:txBody>
+                      <a:tcPr>
+                        <a:lnL w="6350" cap="flat" cmpd="sng" algn="ctr">
+                          <a:solidFill>
+                            <a:srgbClr val="D1D5DB"/>
+                          </a:solidFill>
+                          <a:prstDash val="solid"/>
+                          <a:round/>
+                          <a:headEnd type="none" w="med" len="med"/>
+                          <a:tailEnd type="none" w="med" len="med"/>
+                        </a:lnL>
+                        <a:lnR w="6350" cap="flat" cmpd="sng" algn="ctr">
+                          <a:solidFill>
+                            <a:srgbClr val="D1D5DB"/>
+                          </a:solidFill>
+                          <a:prstDash val="solid"/>
+                          <a:round/>
+                          <a:headEnd type="none" w="med" len="med"/>
+                          <a:tailEnd type="none" w="med" len="med"/>
+                        </a:lnR>
+                        <a:lnT w="6350" cap="flat" cmpd="sng" algn="ctr">
+                          <a:solidFill>
+                            <a:srgbClr val="D1D5DB"/>
+                          </a:solidFill>
+                          <a:prstDash val="solid"/>
+                          <a:round/>
+                          <a:headEnd type="none" w="med" len="med"/>
+                          <a:tailEnd type="none" w="med" len="med"/>
+                        </a:lnT>
+                        <a:lnB w="6350" cap="flat" cmpd="sng" algn="ctr">
+                          <a:solidFill>
+                            <a:srgbClr val="D1D5DB"/>
+                          </a:solidFill>
+                          <a:prstDash val="solid"/>
+                          <a:round/>
+                          <a:headEnd type="none" w="med" len="med"/>
+                          <a:tailEnd type="none" w="med" len="med"/>
+                        </a:lnB>
+                      </a:tcPr>
+                    </a:tc>
+                    <a:tc>
+                      <a:txBody>
+                        <a:bodyPr/>
+                        <a:lstStyle/>
+                        <a:p>
+                          <a:pPr marL="0" indent="0">
+                            <a:buNone/>
+                          </a:pPr>
+                          <a:r>
+                            <a:rPr lang="en-US" sz="1200" dirty="0">
+                              <a:solidFill>
+                                <a:srgbClr val="000000"/>
+                              </a:solidFill>
+                              <a:latin typeface="Arial" pitchFamily="34" charset="0"/>
+                              <a:ea typeface="Arial" pitchFamily="34" charset="-122"/>
+                              <a:cs typeface="Arial" pitchFamily="34" charset="-120"/>
+                            </a:rPr>
+                            <a:t>Steering command → position change</a:t>
+                          </a:r>
+                          <a:endParaRPr lang="en-US" sz="1200" dirty="0">
+                            <a:latin typeface="Arial" charset="0"/>
+                            <a:ea typeface="Arial" charset="0"/>
+                            <a:cs typeface="Arial" charset="0"/>
+                          </a:endParaRPr>
+                        </a:p>
+                      </a:txBody>
+                      <a:tcPr>
+                        <a:lnL w="6350" cap="flat" cmpd="sng" algn="ctr">
+                          <a:solidFill>
+                            <a:srgbClr val="D1D5DB"/>
+                          </a:solidFill>
+                          <a:prstDash val="solid"/>
+                          <a:round/>
+                          <a:headEnd type="none" w="med" len="med"/>
+                          <a:tailEnd type="none" w="med" len="med"/>
+                        </a:lnL>
+                        <a:lnR w="6350" cap="flat" cmpd="sng" algn="ctr">
+                          <a:solidFill>
+                            <a:srgbClr val="D1D5DB"/>
+                          </a:solidFill>
+                          <a:prstDash val="solid"/>
+                          <a:round/>
+                          <a:headEnd type="none" w="med" len="med"/>
+                          <a:tailEnd type="none" w="med" len="med"/>
+                        </a:lnR>
+                        <a:lnT w="6350" cap="flat" cmpd="sng" algn="ctr">
+                          <a:solidFill>
+                            <a:srgbClr val="D1D5DB"/>
+                          </a:solidFill>
+                          <a:prstDash val="solid"/>
+                          <a:round/>
+                          <a:headEnd type="none" w="med" len="med"/>
+                          <a:tailEnd type="none" w="med" len="med"/>
+                        </a:lnT>
+                        <a:lnB w="6350" cap="flat" cmpd="sng" algn="ctr">
+                          <a:solidFill>
+                            <a:srgbClr val="D1D5DB"/>
+                          </a:solidFill>
+                          <a:prstDash val="solid"/>
+                          <a:round/>
+                          <a:headEnd type="none" w="med" len="med"/>
+                          <a:tailEnd type="none" w="med" len="med"/>
+                        </a:lnB>
+                      </a:tcPr>
+                    </a:tc>
+                    <a:extLst>
+                      <a:ext uri="{0D108BD9-81ED-4DB2-BD59-A6C34878D82A}">
+                        <a16:rowId xmlns:a16="http://schemas.microsoft.com/office/drawing/2014/main" val="10002"/>
+                      </a:ext>
+                    </a:extLst>
+                  </a:tr>
+                  <a:tr h="274320">
+                    <a:tc>
+                      <a:txBody>
+                        <a:bodyPr/>
+                        <a:lstStyle/>
+                        <a:p>
+                          <a:pPr marL="0" indent="0">
+                            <a:buNone/>
+                          </a:pPr>
+                          <a:r>
+                            <a:rPr lang="en-US" sz="1200" dirty="0">
+                              <a:solidFill>
+                                <a:srgbClr val="000000"/>
+                              </a:solidFill>
+                              <a:latin typeface="Arial" pitchFamily="34" charset="0"/>
+                              <a:ea typeface="Arial" pitchFamily="34" charset="-122"/>
+                              <a:cs typeface="Arial" pitchFamily="34" charset="-120"/>
+                            </a:rPr>
+                            <a:t>H</a:t>
+                          </a:r>
+                          <a:endParaRPr lang="en-US" sz="1200" dirty="0">
+                            <a:latin typeface="Arial" charset="0"/>
+                            <a:ea typeface="Arial" charset="0"/>
+                            <a:cs typeface="Arial" charset="0"/>
+                          </a:endParaRPr>
+                        </a:p>
+                      </a:txBody>
+                      <a:tcPr>
+                        <a:lnL w="6350" cap="flat" cmpd="sng" algn="ctr">
+                          <a:solidFill>
+                            <a:srgbClr val="D1D5DB"/>
+                          </a:solidFill>
+                          <a:prstDash val="solid"/>
+                          <a:round/>
+                          <a:headEnd type="none" w="med" len="med"/>
+                          <a:tailEnd type="none" w="med" len="med"/>
+                        </a:lnL>
+                        <a:lnR w="6350" cap="flat" cmpd="sng" algn="ctr">
+                          <a:solidFill>
+                            <a:srgbClr val="D1D5DB"/>
+                          </a:solidFill>
+                          <a:prstDash val="solid"/>
+                          <a:round/>
+                          <a:headEnd type="none" w="med" len="med"/>
+                          <a:tailEnd type="none" w="med" len="med"/>
+                        </a:lnR>
+                        <a:lnT w="6350" cap="flat" cmpd="sng" algn="ctr">
+                          <a:solidFill>
+                            <a:srgbClr val="D1D5DB"/>
+                          </a:solidFill>
+                          <a:prstDash val="solid"/>
+                          <a:round/>
+                          <a:headEnd type="none" w="med" len="med"/>
+                          <a:tailEnd type="none" w="med" len="med"/>
+                        </a:lnT>
+                        <a:lnB w="6350" cap="flat" cmpd="sng" algn="ctr">
+                          <a:solidFill>
+                            <a:srgbClr val="D1D5DB"/>
+                          </a:solidFill>
+                          <a:prstDash val="solid"/>
+                          <a:round/>
+                          <a:headEnd type="none" w="med" len="med"/>
+                          <a:tailEnd type="none" w="med" len="med"/>
+                        </a:lnB>
+                      </a:tcPr>
+                    </a:tc>
+                    <a:tc>
+                      <a:txBody>
+                        <a:bodyPr/>
+                        <a:lstStyle/>
+                        <a:p>
+                          <a:pPr marL="0" indent="0">
+                            <a:buNone/>
+                          </a:pPr>
+                          <a:r>
+                            <a:rPr lang="en-US" sz="1200" dirty="0">
+                              <a:solidFill>
+                                <a:srgbClr val="000000"/>
+                              </a:solidFill>
+                              <a:latin typeface="Arial" pitchFamily="34" charset="0"/>
+                              <a:ea typeface="Arial" pitchFamily="34" charset="-122"/>
+                              <a:cs typeface="Arial" pitchFamily="34" charset="-120"/>
+                            </a:rPr>
+                            <a:t>k×n</a:t>
+                          </a:r>
+                          <a:endParaRPr lang="en-US" sz="1200" dirty="0">
+                            <a:latin typeface="Arial" charset="0"/>
+                            <a:ea typeface="Arial" charset="0"/>
+                            <a:cs typeface="Arial" charset="0"/>
+                          </a:endParaRPr>
+                        </a:p>
+                      </a:txBody>
+                      <a:tcPr>
+                        <a:lnL w="6350" cap="flat" cmpd="sng" algn="ctr">
+                          <a:solidFill>
+                            <a:srgbClr val="D1D5DB"/>
+                          </a:solidFill>
+                          <a:prstDash val="solid"/>
+                          <a:round/>
+                          <a:headEnd type="none" w="med" len="med"/>
+                          <a:tailEnd type="none" w="med" len="med"/>
+                        </a:lnL>
+                        <a:lnR w="6350" cap="flat" cmpd="sng" algn="ctr">
+                          <a:solidFill>
+                            <a:srgbClr val="D1D5DB"/>
+                          </a:solidFill>
+                          <a:prstDash val="solid"/>
+                          <a:round/>
+                          <a:headEnd type="none" w="med" len="med"/>
+                          <a:tailEnd type="none" w="med" len="med"/>
+                        </a:lnR>
+                        <a:lnT w="6350" cap="flat" cmpd="sng" algn="ctr">
+                          <a:solidFill>
+                            <a:srgbClr val="D1D5DB"/>
+                          </a:solidFill>
+                          <a:prstDash val="solid"/>
+                          <a:round/>
+                          <a:headEnd type="none" w="med" len="med"/>
+                          <a:tailEnd type="none" w="med" len="med"/>
+                        </a:lnT>
+                        <a:lnB w="6350" cap="flat" cmpd="sng" algn="ctr">
+                          <a:solidFill>
+                            <a:srgbClr val="D1D5DB"/>
+                          </a:solidFill>
+                          <a:prstDash val="solid"/>
+                          <a:round/>
+                          <a:headEnd type="none" w="med" len="med"/>
+                          <a:tailEnd type="none" w="med" len="med"/>
+                        </a:lnB>
+                      </a:tcPr>
+                    </a:tc>
+                    <a:tc>
+                      <a:txBody>
+                        <a:bodyPr/>
+                        <a:lstStyle/>
+                        <a:p>
+                          <a:pPr marL="0" indent="0">
+                            <a:buNone/>
+                          </a:pPr>
+                          <a:r>
+                            <a:rPr lang="en-US" sz="1200" dirty="0">
+                              <a:solidFill>
+                                <a:srgbClr val="000000"/>
+                              </a:solidFill>
+                              <a:latin typeface="Arial" pitchFamily="34" charset="0"/>
+                              <a:ea typeface="Arial" pitchFamily="34" charset="-122"/>
+                              <a:cs typeface="Arial" pitchFamily="34" charset="-120"/>
+                            </a:rPr>
+                            <a:t>What sensor measures from state</a:t>
+                          </a:r>
+                          <a:endParaRPr lang="en-US" sz="1200" dirty="0">
+                            <a:latin typeface="Arial" charset="0"/>
+                            <a:ea typeface="Arial" charset="0"/>
+                            <a:cs typeface="Arial" charset="0"/>
+                          </a:endParaRPr>
+                        </a:p>
+                      </a:txBody>
+                      <a:tcPr>
+                        <a:lnL w="6350" cap="flat" cmpd="sng" algn="ctr">
+                          <a:solidFill>
+                            <a:srgbClr val="D1D5DB"/>
+                          </a:solidFill>
+                          <a:prstDash val="solid"/>
+                          <a:round/>
+                          <a:headEnd type="none" w="med" len="med"/>
+                          <a:tailEnd type="none" w="med" len="med"/>
+                        </a:lnL>
+                        <a:lnR w="6350" cap="flat" cmpd="sng" algn="ctr">
+                          <a:solidFill>
+                            <a:srgbClr val="D1D5DB"/>
+                          </a:solidFill>
+                          <a:prstDash val="solid"/>
+                          <a:round/>
+                          <a:headEnd type="none" w="med" len="med"/>
+                          <a:tailEnd type="none" w="med" len="med"/>
+                        </a:lnR>
+                        <a:lnT w="6350" cap="flat" cmpd="sng" algn="ctr">
+                          <a:solidFill>
+                            <a:srgbClr val="D1D5DB"/>
+                          </a:solidFill>
+                          <a:prstDash val="solid"/>
+                          <a:round/>
+                          <a:headEnd type="none" w="med" len="med"/>
+                          <a:tailEnd type="none" w="med" len="med"/>
+                        </a:lnT>
+                        <a:lnB w="6350" cap="flat" cmpd="sng" algn="ctr">
+                          <a:solidFill>
+                            <a:srgbClr val="D1D5DB"/>
+                          </a:solidFill>
+                          <a:prstDash val="solid"/>
+                          <a:round/>
+                          <a:headEnd type="none" w="med" len="med"/>
+                          <a:tailEnd type="none" w="med" len="med"/>
+                        </a:lnB>
+                      </a:tcPr>
+                    </a:tc>
+                    <a:tc>
+                      <a:txBody>
+                        <a:bodyPr/>
+                        <a:lstStyle/>
+                        <a:p>
+                          <a:pPr marL="0" indent="0">
+                            <a:buNone/>
+                          </a:pPr>
+                          <a:r>
+                            <a:rPr lang="en-US" sz="1200" dirty="0">
+                              <a:solidFill>
+                                <a:srgbClr val="000000"/>
+                              </a:solidFill>
+                              <a:latin typeface="Arial" pitchFamily="34" charset="0"/>
+                              <a:ea typeface="Arial" pitchFamily="34" charset="-122"/>
+                              <a:cs typeface="Arial" pitchFamily="34" charset="-120"/>
+                            </a:rPr>
+                            <a:t>LiDAR measures distance from position</a:t>
+                          </a:r>
+                          <a:endParaRPr lang="en-US" sz="1200" dirty="0">
+                            <a:latin typeface="Arial" charset="0"/>
+                            <a:ea typeface="Arial" charset="0"/>
+                            <a:cs typeface="Arial" charset="0"/>
+                          </a:endParaRPr>
+                        </a:p>
+                      </a:txBody>
+                      <a:tcPr>
+                        <a:lnL w="6350" cap="flat" cmpd="sng" algn="ctr">
+                          <a:solidFill>
+                            <a:srgbClr val="D1D5DB"/>
+                          </a:solidFill>
+                          <a:prstDash val="solid"/>
+                          <a:round/>
+                          <a:headEnd type="none" w="med" len="med"/>
+                          <a:tailEnd type="none" w="med" len="med"/>
+                        </a:lnL>
+                        <a:lnR w="6350" cap="flat" cmpd="sng" algn="ctr">
+                          <a:solidFill>
+                            <a:srgbClr val="D1D5DB"/>
+                          </a:solidFill>
+                          <a:prstDash val="solid"/>
+                          <a:round/>
+                          <a:headEnd type="none" w="med" len="med"/>
+                          <a:tailEnd type="none" w="med" len="med"/>
+                        </a:lnR>
+                        <a:lnT w="6350" cap="flat" cmpd="sng" algn="ctr">
+                          <a:solidFill>
+                            <a:srgbClr val="D1D5DB"/>
+                          </a:solidFill>
+                          <a:prstDash val="solid"/>
+                          <a:round/>
+                          <a:headEnd type="none" w="med" len="med"/>
+                          <a:tailEnd type="none" w="med" len="med"/>
+                        </a:lnT>
+                        <a:lnB w="6350" cap="flat" cmpd="sng" algn="ctr">
+                          <a:solidFill>
+                            <a:srgbClr val="D1D5DB"/>
+                          </a:solidFill>
+                          <a:prstDash val="solid"/>
+                          <a:round/>
+                          <a:headEnd type="none" w="med" len="med"/>
+                          <a:tailEnd type="none" w="med" len="med"/>
+                        </a:lnB>
+                      </a:tcPr>
+                    </a:tc>
+                    <a:extLst>
+                      <a:ext uri="{0D108BD9-81ED-4DB2-BD59-A6C34878D82A}">
+                        <a16:rowId xmlns:a16="http://schemas.microsoft.com/office/drawing/2014/main" val="10003"/>
+                      </a:ext>
+                    </a:extLst>
+                  </a:tr>
+                  <a:tr h="274320">
+                    <a:tc>
+                      <a:txBody>
+                        <a:bodyPr/>
+                        <a:lstStyle/>
+                        <a:p>
+                          <a:pPr marL="0" indent="0">
+                            <a:buNone/>
+                          </a:pPr>
+                          <a:r>
+                            <a:rPr lang="en-US" sz="1200" dirty="0">
+                              <a:solidFill>
+                                <a:srgbClr val="000000"/>
+                              </a:solidFill>
+                              <a:latin typeface="Arial" pitchFamily="34" charset="0"/>
+                              <a:ea typeface="Arial" pitchFamily="34" charset="-122"/>
+                              <a:cs typeface="Arial" pitchFamily="34" charset="-120"/>
+                            </a:rPr>
+                            <a:t>Q</a:t>
+                          </a:r>
+                          <a:endParaRPr lang="en-US" sz="1200" dirty="0">
+                            <a:latin typeface="Arial" charset="0"/>
+                            <a:ea typeface="Arial" charset="0"/>
+                            <a:cs typeface="Arial" charset="0"/>
+                          </a:endParaRPr>
+                        </a:p>
+                      </a:txBody>
+                      <a:tcPr>
+                        <a:lnL w="6350" cap="flat" cmpd="sng" algn="ctr">
+                          <a:solidFill>
+                            <a:srgbClr val="D1D5DB"/>
+                          </a:solidFill>
+                          <a:prstDash val="solid"/>
+                          <a:round/>
+                          <a:headEnd type="none" w="med" len="med"/>
+                          <a:tailEnd type="none" w="med" len="med"/>
+                        </a:lnL>
+                        <a:lnR w="6350" cap="flat" cmpd="sng" algn="ctr">
+                          <a:solidFill>
+                            <a:srgbClr val="D1D5DB"/>
+                          </a:solidFill>
+                          <a:prstDash val="solid"/>
+                          <a:round/>
+                          <a:headEnd type="none" w="med" len="med"/>
+                          <a:tailEnd type="none" w="med" len="med"/>
+                        </a:lnR>
+                        <a:lnT w="6350" cap="flat" cmpd="sng" algn="ctr">
+                          <a:solidFill>
+                            <a:srgbClr val="D1D5DB"/>
+                          </a:solidFill>
+                          <a:prstDash val="solid"/>
+                          <a:round/>
+                          <a:headEnd type="none" w="med" len="med"/>
+                          <a:tailEnd type="none" w="med" len="med"/>
+                        </a:lnT>
+                        <a:lnB w="6350" cap="flat" cmpd="sng" algn="ctr">
+                          <a:solidFill>
+                            <a:srgbClr val="D1D5DB"/>
+                          </a:solidFill>
+                          <a:prstDash val="solid"/>
+                          <a:round/>
+                          <a:headEnd type="none" w="med" len="med"/>
+                          <a:tailEnd type="none" w="med" len="med"/>
+                        </a:lnB>
+                      </a:tcPr>
+                    </a:tc>
+                    <a:tc>
+                      <a:txBody>
+                        <a:bodyPr/>
+                        <a:lstStyle/>
+                        <a:p>
+                          <a:pPr marL="0" indent="0">
+                            <a:buNone/>
+                          </a:pPr>
+                          <a:r>
+                            <a:rPr lang="en-US" sz="1200" dirty="0">
+                              <a:solidFill>
+                                <a:srgbClr val="000000"/>
+                              </a:solidFill>
+                              <a:latin typeface="Arial" pitchFamily="34" charset="0"/>
+                              <a:ea typeface="Arial" pitchFamily="34" charset="-122"/>
+                              <a:cs typeface="Arial" pitchFamily="34" charset="-120"/>
+                            </a:rPr>
+                            <a:t>n×n</a:t>
+                          </a:r>
+                          <a:endParaRPr lang="en-US" sz="1200" dirty="0">
+                            <a:latin typeface="Arial" charset="0"/>
+                            <a:ea typeface="Arial" charset="0"/>
+                            <a:cs typeface="Arial" charset="0"/>
+                          </a:endParaRPr>
+                        </a:p>
+                      </a:txBody>
+                      <a:tcPr>
+                        <a:lnL w="6350" cap="flat" cmpd="sng" algn="ctr">
+                          <a:solidFill>
+                            <a:srgbClr val="D1D5DB"/>
+                          </a:solidFill>
+                          <a:prstDash val="solid"/>
+                          <a:round/>
+                          <a:headEnd type="none" w="med" len="med"/>
+                          <a:tailEnd type="none" w="med" len="med"/>
+                        </a:lnL>
+                        <a:lnR w="6350" cap="flat" cmpd="sng" algn="ctr">
+                          <a:solidFill>
+                            <a:srgbClr val="D1D5DB"/>
+                          </a:solidFill>
+                          <a:prstDash val="solid"/>
+                          <a:round/>
+                          <a:headEnd type="none" w="med" len="med"/>
+                          <a:tailEnd type="none" w="med" len="med"/>
+                        </a:lnR>
+                        <a:lnT w="6350" cap="flat" cmpd="sng" algn="ctr">
+                          <a:solidFill>
+                            <a:srgbClr val="D1D5DB"/>
+                          </a:solidFill>
+                          <a:prstDash val="solid"/>
+                          <a:round/>
+                          <a:headEnd type="none" w="med" len="med"/>
+                          <a:tailEnd type="none" w="med" len="med"/>
+                        </a:lnT>
+                        <a:lnB w="6350" cap="flat" cmpd="sng" algn="ctr">
+                          <a:solidFill>
+                            <a:srgbClr val="D1D5DB"/>
+                          </a:solidFill>
+                          <a:prstDash val="solid"/>
+                          <a:round/>
+                          <a:headEnd type="none" w="med" len="med"/>
+                          <a:tailEnd type="none" w="med" len="med"/>
+                        </a:lnB>
+                      </a:tcPr>
+                    </a:tc>
+                    <a:tc>
+                      <a:txBody>
+                        <a:bodyPr/>
+                        <a:lstStyle/>
+                        <a:p>
+                          <a:pPr marL="0" indent="0">
+                            <a:buNone/>
+                          </a:pPr>
+                          <a:r>
+                            <a:rPr lang="en-US" sz="1200" dirty="0">
+                              <a:solidFill>
+                                <a:srgbClr val="000000"/>
+                              </a:solidFill>
+                              <a:latin typeface="Arial" pitchFamily="34" charset="0"/>
+                              <a:ea typeface="Arial" pitchFamily="34" charset="-122"/>
+                              <a:cs typeface="Arial" pitchFamily="34" charset="-120"/>
+                            </a:rPr>
+                            <a:t>Process noise (motion uncertainty)</a:t>
+                          </a:r>
+                          <a:endParaRPr lang="en-US" sz="1200" dirty="0">
+                            <a:latin typeface="Arial" charset="0"/>
+                            <a:ea typeface="Arial" charset="0"/>
+                            <a:cs typeface="Arial" charset="0"/>
+                          </a:endParaRPr>
+                        </a:p>
+                      </a:txBody>
+                      <a:tcPr>
+                        <a:lnL w="6350" cap="flat" cmpd="sng" algn="ctr">
+                          <a:solidFill>
+                            <a:srgbClr val="D1D5DB"/>
+                          </a:solidFill>
+                          <a:prstDash val="solid"/>
+                          <a:round/>
+                          <a:headEnd type="none" w="med" len="med"/>
+                          <a:tailEnd type="none" w="med" len="med"/>
+                        </a:lnL>
+                        <a:lnR w="6350" cap="flat" cmpd="sng" algn="ctr">
+                          <a:solidFill>
+                            <a:srgbClr val="D1D5DB"/>
+                          </a:solidFill>
+                          <a:prstDash val="solid"/>
+                          <a:round/>
+                          <a:headEnd type="none" w="med" len="med"/>
+                          <a:tailEnd type="none" w="med" len="med"/>
+                        </a:lnR>
+                        <a:lnT w="6350" cap="flat" cmpd="sng" algn="ctr">
+                          <a:solidFill>
+                            <a:srgbClr val="D1D5DB"/>
+                          </a:solidFill>
+                          <a:prstDash val="solid"/>
+                          <a:round/>
+                          <a:headEnd type="none" w="med" len="med"/>
+                          <a:tailEnd type="none" w="med" len="med"/>
+                        </a:lnT>
+                        <a:lnB w="6350" cap="flat" cmpd="sng" algn="ctr">
+                          <a:solidFill>
+                            <a:srgbClr val="D1D5DB"/>
+                          </a:solidFill>
+                          <a:prstDash val="solid"/>
+                          <a:round/>
+                          <a:headEnd type="none" w="med" len="med"/>
+                          <a:tailEnd type="none" w="med" len="med"/>
+                        </a:lnB>
+                      </a:tcPr>
+                    </a:tc>
+                    <a:tc>
+                      <a:txBody>
+                        <a:bodyPr/>
+                        <a:lstStyle/>
+                        <a:p>
+                          <a:pPr marL="0" indent="0">
+                            <a:buNone/>
+                          </a:pPr>
+                          <a:r>
+                            <a:rPr lang="en-US" sz="1200" dirty="0">
+                              <a:solidFill>
+                                <a:srgbClr val="000000"/>
+                              </a:solidFill>
+                              <a:latin typeface="Arial" pitchFamily="34" charset="0"/>
+                              <a:ea typeface="Arial" pitchFamily="34" charset="-122"/>
+                              <a:cs typeface="Arial" pitchFamily="34" charset="-120"/>
+                            </a:rPr>
+                            <a:t>Wheel slip, motor noise</a:t>
+                          </a:r>
+                          <a:endParaRPr lang="en-US" sz="1200" dirty="0">
+                            <a:latin typeface="Arial" charset="0"/>
+                            <a:ea typeface="Arial" charset="0"/>
+                            <a:cs typeface="Arial" charset="0"/>
+                          </a:endParaRPr>
+                        </a:p>
+                      </a:txBody>
+                      <a:tcPr>
+                        <a:lnL w="6350" cap="flat" cmpd="sng" algn="ctr">
+                          <a:solidFill>
+                            <a:srgbClr val="D1D5DB"/>
+                          </a:solidFill>
+                          <a:prstDash val="solid"/>
+                          <a:round/>
+                          <a:headEnd type="none" w="med" len="med"/>
+                          <a:tailEnd type="none" w="med" len="med"/>
+                        </a:lnL>
+                        <a:lnR w="6350" cap="flat" cmpd="sng" algn="ctr">
+                          <a:solidFill>
+                            <a:srgbClr val="D1D5DB"/>
+                          </a:solidFill>
+                          <a:prstDash val="solid"/>
+                          <a:round/>
+                          <a:headEnd type="none" w="med" len="med"/>
+                          <a:tailEnd type="none" w="med" len="med"/>
+                        </a:lnR>
+                        <a:lnT w="6350" cap="flat" cmpd="sng" algn="ctr">
+                          <a:solidFill>
+                            <a:srgbClr val="D1D5DB"/>
+                          </a:solidFill>
+                          <a:prstDash val="solid"/>
+                          <a:round/>
+                          <a:headEnd type="none" w="med" len="med"/>
+                          <a:tailEnd type="none" w="med" len="med"/>
+                        </a:lnT>
+                        <a:lnB w="6350" cap="flat" cmpd="sng" algn="ctr">
+                          <a:solidFill>
+                            <a:srgbClr val="D1D5DB"/>
+                          </a:solidFill>
+                          <a:prstDash val="solid"/>
+                          <a:round/>
+                          <a:headEnd type="none" w="med" len="med"/>
+                          <a:tailEnd type="none" w="med" len="med"/>
+                        </a:lnB>
+                      </a:tcPr>
+                    </a:tc>
+                    <a:extLst>
+                      <a:ext uri="{0D108BD9-81ED-4DB2-BD59-A6C34878D82A}">
+                        <a16:rowId xmlns:a16="http://schemas.microsoft.com/office/drawing/2014/main" val="10004"/>
+                      </a:ext>
+                    </a:extLst>
+                  </a:tr>
+                  <a:tr h="289243">
+                    <a:tc>
+                      <a:txBody>
+                        <a:bodyPr/>
+                        <a:lstStyle/>
+                        <a:p>
+                          <a:pPr marL="0" indent="0">
+                            <a:buNone/>
+                          </a:pPr>
+                          <a:r>
+                            <a:rPr lang="en-US" sz="1200" dirty="0">
+                              <a:solidFill>
+                                <a:srgbClr val="000000"/>
+                              </a:solidFill>
+                              <a:latin typeface="Arial" pitchFamily="34" charset="0"/>
+                              <a:ea typeface="Arial" pitchFamily="34" charset="-122"/>
+                              <a:cs typeface="Arial" pitchFamily="34" charset="-120"/>
+                            </a:rPr>
+                            <a:t>R</a:t>
+                          </a:r>
+                          <a:endParaRPr lang="en-US" sz="1200" dirty="0">
+                            <a:latin typeface="Arial" charset="0"/>
+                            <a:ea typeface="Arial" charset="0"/>
+                            <a:cs typeface="Arial" charset="0"/>
+                          </a:endParaRPr>
+                        </a:p>
+                      </a:txBody>
+                      <a:tcPr>
+                        <a:lnL w="6350" cap="flat" cmpd="sng" algn="ctr">
+                          <a:solidFill>
+                            <a:srgbClr val="D1D5DB"/>
+                          </a:solidFill>
+                          <a:prstDash val="solid"/>
+                          <a:round/>
+                          <a:headEnd type="none" w="med" len="med"/>
+                          <a:tailEnd type="none" w="med" len="med"/>
+                        </a:lnL>
+                        <a:lnR w="6350" cap="flat" cmpd="sng" algn="ctr">
+                          <a:solidFill>
+                            <a:srgbClr val="D1D5DB"/>
+                          </a:solidFill>
+                          <a:prstDash val="solid"/>
+                          <a:round/>
+                          <a:headEnd type="none" w="med" len="med"/>
+                          <a:tailEnd type="none" w="med" len="med"/>
+                        </a:lnR>
+                        <a:lnT w="6350" cap="flat" cmpd="sng" algn="ctr">
+                          <a:solidFill>
+                            <a:srgbClr val="D1D5DB"/>
+                          </a:solidFill>
+                          <a:prstDash val="solid"/>
+                          <a:round/>
+                          <a:headEnd type="none" w="med" len="med"/>
+                          <a:tailEnd type="none" w="med" len="med"/>
+                        </a:lnT>
+                        <a:lnB w="6350" cap="flat" cmpd="sng" algn="ctr">
+                          <a:solidFill>
+                            <a:srgbClr val="D1D5DB"/>
+                          </a:solidFill>
+                          <a:prstDash val="solid"/>
+                          <a:round/>
+                          <a:headEnd type="none" w="med" len="med"/>
+                          <a:tailEnd type="none" w="med" len="med"/>
+                        </a:lnB>
+                      </a:tcPr>
+                    </a:tc>
+                    <a:tc>
+                      <a:txBody>
+                        <a:bodyPr/>
+                        <a:lstStyle/>
+                        <a:p>
+                          <a:pPr marL="0" indent="0">
+                            <a:buNone/>
+                          </a:pPr>
+                          <a:r>
+                            <a:rPr lang="en-US" sz="1200" dirty="0">
+                              <a:solidFill>
+                                <a:srgbClr val="000000"/>
+                              </a:solidFill>
+                              <a:latin typeface="Arial" pitchFamily="34" charset="0"/>
+                              <a:ea typeface="Arial" pitchFamily="34" charset="-122"/>
+                              <a:cs typeface="Arial" pitchFamily="34" charset="-120"/>
+                            </a:rPr>
+                            <a:t>k×k</a:t>
+                          </a:r>
+                          <a:endParaRPr lang="en-US" sz="1200" dirty="0">
+                            <a:latin typeface="Arial" charset="0"/>
+                            <a:ea typeface="Arial" charset="0"/>
+                            <a:cs typeface="Arial" charset="0"/>
+                          </a:endParaRPr>
+                        </a:p>
+                      </a:txBody>
+                      <a:tcPr>
+                        <a:lnL w="6350" cap="flat" cmpd="sng" algn="ctr">
+                          <a:solidFill>
+                            <a:srgbClr val="D1D5DB"/>
+                          </a:solidFill>
+                          <a:prstDash val="solid"/>
+                          <a:round/>
+                          <a:headEnd type="none" w="med" len="med"/>
+                          <a:tailEnd type="none" w="med" len="med"/>
+                        </a:lnL>
+                        <a:lnR w="6350" cap="flat" cmpd="sng" algn="ctr">
+                          <a:solidFill>
+                            <a:srgbClr val="D1D5DB"/>
+                          </a:solidFill>
+                          <a:prstDash val="solid"/>
+                          <a:round/>
+                          <a:headEnd type="none" w="med" len="med"/>
+                          <a:tailEnd type="none" w="med" len="med"/>
+                        </a:lnR>
+                        <a:lnT w="6350" cap="flat" cmpd="sng" algn="ctr">
+                          <a:solidFill>
+                            <a:srgbClr val="D1D5DB"/>
+                          </a:solidFill>
+                          <a:prstDash val="solid"/>
+                          <a:round/>
+                          <a:headEnd type="none" w="med" len="med"/>
+                          <a:tailEnd type="none" w="med" len="med"/>
+                        </a:lnT>
+                        <a:lnB w="6350" cap="flat" cmpd="sng" algn="ctr">
+                          <a:solidFill>
+                            <a:srgbClr val="D1D5DB"/>
+                          </a:solidFill>
+                          <a:prstDash val="solid"/>
+                          <a:round/>
+                          <a:headEnd type="none" w="med" len="med"/>
+                          <a:tailEnd type="none" w="med" len="med"/>
+                        </a:lnB>
+                      </a:tcPr>
+                    </a:tc>
+                    <a:tc>
+                      <a:txBody>
+                        <a:bodyPr/>
+                        <a:lstStyle/>
+                        <a:p>
+                          <a:pPr marL="0" indent="0">
+                            <a:buNone/>
+                          </a:pPr>
+                          <a:r>
+                            <a:rPr lang="en-US" sz="1200" dirty="0">
+                              <a:solidFill>
+                                <a:srgbClr val="000000"/>
+                              </a:solidFill>
+                              <a:latin typeface="Arial" pitchFamily="34" charset="0"/>
+                              <a:ea typeface="Arial" pitchFamily="34" charset="-122"/>
+                              <a:cs typeface="Arial" pitchFamily="34" charset="-120"/>
+                            </a:rPr>
+                            <a:t>Measurement noise (sensor uncertainty)</a:t>
+                          </a:r>
+                          <a:endParaRPr lang="en-US" sz="1200" dirty="0">
+                            <a:latin typeface="Arial" charset="0"/>
+                            <a:ea typeface="Arial" charset="0"/>
+                            <a:cs typeface="Arial" charset="0"/>
+                          </a:endParaRPr>
+                        </a:p>
+                      </a:txBody>
+                      <a:tcPr>
+                        <a:lnL w="6350" cap="flat" cmpd="sng" algn="ctr">
+                          <a:solidFill>
+                            <a:srgbClr val="D1D5DB"/>
+                          </a:solidFill>
+                          <a:prstDash val="solid"/>
+                          <a:round/>
+                          <a:headEnd type="none" w="med" len="med"/>
+                          <a:tailEnd type="none" w="med" len="med"/>
+                        </a:lnL>
+                        <a:lnR w="6350" cap="flat" cmpd="sng" algn="ctr">
+                          <a:solidFill>
+                            <a:srgbClr val="D1D5DB"/>
+                          </a:solidFill>
+                          <a:prstDash val="solid"/>
+                          <a:round/>
+                          <a:headEnd type="none" w="med" len="med"/>
+                          <a:tailEnd type="none" w="med" len="med"/>
+                        </a:lnR>
+                        <a:lnT w="6350" cap="flat" cmpd="sng" algn="ctr">
+                          <a:solidFill>
+                            <a:srgbClr val="D1D5DB"/>
+                          </a:solidFill>
+                          <a:prstDash val="solid"/>
+                          <a:round/>
+                          <a:headEnd type="none" w="med" len="med"/>
+                          <a:tailEnd type="none" w="med" len="med"/>
+                        </a:lnT>
+                        <a:lnB w="6350" cap="flat" cmpd="sng" algn="ctr">
+                          <a:solidFill>
+                            <a:srgbClr val="D1D5DB"/>
+                          </a:solidFill>
+                          <a:prstDash val="solid"/>
+                          <a:round/>
+                          <a:headEnd type="none" w="med" len="med"/>
+                          <a:tailEnd type="none" w="med" len="med"/>
+                        </a:lnB>
+                      </a:tcPr>
+                    </a:tc>
+                    <a:tc>
+                      <a:txBody>
+                        <a:bodyPr/>
+                        <a:lstStyle/>
+                        <a:p>
+                          <a:endParaRPr lang="en-US"/>
+                        </a:p>
+                      </a:txBody>
+                      <a:tcPr>
+                        <a:lnL w="6350" cap="flat" cmpd="sng" algn="ctr">
+                          <a:solidFill>
+                            <a:srgbClr val="D1D5DB"/>
+                          </a:solidFill>
+                          <a:prstDash val="solid"/>
+                          <a:round/>
+                          <a:headEnd type="none" w="med" len="med"/>
+                          <a:tailEnd type="none" w="med" len="med"/>
+                        </a:lnL>
+                        <a:lnR w="6350" cap="flat" cmpd="sng" algn="ctr">
+                          <a:solidFill>
+                            <a:srgbClr val="D1D5DB"/>
+                          </a:solidFill>
+                          <a:prstDash val="solid"/>
+                          <a:round/>
+                          <a:headEnd type="none" w="med" len="med"/>
+                          <a:tailEnd type="none" w="med" len="med"/>
+                        </a:lnR>
+                        <a:lnT w="6350" cap="flat" cmpd="sng" algn="ctr">
+                          <a:solidFill>
+                            <a:srgbClr val="D1D5DB"/>
+                          </a:solidFill>
+                          <a:prstDash val="solid"/>
+                          <a:round/>
+                          <a:headEnd type="none" w="med" len="med"/>
+                          <a:tailEnd type="none" w="med" len="med"/>
+                        </a:lnT>
+                        <a:lnB w="6350" cap="flat" cmpd="sng" algn="ctr">
+                          <a:solidFill>
+                            <a:srgbClr val="D1D5DB"/>
+                          </a:solidFill>
+                          <a:prstDash val="solid"/>
+                          <a:round/>
+                          <a:headEnd type="none" w="med" len="med"/>
+                          <a:tailEnd type="none" w="med" len="med"/>
+                        </a:lnB>
+                        <a:blipFill>
+                          <a:blip r:embed="rId5"/>
+                          <a:stretch>
+                            <a:fillRect l="-124127" t="-470833" r="-317" b="-8333"/>
+                          </a:stretch>
+                        </a:blipFill>
+                      </a:tcPr>
+                    </a:tc>
+                    <a:extLst>
+                      <a:ext uri="{0D108BD9-81ED-4DB2-BD59-A6C34878D82A}">
+                        <a16:rowId xmlns:a16="http://schemas.microsoft.com/office/drawing/2014/main" val="10005"/>
+                      </a:ext>
+                    </a:extLst>
+                  </a:tr>
+                </a:tbl>
+              </a:graphicData>
+            </a:graphic>
+          </p:graphicFrame>
+        </mc:Fallback>
+      </mc:AlternateContent>
     </p:spTree>
   </p:cSld>
   <p:clrMapOvr>
@@ -27164,7 +29866,18 @@
                               <a:ea typeface="Arial" pitchFamily="34" charset="-122"/>
                               <a:cs typeface="Arial" pitchFamily="34" charset="-120"/>
                             </a:rPr>
-                            <m:t>−1</m:t>
+                            <m:t>−</m:t>
+                          </m:r>
+                          <m:r>
+                            <a:rPr lang="en-US" sz="1800" b="1" i="1" dirty="0" smtClean="0">
+                              <a:solidFill>
+                                <a:srgbClr val="1E3A5F"/>
+                              </a:solidFill>
+                              <a:latin typeface="Cambria Math" panose="02040503050406030204" pitchFamily="18" charset="0"/>
+                              <a:ea typeface="Arial" pitchFamily="34" charset="-122"/>
+                              <a:cs typeface="Arial" pitchFamily="34" charset="-120"/>
+                            </a:rPr>
+                            <m:t>1</m:t>
                           </m:r>
                         </m:sup>
                       </m:sSup>
@@ -34338,9 +37051,8 @@
             <a:endParaRPr lang="en-US" sz="1200" dirty="0"/>
           </a:p>
           <a:p>
-            <a:pPr marL="342900" indent="-342900">
+            <a:pPr>
               <a:buSzPct val="100000"/>
-              <a:buChar char="•"/>
             </a:pPr>
             <a:r>
               <a:rPr lang="en-US" sz="1200" dirty="0">
@@ -34351,7 +37063,7 @@
                 <a:ea typeface="Arial" pitchFamily="34" charset="-122"/>
                 <a:cs typeface="Arial" pitchFamily="34" charset="-120"/>
               </a:rPr>
-              <a:t>in unknown location.</a:t>
+              <a:t>	in unknown location.</a:t>
             </a:r>
             <a:endParaRPr lang="en-US" sz="1200" dirty="0"/>
           </a:p>
@@ -34579,9 +37291,8 @@
             <a:endParaRPr lang="en-US" sz="1200" dirty="0"/>
           </a:p>
           <a:p>
-            <a:pPr marL="342900" indent="-342900">
+            <a:pPr>
               <a:buSzPct val="100000"/>
-              <a:buChar char="•"/>
             </a:pPr>
             <a:r>
               <a:rPr lang="en-US" sz="1200" dirty="0">
@@ -34592,7 +37303,7 @@
                 <a:ea typeface="Arial" pitchFamily="34" charset="-122"/>
                 <a:cs typeface="Arial" pitchFamily="34" charset="-120"/>
               </a:rPr>
-              <a:t>and moves the robot.</a:t>
+              <a:t>	and moves the robot.</a:t>
             </a:r>
             <a:endParaRPr lang="en-US" sz="1200" dirty="0"/>
           </a:p>
@@ -38473,8 +41184,8 @@
         </p:nvSpPr>
         <p:spPr>
           <a:xfrm>
-            <a:off x="457200" y="3749040"/>
-            <a:ext cx="2286000" cy="228600"/>
+            <a:off x="457199" y="3749040"/>
+            <a:ext cx="2682949" cy="228600"/>
           </a:xfrm>
           <a:prstGeom prst="rect">
             <a:avLst/>
@@ -39697,7 +42408,7 @@
                 <a:ea typeface="Arial" pitchFamily="34" charset="-122"/>
                 <a:cs typeface="Arial" pitchFamily="34" charset="-120"/>
               </a:rPr>
-              <a:t>"The probability of A, GIVEN that we know B is true"</a:t>
+              <a:t>The probability of A, GIVEN that we know “B is true"</a:t>
             </a:r>
             <a:endParaRPr lang="en-US" sz="1400" dirty="0"/>
           </a:p>
@@ -39711,8 +42422,8 @@
         </p:nvSpPr>
         <p:spPr>
           <a:xfrm>
-            <a:off x="274320" y="1097280"/>
-            <a:ext cx="8595360" cy="822960"/>
+            <a:off x="274320" y="1028700"/>
+            <a:ext cx="8595360" cy="891540"/>
           </a:xfrm>
           <a:prstGeom prst="rect">
             <a:avLst/>
@@ -39740,7 +42451,7 @@
             </p:nvSpPr>
             <p:spPr>
               <a:xfrm>
-                <a:off x="411480" y="1143000"/>
+                <a:off x="695015" y="1071163"/>
                 <a:ext cx="8321040" cy="345643"/>
               </a:xfrm>
               <a:prstGeom prst="rect">
@@ -39754,13 +42465,13 @@
               <a:lstStyle/>
               <a:p>
                 <a:r>
-                  <a:rPr lang="en-US" sz="1400" b="1" dirty="0">
+                  <a:rPr lang="en-US" sz="1200" b="1" dirty="0">
                     <a:solidFill>
                       <a:srgbClr val="1E3A5F"/>
                     </a:solidFill>
-                    <a:latin typeface="Arial" pitchFamily="34" charset="0"/>
+                    <a:latin typeface="Arial" panose="020B0604020202020204" pitchFamily="34" charset="0"/>
                     <a:ea typeface="Arial" pitchFamily="34" charset="-122"/>
-                    <a:cs typeface="Arial" pitchFamily="34" charset="-120"/>
+                    <a:cs typeface="Arial" panose="020B0604020202020204" pitchFamily="34" charset="0"/>
                   </a:rPr>
                   <a:t>P(A | B) = </a:t>
                 </a:r>
@@ -39769,7 +42480,7 @@
                     <m:f>
                       <m:fPr>
                         <m:ctrlPr>
-                          <a:rPr lang="en-US" sz="1400" b="1" i="1" dirty="0" smtClean="0">
+                          <a:rPr lang="en-US" sz="1200" b="1" i="1" dirty="0" smtClean="0">
                             <a:solidFill>
                               <a:srgbClr val="1E3A5F"/>
                             </a:solidFill>
@@ -39781,7 +42492,7 @@
                       </m:fPr>
                       <m:num>
                         <m:r>
-                          <a:rPr lang="en-US" sz="1400" b="1" i="1" dirty="0" smtClean="0">
+                          <a:rPr lang="en-US" sz="1200" b="1" i="1" dirty="0" smtClean="0">
                             <a:solidFill>
                               <a:srgbClr val="1E3A5F"/>
                             </a:solidFill>
@@ -39794,7 +42505,7 @@
                         <m:d>
                           <m:dPr>
                             <m:ctrlPr>
-                              <a:rPr lang="en-US" sz="1400" b="1" i="1" dirty="0" smtClean="0">
+                              <a:rPr lang="en-US" sz="1200" b="1" i="1" dirty="0" smtClean="0">
                                 <a:solidFill>
                                   <a:srgbClr val="1E3A5F"/>
                                 </a:solidFill>
@@ -39806,7 +42517,7 @@
                           </m:dPr>
                           <m:e>
                             <m:r>
-                              <a:rPr lang="en-US" sz="1400" b="1" i="1" dirty="0" smtClean="0">
+                              <a:rPr lang="en-US" sz="1200" b="1" i="1" dirty="0" smtClean="0">
                                 <a:solidFill>
                                   <a:srgbClr val="1E3A5F"/>
                                 </a:solidFill>
@@ -39817,7 +42528,7 @@
                               <m:t>𝑨</m:t>
                             </m:r>
                             <m:r>
-                              <a:rPr lang="en-US" sz="1400" b="1" i="1" dirty="0" smtClean="0">
+                              <a:rPr lang="en-US" sz="1200" b="1" i="1" dirty="0" smtClean="0">
                                 <a:solidFill>
                                   <a:srgbClr val="1E3A5F"/>
                                 </a:solidFill>
@@ -39828,7 +42539,7 @@
                               <m:t>, </m:t>
                             </m:r>
                             <m:r>
-                              <a:rPr lang="en-US" sz="1400" b="1" i="1" dirty="0" smtClean="0">
+                              <a:rPr lang="en-US" sz="1200" b="1" i="1" dirty="0" smtClean="0">
                                 <a:solidFill>
                                   <a:srgbClr val="1E3A5F"/>
                                 </a:solidFill>
@@ -39843,7 +42554,7 @@
                       </m:num>
                       <m:den>
                         <m:r>
-                          <a:rPr lang="en-US" sz="1400" b="1" i="1" dirty="0">
+                          <a:rPr lang="en-US" sz="1200" b="1" i="1" dirty="0">
                             <a:solidFill>
                               <a:srgbClr val="1E3A5F"/>
                             </a:solidFill>
@@ -39856,7 +42567,7 @@
                         <m:d>
                           <m:dPr>
                             <m:ctrlPr>
-                              <a:rPr lang="en-US" sz="1400" b="1" i="1" dirty="0">
+                              <a:rPr lang="en-US" sz="1200" b="1" i="1" dirty="0">
                                 <a:solidFill>
                                   <a:srgbClr val="1E3A5F"/>
                                 </a:solidFill>
@@ -39868,7 +42579,7 @@
                           </m:dPr>
                           <m:e>
                             <m:r>
-                              <a:rPr lang="en-US" sz="1400" b="1" i="1" dirty="0">
+                              <a:rPr lang="en-US" sz="1200" b="1" i="1" dirty="0">
                                 <a:solidFill>
                                   <a:srgbClr val="1E3A5F"/>
                                 </a:solidFill>
@@ -39884,7 +42595,10 @@
                     </m:f>
                   </m:oMath>
                 </a14:m>
-                <a:endParaRPr lang="en-US" sz="1400" dirty="0"/>
+                <a:endParaRPr lang="en-US" sz="1200" dirty="0">
+                  <a:latin typeface="Arial" panose="020B0604020202020204" pitchFamily="34" charset="0"/>
+                  <a:cs typeface="Arial" panose="020B0604020202020204" pitchFamily="34" charset="0"/>
+                </a:endParaRPr>
               </a:p>
             </p:txBody>
           </p:sp>
@@ -39900,7 +42614,7 @@
             </p:nvSpPr>
             <p:spPr>
               <a:xfrm>
-                <a:off x="411480" y="1143000"/>
+                <a:off x="695015" y="1071163"/>
                 <a:ext cx="8321040" cy="345643"/>
               </a:xfrm>
               <a:prstGeom prst="rect">
@@ -39909,7 +42623,7 @@
               <a:blipFill>
                 <a:blip r:embed="rId3"/>
                 <a:stretch>
-                  <a:fillRect l="-220" b="-10714"/>
+                  <a:fillRect b="-1786"/>
                 </a:stretch>
               </a:blipFill>
               <a:ln/>
@@ -39994,7 +42708,7 @@
         <p:spPr>
           <a:xfrm>
             <a:off x="274320" y="2103120"/>
-            <a:ext cx="8595360" cy="2011680"/>
+            <a:ext cx="8595360" cy="2651760"/>
           </a:xfrm>
           <a:prstGeom prst="rect">
             <a:avLst/>
@@ -40060,7 +42774,7 @@
         <p:spPr>
           <a:xfrm>
             <a:off x="457200" y="2468880"/>
-            <a:ext cx="8229600" cy="1554480"/>
+            <a:ext cx="8412480" cy="1554480"/>
           </a:xfrm>
           <a:prstGeom prst="rect">
             <a:avLst/>
@@ -40084,7 +42798,8 @@
                 <a:ea typeface="Arial" pitchFamily="34" charset="-122"/>
                 <a:cs typeface="Arial" pitchFamily="34" charset="-120"/>
               </a:rPr>
-              <a:t>Robot is near a door or in a hallway (two possible locations).
+              <a:t>Robot is near “a door” or “in a hallway” (two possible locations).
+Camera sensor reads "dark" (low light).
 </a:t>
             </a:r>
             <a:endParaRPr lang="en-US" sz="1200" dirty="0"/>
@@ -40094,41 +42809,17 @@
               <a:buNone/>
             </a:pPr>
             <a:r>
-              <a:rPr lang="en-US" sz="1200" dirty="0">
-                <a:solidFill>
-                  <a:srgbClr val="1F2937"/>
-                </a:solidFill>
-                <a:latin typeface="Arial" pitchFamily="34" charset="0"/>
-                <a:ea typeface="Arial" pitchFamily="34" charset="-122"/>
-                <a:cs typeface="Arial" pitchFamily="34" charset="-120"/>
-              </a:rPr>
-              <a:t>Camera sensor reads "dark" (low light).
+              <a:rPr lang="en-US" sz="1200" b="1" dirty="0">
+                <a:solidFill>
+                  <a:srgbClr val="8B5CF6"/>
+                </a:solidFill>
+                <a:latin typeface="Arial" pitchFamily="34" charset="0"/>
+                <a:ea typeface="Arial" pitchFamily="34" charset="-122"/>
+                <a:cs typeface="Arial" pitchFamily="34" charset="-120"/>
+              </a:rPr>
+              <a:t>P(dark | at door) = 0.7    (The probability of dark given the robot near the door is 0.7. Doors are often in dim areas)
 </a:t>
             </a:r>
-            <a:endParaRPr lang="en-US" sz="1200" dirty="0"/>
-          </a:p>
-          <a:p>
-            <a:pPr marL="0" indent="0">
-              <a:buNone/>
-            </a:pPr>
-            <a:r>
-              <a:rPr lang="en-US" sz="1200" b="1" dirty="0">
-                <a:solidFill>
-                  <a:srgbClr val="8B5CF6"/>
-                </a:solidFill>
-                <a:latin typeface="Arial" pitchFamily="34" charset="0"/>
-                <a:ea typeface="Arial" pitchFamily="34" charset="-122"/>
-                <a:cs typeface="Arial" pitchFamily="34" charset="-120"/>
-              </a:rPr>
-              <a:t>P(dark | at door) = 0.7    (doors are often in dim areas)
-</a:t>
-            </a:r>
-            <a:endParaRPr lang="en-US" sz="1200" dirty="0"/>
-          </a:p>
-          <a:p>
-            <a:pPr marL="0" indent="0">
-              <a:buNone/>
-            </a:pPr>
             <a:r>
               <a:rPr lang="en-US" sz="1200" b="1" dirty="0">
                 <a:solidFill>
